--- a/presentation_wind_turbine_ids.pptx
+++ b/presentation_wind_turbine_ids.pptx
@@ -17,7 +17,6 @@
     <p:sldId id="265" r:id="rId16"/>
     <p:sldId id="266" r:id="rId17"/>
     <p:sldId id="267" r:id="rId18"/>
-    <p:sldId id="268" r:id="rId19"/>
   </p:sldIdLst>
   <p:sldSz cx="12191695" cy="6858000" type="screen4x3"/>
   <p:notesSz cx="6858000" cy="9144000"/>
@@ -3115,7 +3114,7 @@
             <a:avLst/>
           </a:prstGeom>
           <a:solidFill>
-            <a:srgbClr val="F8FAFC"/>
+            <a:srgbClr val="FFFFFF"/>
           </a:solidFill>
           <a:ln>
             <a:noFill/>
@@ -3145,14 +3144,102 @@
       </p:sp>
       <p:sp>
         <p:nvSpPr>
-          <p:cNvPr id="3" name="TextBox 2"/>
+          <p:cNvPr id="3" name="Rectangle 2"/>
+          <p:cNvSpPr/>
+          <p:nvPr/>
+        </p:nvSpPr>
+        <p:spPr>
+          <a:xfrm>
+            <a:off x="0" y="0"/>
+            <a:ext cx="12191695" cy="137160"/>
+          </a:xfrm>
+          <a:prstGeom prst="rect">
+            <a:avLst/>
+          </a:prstGeom>
+          <a:solidFill>
+            <a:srgbClr val="0284C7"/>
+          </a:solidFill>
+          <a:ln>
+            <a:noFill/>
+          </a:ln>
+        </p:spPr>
+        <p:style>
+          <a:lnRef idx="1">
+            <a:schemeClr val="accent1"/>
+          </a:lnRef>
+          <a:fillRef idx="3">
+            <a:schemeClr val="accent1"/>
+          </a:fillRef>
+          <a:effectRef idx="2">
+            <a:schemeClr val="accent1"/>
+          </a:effectRef>
+          <a:fontRef idx="minor">
+            <a:schemeClr val="lt1"/>
+          </a:fontRef>
+        </p:style>
+        <p:txBody>
+          <a:bodyPr rtlCol="0" anchor="ctr"/>
+          <a:lstStyle/>
+          <a:p>
+            <a:pPr algn="ctr"/>
+          </a:p>
+        </p:txBody>
+      </p:sp>
+      <p:sp>
+        <p:nvSpPr>
+          <p:cNvPr id="4" name="Rounded Rectangle 3"/>
+          <p:cNvSpPr/>
+          <p:nvPr/>
+        </p:nvSpPr>
+        <p:spPr>
+          <a:xfrm>
+            <a:off x="731520" y="914400"/>
+            <a:ext cx="10728655" cy="5120640"/>
+          </a:xfrm>
+          <a:prstGeom prst="roundRect">
+            <a:avLst/>
+          </a:prstGeom>
+          <a:solidFill>
+            <a:srgbClr val="F8FAFC"/>
+          </a:solidFill>
+          <a:ln w="25400">
+            <a:solidFill>
+              <a:srgbClr val="0284C7"/>
+            </a:solidFill>
+          </a:ln>
+        </p:spPr>
+        <p:style>
+          <a:lnRef idx="1">
+            <a:schemeClr val="accent1"/>
+          </a:lnRef>
+          <a:fillRef idx="3">
+            <a:schemeClr val="accent1"/>
+          </a:fillRef>
+          <a:effectRef idx="2">
+            <a:schemeClr val="accent1"/>
+          </a:effectRef>
+          <a:fontRef idx="minor">
+            <a:schemeClr val="lt1"/>
+          </a:fontRef>
+        </p:style>
+        <p:txBody>
+          <a:bodyPr rtlCol="0" anchor="ctr"/>
+          <a:lstStyle/>
+          <a:p>
+            <a:pPr algn="ctr"/>
+          </a:p>
+        </p:txBody>
+      </p:sp>
+      <p:sp>
+        <p:nvSpPr>
+          <p:cNvPr id="5" name="TextBox 4"/>
           <p:cNvSpPr txBox="1"/>
           <p:nvPr/>
         </p:nvSpPr>
         <p:spPr>
           <a:xfrm>
-            <a:off x="1097280" y="1645920"/>
-            <a:ext cx="10058400" cy="3657600"/>
+            <a:off x="1188720" y="1280160"/>
+            <a:ext cx="9784080" cy="4389120"/>
           </a:xfrm>
           <a:prstGeom prst="rect">
             <a:avLst/>
@@ -3167,24 +3254,29 @@
           <a:p>
             <a:pPr>
               <a:spcAft>
-                <a:spcPts val="1600"/>
+                <a:spcPts val="1400"/>
               </a:spcAft>
               <a:defRPr sz="1600" b="1">
                 <a:solidFill>
                   <a:srgbClr val="0284C7"/>
                 </a:solidFill>
-              </a:defRPr>
-            </a:pPr>
-            <a:r>
-              <a:t>WIND TURBINE CONDITION MONITORING</a:t>
-            </a:r>
-          </a:p>
-          <a:p>
-            <a:pPr>
+                <a:latin typeface="Segoe UI"/>
+              </a:defRPr>
+            </a:pPr>
+            <a:r>
+              <a:t>INDUSTRIAL DATA SCIENCE CASE STUDY</a:t>
+            </a:r>
+          </a:p>
+          <a:p>
+            <a:pPr>
+              <a:spcAft>
+                <a:spcPts val="1200"/>
+              </a:spcAft>
               <a:defRPr sz="4600" b="1">
                 <a:solidFill>
                   <a:srgbClr val="0F172A"/>
                 </a:solidFill>
+                <a:latin typeface="Segoe UI"/>
               </a:defRPr>
             </a:pPr>
             <a:r>
@@ -3193,32 +3285,98 @@
           </a:p>
           <a:p>
             <a:pPr>
-              <a:spcBef>
-                <a:spcPts val="1200"/>
-              </a:spcBef>
-              <a:spcAft>
-                <a:spcPts val="2800"/>
+              <a:spcAft>
+                <a:spcPts val="2600"/>
               </a:spcAft>
               <a:defRPr sz="2200">
                 <a:solidFill>
                   <a:srgbClr val="475569"/>
                 </a:solidFill>
-              </a:defRPr>
-            </a:pPr>
-            <a:r>
-              <a:t>How Physics, Machine Learning &amp; Explainable AI Spot Failures Weeks in Advance</a:t>
-            </a:r>
-          </a:p>
-          <a:p>
-            <a:pPr>
-              <a:defRPr sz="1600" b="1">
+                <a:latin typeface="Segoe UI"/>
+              </a:defRPr>
+            </a:pPr>
+            <a:r>
+              <a:t>How Physics, Machine Learning &amp; Explainable AI Spot Turbine Failures Weeks in Advance</a:t>
+            </a:r>
+          </a:p>
+          <a:p>
+            <a:pPr>
+              <a:spcAft>
+                <a:spcPts val="800"/>
+              </a:spcAft>
+              <a:defRPr sz="1800" b="1">
                 <a:solidFill>
                   <a:srgbClr val="1E3A8A"/>
                 </a:solidFill>
-              </a:defRPr>
-            </a:pPr>
-            <a:r>
-              <a:t>A Simplified Case Study: Foundations, Realized Approaches &amp; Alternative Paths</a:t>
+                <a:latin typeface="Segoe UI"/>
+              </a:defRPr>
+            </a:pPr>
+            <a:r>
+              <a:t>Key Results at a Glance:</a:t>
+            </a:r>
+          </a:p>
+          <a:p>
+            <a:pPr>
+              <a:spcAft>
+                <a:spcPts val="600"/>
+              </a:spcAft>
+              <a:defRPr sz="1600">
+                <a:solidFill>
+                  <a:srgbClr val="1E293B"/>
+                </a:solidFill>
+                <a:latin typeface="Segoe UI"/>
+              </a:defRPr>
+            </a:pPr>
+            <a:r>
+              <a:t>• 8 to 34 Days Early Warning before catastrophic breakdown across all key components.</a:t>
+            </a:r>
+          </a:p>
+          <a:p>
+            <a:pPr>
+              <a:spcAft>
+                <a:spcPts val="600"/>
+              </a:spcAft>
+              <a:defRPr sz="1600">
+                <a:solidFill>
+                  <a:srgbClr val="1E293B"/>
+                </a:solidFill>
+                <a:latin typeface="Segoe UI"/>
+              </a:defRPr>
+            </a:pPr>
+            <a:r>
+              <a:t>• 0.67-Second Machine Learning Training on 100,000 records (109 MB RAM, 0.83 AUC).</a:t>
+            </a:r>
+          </a:p>
+          <a:p>
+            <a:pPr>
+              <a:spcAft>
+                <a:spcPts val="600"/>
+              </a:spcAft>
+              <a:defRPr sz="1600">
+                <a:solidFill>
+                  <a:srgbClr val="1E293B"/>
+                </a:solidFill>
+                <a:latin typeface="Segoe UI"/>
+              </a:defRPr>
+            </a:pPr>
+            <a:r>
+              <a:t>• Zero Fake Data (No SMOTE hallucinations) — 100% genuine physical SCADA telemetry.</a:t>
+            </a:r>
+          </a:p>
+          <a:p>
+            <a:pPr>
+              <a:spcAft>
+                <a:spcPts val="600"/>
+              </a:spcAft>
+              <a:defRPr sz="1600">
+                <a:solidFill>
+                  <a:srgbClr val="1E293B"/>
+                </a:solidFill>
+                <a:latin typeface="Segoe UI"/>
+              </a:defRPr>
+            </a:pPr>
+            <a:r>
+              <a:t>• Explainable AI (SHAP &amp; LIME) directly pointing maintenance crews to failing bearings.</a:t>
             </a:r>
           </a:p>
         </p:txBody>
@@ -3256,7 +3414,7 @@
             <a:avLst/>
           </a:prstGeom>
           <a:solidFill>
-            <a:srgbClr val="F8FAFC"/>
+            <a:srgbClr val="FFFFFF"/>
           </a:solidFill>
           <a:ln>
             <a:noFill/>
@@ -3293,7 +3451,7 @@
         <p:spPr>
           <a:xfrm>
             <a:off x="731520" y="365760"/>
-            <a:ext cx="10698480" cy="365760"/>
+            <a:ext cx="10698480" cy="320040"/>
           </a:xfrm>
           <a:prstGeom prst="rect">
             <a:avLst/>
@@ -3307,14 +3465,15 @@
           <a:lstStyle/>
           <a:p>
             <a:pPr>
-              <a:defRPr sz="1300" b="1">
+              <a:defRPr sz="1400" b="1">
                 <a:solidFill>
                   <a:srgbClr val="0284C7"/>
                 </a:solidFill>
-              </a:defRPr>
-            </a:pPr>
-            <a:r>
-              <a:t>THEORETICAL CHALLENGE 4</a:t>
+                <a:latin typeface="Segoe UI"/>
+              </a:defRPr>
+            </a:pPr>
+            <a:r>
+              <a:t>STEP 9: BUSINESS ROI</a:t>
             </a:r>
           </a:p>
         </p:txBody>
@@ -3328,7 +3487,7 @@
         <p:spPr>
           <a:xfrm>
             <a:off x="731520" y="685800"/>
-            <a:ext cx="10698480" cy="640080"/>
+            <a:ext cx="10698480" cy="685800"/>
           </a:xfrm>
           <a:prstGeom prst="rect">
             <a:avLst/>
@@ -3342,14 +3501,15 @@
           <a:lstStyle/>
           <a:p>
             <a:pPr>
-              <a:defRPr sz="3000" b="1">
+              <a:defRPr sz="3200" b="1">
                 <a:solidFill>
                   <a:srgbClr val="0F172A"/>
                 </a:solidFill>
-              </a:defRPr>
-            </a:pPr>
-            <a:r>
-              <a:t>The Black-Box Trust Problem: SHAP &amp; LIME</a:t>
+                <a:latin typeface="Segoe UI"/>
+              </a:defRPr>
+            </a:pPr>
+            <a:r>
+              <a:t>The Money Story: Finding the Financial Sweet Spot</a:t>
             </a:r>
           </a:p>
         </p:txBody>
@@ -3362,7 +3522,7 @@
         </p:nvSpPr>
         <p:spPr>
           <a:xfrm>
-            <a:off x="731520" y="1325880"/>
+            <a:off x="731520" y="1371600"/>
             <a:ext cx="10698480" cy="411480"/>
           </a:xfrm>
           <a:prstGeom prst="rect">
@@ -3377,14 +3537,15 @@
           <a:lstStyle/>
           <a:p>
             <a:pPr>
-              <a:defRPr sz="1700">
+              <a:defRPr sz="1800">
                 <a:solidFill>
                   <a:srgbClr val="475569"/>
                 </a:solidFill>
-              </a:defRPr>
-            </a:pPr>
-            <a:r>
-              <a:t>Why operators reject unexplained alerts and how XAI proved physical fidelity</a:t>
+                <a:latin typeface="Segoe UI"/>
+              </a:defRPr>
+            </a:pPr>
+            <a:r>
+              <a:t>Why 50% thresholding is a multi-million-dollar mistake and how cost matrices save $4.5M</a:t>
             </a:r>
           </a:p>
         </p:txBody>
@@ -3398,17 +3559,17 @@
         <p:spPr>
           <a:xfrm>
             <a:off x="731520" y="1920240"/>
-            <a:ext cx="3328416" cy="4297680"/>
+            <a:ext cx="5212080" cy="4389120"/>
           </a:xfrm>
           <a:prstGeom prst="roundRect">
             <a:avLst/>
           </a:prstGeom>
           <a:solidFill>
-            <a:srgbClr val="FFFFFF"/>
+            <a:srgbClr val="F8FAFC"/>
           </a:solidFill>
           <a:ln w="19050">
             <a:solidFill>
-              <a:srgbClr val="E2E8F0"/>
+              <a:srgbClr val="DC2626"/>
             </a:solidFill>
           </a:ln>
         </p:spPr>
@@ -3442,8 +3603,8 @@
         </p:nvSpPr>
         <p:spPr>
           <a:xfrm>
-            <a:off x="914400" y="2103120"/>
-            <a:ext cx="2962656" cy="3931920"/>
+            <a:off x="1005840" y="2103120"/>
+            <a:ext cx="4663440" cy="4023360"/>
           </a:xfrm>
           <a:prstGeom prst="rect">
             <a:avLst/>
@@ -3460,59 +3621,79 @@
               <a:spcAft>
                 <a:spcPts val="1200"/>
               </a:spcAft>
-              <a:defRPr sz="2000" b="1">
-                <a:solidFill>
-                  <a:srgbClr val="1E3A8A"/>
-                </a:solidFill>
-              </a:defRPr>
-            </a:pPr>
-            <a:r>
-              <a:t>The Operator's Dilemma</a:t>
-            </a:r>
-          </a:p>
-          <a:p>
-            <a:pPr>
-              <a:spcAft>
-                <a:spcPts val="800"/>
-              </a:spcAft>
-              <a:defRPr sz="1500">
-                <a:solidFill>
-                  <a:srgbClr val="0F172A"/>
-                </a:solidFill>
-              </a:defRPr>
-            </a:pPr>
-            <a:r>
-              <a:t>• If an AI flags a turbine as '90% Risk' without explanation, maintenance crews will ignore it.</a:t>
-            </a:r>
-          </a:p>
-          <a:p>
-            <a:pPr>
-              <a:spcAft>
-                <a:spcPts val="800"/>
-              </a:spcAft>
-              <a:defRPr sz="1500">
-                <a:solidFill>
-                  <a:srgbClr val="0F172A"/>
-                </a:solidFill>
-              </a:defRPr>
-            </a:pPr>
-            <a:r>
-              <a:t>• Technicians must know WHICH component to inspect: the gearbox, the generator, or the transformer?</a:t>
-            </a:r>
-          </a:p>
-          <a:p>
-            <a:pPr>
-              <a:spcAft>
-                <a:spcPts val="800"/>
-              </a:spcAft>
-              <a:defRPr sz="1500">
-                <a:solidFill>
-                  <a:srgbClr val="0F172A"/>
-                </a:solidFill>
-              </a:defRPr>
-            </a:pPr>
-            <a:r>
-              <a:t>• Black box predictions create distrust and alert fatigue.</a:t>
+              <a:defRPr sz="2200" b="1">
+                <a:solidFill>
+                  <a:srgbClr val="DC2626"/>
+                </a:solidFill>
+                <a:latin typeface="Segoe UI"/>
+              </a:defRPr>
+            </a:pPr>
+            <a:r>
+              <a:t>The 40:1 Asymmetric Cost Reality</a:t>
+            </a:r>
+          </a:p>
+          <a:p>
+            <a:pPr>
+              <a:spcAft>
+                <a:spcPts val="1000"/>
+              </a:spcAft>
+              <a:defRPr sz="1600">
+                <a:solidFill>
+                  <a:srgbClr val="1E293B"/>
+                </a:solidFill>
+                <a:latin typeface="Segoe UI"/>
+              </a:defRPr>
+            </a:pPr>
+            <a:r>
+              <a:t>• Missed Failure (False Negative): $150,000 to $300,000+. Shattered gearbox, offshore vessel charter, 8 weeks lost power.</a:t>
+            </a:r>
+          </a:p>
+          <a:p>
+            <a:pPr>
+              <a:spcAft>
+                <a:spcPts val="1000"/>
+              </a:spcAft>
+              <a:defRPr sz="1600">
+                <a:solidFill>
+                  <a:srgbClr val="1E293B"/>
+                </a:solidFill>
+                <a:latin typeface="Segoe UI"/>
+              </a:defRPr>
+            </a:pPr>
+            <a:r>
+              <a:t>• False Alarm (False Positive): $3,500. Remote log diagnostics and routine technician inspection visit.</a:t>
+            </a:r>
+          </a:p>
+          <a:p>
+            <a:pPr>
+              <a:spcAft>
+                <a:spcPts val="1000"/>
+              </a:spcAft>
+              <a:defRPr sz="1600">
+                <a:solidFill>
+                  <a:srgbClr val="1E293B"/>
+                </a:solidFill>
+                <a:latin typeface="Segoe UI"/>
+              </a:defRPr>
+            </a:pPr>
+            <a:r>
+              <a:t>• Planned Repair (True Positive): $8,000. Uptower bearing replacement during scheduled calm weather window.</a:t>
+            </a:r>
+          </a:p>
+          <a:p>
+            <a:pPr>
+              <a:spcAft>
+                <a:spcPts val="1000"/>
+              </a:spcAft>
+              <a:defRPr sz="1600">
+                <a:solidFill>
+                  <a:srgbClr val="1E293B"/>
+                </a:solidFill>
+                <a:latin typeface="Segoe UI"/>
+              </a:defRPr>
+            </a:pPr>
+            <a:r>
+              <a:t>• CORE REALITY: Missing a breakdown is 40 TIMES MORE EXPENSIVE than sending a technician on a false alarm!</a:t>
             </a:r>
           </a:p>
         </p:txBody>
@@ -3525,157 +3706,14 @@
         </p:nvSpPr>
         <p:spPr>
           <a:xfrm>
-            <a:off x="4425696" y="1920240"/>
-            <a:ext cx="3328416" cy="4297680"/>
+            <a:off x="6217920" y="1920240"/>
+            <a:ext cx="5212080" cy="4389120"/>
           </a:xfrm>
           <a:prstGeom prst="roundRect">
             <a:avLst/>
           </a:prstGeom>
           <a:solidFill>
-            <a:srgbClr val="FFFFFF"/>
-          </a:solidFill>
-          <a:ln w="19050">
-            <a:solidFill>
-              <a:srgbClr val="0284C7"/>
-            </a:solidFill>
-          </a:ln>
-        </p:spPr>
-        <p:style>
-          <a:lnRef idx="1">
-            <a:schemeClr val="accent1"/>
-          </a:lnRef>
-          <a:fillRef idx="3">
-            <a:schemeClr val="accent1"/>
-          </a:fillRef>
-          <a:effectRef idx="2">
-            <a:schemeClr val="accent1"/>
-          </a:effectRef>
-          <a:fontRef idx="minor">
-            <a:schemeClr val="lt1"/>
-          </a:fontRef>
-        </p:style>
-        <p:txBody>
-          <a:bodyPr rtlCol="0" anchor="ctr"/>
-          <a:lstStyle/>
-          <a:p>
-            <a:pPr algn="ctr"/>
-          </a:p>
-        </p:txBody>
-      </p:sp>
-      <p:sp>
-        <p:nvSpPr>
-          <p:cNvPr id="9" name="TextBox 8"/>
-          <p:cNvSpPr txBox="1"/>
-          <p:nvPr/>
-        </p:nvSpPr>
-        <p:spPr>
-          <a:xfrm>
-            <a:off x="4608576" y="2103120"/>
-            <a:ext cx="2962656" cy="3931920"/>
-          </a:xfrm>
-          <a:prstGeom prst="rect">
-            <a:avLst/>
-          </a:prstGeom>
-          <a:noFill/>
-        </p:spPr>
-        <p:txBody>
-          <a:bodyPr wrap="square">
-            <a:spAutoFit/>
-          </a:bodyPr>
-          <a:lstStyle/>
-          <a:p>
-            <a:pPr>
-              <a:spcAft>
-                <a:spcPts val="1200"/>
-              </a:spcAft>
-              <a:defRPr sz="2000" b="1">
-                <a:solidFill>
-                  <a:srgbClr val="0284C7"/>
-                </a:solidFill>
-              </a:defRPr>
-            </a:pPr>
-            <a:r>
-              <a:t>How SHAP Solves It</a:t>
-            </a:r>
-          </a:p>
-          <a:p>
-            <a:pPr>
-              <a:spcAft>
-                <a:spcPts val="800"/>
-              </a:spcAft>
-              <a:defRPr sz="1500">
-                <a:solidFill>
-                  <a:srgbClr val="0F172A"/>
-                </a:solidFill>
-              </a:defRPr>
-            </a:pPr>
-            <a:r>
-              <a:t>• TreeSHAP calculates exact additive Shapley values based on game theory.</a:t>
-            </a:r>
-          </a:p>
-          <a:p>
-            <a:pPr>
-              <a:spcAft>
-                <a:spcPts val="800"/>
-              </a:spcAft>
-              <a:defRPr sz="1500">
-                <a:solidFill>
-                  <a:srgbClr val="0F172A"/>
-                </a:solidFill>
-              </a:defRPr>
-            </a:pPr>
-            <a:r>
-              <a:t>• Allocates exact risk 'points' to every individual sensor channel.</a:t>
-            </a:r>
-          </a:p>
-          <a:p>
-            <a:pPr>
-              <a:spcAft>
-                <a:spcPts val="800"/>
-              </a:spcAft>
-              <a:defRPr sz="1500">
-                <a:solidFill>
-                  <a:srgbClr val="0F172A"/>
-                </a:solidFill>
-              </a:defRPr>
-            </a:pPr>
-            <a:r>
-              <a:t>• Global SHAP reveals fleet-wide thermal drift drivers.</a:t>
-            </a:r>
-          </a:p>
-          <a:p>
-            <a:pPr>
-              <a:spcAft>
-                <a:spcPts val="800"/>
-              </a:spcAft>
-              <a:defRPr sz="1500">
-                <a:solidFill>
-                  <a:srgbClr val="0F172A"/>
-                </a:solidFill>
-              </a:defRPr>
-            </a:pPr>
-            <a:r>
-              <a:t>• Local SHAP waterfalls explain the exact alert moment for a specific turbine.</a:t>
-            </a:r>
-          </a:p>
-        </p:txBody>
-      </p:sp>
-      <p:sp>
-        <p:nvSpPr>
-          <p:cNvPr id="10" name="Rounded Rectangle 9"/>
-          <p:cNvSpPr/>
-          <p:nvPr/>
-        </p:nvSpPr>
-        <p:spPr>
-          <a:xfrm>
-            <a:off x="8119872" y="1920240"/>
-            <a:ext cx="3328416" cy="4297680"/>
-          </a:xfrm>
-          <a:prstGeom prst="roundRect">
-            <a:avLst/>
-          </a:prstGeom>
-          <a:solidFill>
-            <a:srgbClr val="FFFFFF"/>
+            <a:srgbClr val="F8FAFC"/>
           </a:solidFill>
           <a:ln w="19050">
             <a:solidFill>
@@ -3707,14 +3745,14 @@
       </p:sp>
       <p:sp>
         <p:nvSpPr>
-          <p:cNvPr id="11" name="TextBox 10"/>
+          <p:cNvPr id="9" name="TextBox 8"/>
           <p:cNvSpPr txBox="1"/>
           <p:nvPr/>
         </p:nvSpPr>
         <p:spPr>
           <a:xfrm>
-            <a:off x="8302752" y="2103120"/>
-            <a:ext cx="2962656" cy="3931920"/>
+            <a:off x="6492240" y="2103120"/>
+            <a:ext cx="4663440" cy="4023360"/>
           </a:xfrm>
           <a:prstGeom prst="rect">
             <a:avLst/>
@@ -3731,74 +3769,95 @@
               <a:spcAft>
                 <a:spcPts val="1200"/>
               </a:spcAft>
-              <a:defRPr sz="2000" b="1">
+              <a:defRPr sz="2200" b="1">
                 <a:solidFill>
                   <a:srgbClr val="16A34A"/>
                 </a:solidFill>
-              </a:defRPr>
-            </a:pPr>
-            <a:r>
-              <a:t>Ground Truth Match</a:t>
-            </a:r>
-          </a:p>
-          <a:p>
-            <a:pPr>
-              <a:spcAft>
-                <a:spcPts val="800"/>
-              </a:spcAft>
-              <a:defRPr sz="1500">
-                <a:solidFill>
-                  <a:srgbClr val="0F172A"/>
-                </a:solidFill>
-              </a:defRPr>
-            </a:pPr>
-            <a:r>
-              <a:t>• GEARBOX (Ev 72): Top SHAP feature was gearbox bearing temperature (+4.3°C rise).</a:t>
-            </a:r>
-          </a:p>
-          <a:p>
-            <a:pPr>
-              <a:spcAft>
-                <a:spcPts val="800"/>
-              </a:spcAft>
-              <a:defRPr sz="1500">
-                <a:solidFill>
-                  <a:srgbClr val="0F172A"/>
-                </a:solidFill>
-              </a:defRPr>
-            </a:pPr>
-            <a:r>
-              <a:t>• GENERATOR (Ev 0): Drive-end bearing temperature surged to 76°C-94°C, triggering alarm.</a:t>
-            </a:r>
-          </a:p>
-          <a:p>
-            <a:pPr>
-              <a:spcAft>
-                <a:spcPts val="800"/>
-              </a:spcAft>
-              <a:defRPr sz="1500">
-                <a:solidFill>
-                  <a:srgbClr val="0F172A"/>
-                </a:solidFill>
-              </a:defRPr>
-            </a:pPr>
-            <a:r>
-              <a:t>• TRANSFORMER (Ev 68): Phase L1 reached 117°C, dominating local SHAP attributions.</a:t>
-            </a:r>
-          </a:p>
-          <a:p>
-            <a:pPr>
-              <a:spcAft>
-                <a:spcPts val="800"/>
-              </a:spcAft>
-              <a:defRPr sz="1500">
-                <a:solidFill>
-                  <a:srgbClr val="0F172A"/>
-                </a:solidFill>
-              </a:defRPr>
-            </a:pPr>
-            <a:r>
-              <a:t>• HEALTHY (Ev 25): Negative scores across all components (zero alarm).</a:t>
+                <a:latin typeface="Segoe UI"/>
+              </a:defRPr>
+            </a:pPr>
+            <a:r>
+              <a:t>The 0.35 Optimal Threshold</a:t>
+            </a:r>
+          </a:p>
+          <a:p>
+            <a:pPr>
+              <a:spcAft>
+                <a:spcPts val="1000"/>
+              </a:spcAft>
+              <a:defRPr sz="1600">
+                <a:solidFill>
+                  <a:srgbClr val="1E293B"/>
+                </a:solidFill>
+                <a:latin typeface="Segoe UI"/>
+              </a:defRPr>
+            </a:pPr>
+            <a:r>
+              <a:t>• In textbooks, models use a 0.50 cutoff. In wind energy, that lets too many catastrophic breakdowns slip through.</a:t>
+            </a:r>
+          </a:p>
+          <a:p>
+            <a:pPr>
+              <a:spcAft>
+                <a:spcPts val="1000"/>
+              </a:spcAft>
+              <a:defRPr sz="1600">
+                <a:solidFill>
+                  <a:srgbClr val="1E293B"/>
+                </a:solidFill>
+                <a:latin typeface="Segoe UI"/>
+              </a:defRPr>
+            </a:pPr>
+            <a:r>
+              <a:t>• By optimizing total fleet costs, the ideal threshold is 0.30 - 0.35.</a:t>
+            </a:r>
+          </a:p>
+          <a:p>
+            <a:pPr>
+              <a:spcAft>
+                <a:spcPts val="1000"/>
+              </a:spcAft>
+              <a:defRPr sz="1600">
+                <a:solidFill>
+                  <a:srgbClr val="1E293B"/>
+                </a:solidFill>
+                <a:latin typeface="Segoe UI"/>
+              </a:defRPr>
+            </a:pPr>
+            <a:r>
+              <a:t>• Expected Fleet Savings: ~$4.5 Million net savings across 36 turbines over 2-3 years.</a:t>
+            </a:r>
+          </a:p>
+          <a:p>
+            <a:pPr>
+              <a:spcAft>
+                <a:spcPts val="1000"/>
+              </a:spcAft>
+              <a:defRPr sz="1600">
+                <a:solidFill>
+                  <a:srgbClr val="1E293B"/>
+                </a:solidFill>
+                <a:latin typeface="Segoe UI"/>
+              </a:defRPr>
+            </a:pPr>
+            <a:r>
+              <a:t>• Avoided Downtime: 6,500 hours of productive green energy generation saved.</a:t>
+            </a:r>
+          </a:p>
+          <a:p>
+            <a:pPr>
+              <a:spcAft>
+                <a:spcPts val="1000"/>
+              </a:spcAft>
+              <a:defRPr sz="1600">
+                <a:solidFill>
+                  <a:srgbClr val="1E293B"/>
+                </a:solidFill>
+                <a:latin typeface="Segoe UI"/>
+              </a:defRPr>
+            </a:pPr>
+            <a:r>
+              <a:t>• Estimated Return on Investment: ~200% ROI on the condition monitoring platform.</a:t>
             </a:r>
           </a:p>
         </p:txBody>
@@ -3836,7 +3895,7 @@
             <a:avLst/>
           </a:prstGeom>
           <a:solidFill>
-            <a:srgbClr val="F8FAFC"/>
+            <a:srgbClr val="FFFFFF"/>
           </a:solidFill>
           <a:ln>
             <a:noFill/>
@@ -3873,7 +3932,7 @@
         <p:spPr>
           <a:xfrm>
             <a:off x="731520" y="365760"/>
-            <a:ext cx="10698480" cy="365760"/>
+            <a:ext cx="10698480" cy="320040"/>
           </a:xfrm>
           <a:prstGeom prst="rect">
             <a:avLst/>
@@ -3887,14 +3946,15 @@
           <a:lstStyle/>
           <a:p>
             <a:pPr>
-              <a:defRPr sz="1300" b="1">
+              <a:defRPr sz="1400" b="1">
                 <a:solidFill>
                   <a:srgbClr val="0284C7"/>
                 </a:solidFill>
-              </a:defRPr>
-            </a:pPr>
-            <a:r>
-              <a:t>THEORETICAL CHALLENGE 5</a:t>
+                <a:latin typeface="Segoe UI"/>
+              </a:defRPr>
+            </a:pPr>
+            <a:r>
+              <a:t>STEP 10: DECISION SUPPORT</a:t>
             </a:r>
           </a:p>
         </p:txBody>
@@ -3908,7 +3968,7 @@
         <p:spPr>
           <a:xfrm>
             <a:off x="731520" y="685800"/>
-            <a:ext cx="10698480" cy="640080"/>
+            <a:ext cx="10698480" cy="685800"/>
           </a:xfrm>
           <a:prstGeom prst="rect">
             <a:avLst/>
@@ -3922,14 +3982,15 @@
           <a:lstStyle/>
           <a:p>
             <a:pPr>
-              <a:defRPr sz="3000" b="1">
+              <a:defRPr sz="3200" b="1">
                 <a:solidFill>
                   <a:srgbClr val="0F172A"/>
                 </a:solidFill>
-              </a:defRPr>
-            </a:pPr>
-            <a:r>
-              <a:t>Asymmetric Financial Economics &amp; Thresholding</a:t>
+                <a:latin typeface="Segoe UI"/>
+              </a:defRPr>
+            </a:pPr>
+            <a:r>
+              <a:t>Empowering Operators: The Interactive Shiny Dashboard</a:t>
             </a:r>
           </a:p>
         </p:txBody>
@@ -3942,7 +4003,7 @@
         </p:nvSpPr>
         <p:spPr>
           <a:xfrm>
-            <a:off x="731520" y="1325880"/>
+            <a:off x="731520" y="1371600"/>
             <a:ext cx="10698480" cy="411480"/>
           </a:xfrm>
           <a:prstGeom prst="rect">
@@ -3957,14 +4018,15 @@
           <a:lstStyle/>
           <a:p>
             <a:pPr>
-              <a:defRPr sz="1700">
+              <a:defRPr sz="1800">
                 <a:solidFill>
                   <a:srgbClr val="475569"/>
                 </a:solidFill>
-              </a:defRPr>
-            </a:pPr>
-            <a:r>
-              <a:t>Why standard 50% accuracy fails in operations, and how cost matrices save millions</a:t>
+                <a:latin typeface="Segoe UI"/>
+              </a:defRPr>
+            </a:pPr>
+            <a:r>
+              <a:t>A complete live decision support application with real-time SCADA telemetry &amp; ROI calculus</a:t>
             </a:r>
           </a:p>
         </p:txBody>
@@ -3978,17 +4040,17 @@
         <p:spPr>
           <a:xfrm>
             <a:off x="731520" y="1920240"/>
-            <a:ext cx="5175504" cy="4297680"/>
+            <a:ext cx="5212080" cy="4389120"/>
           </a:xfrm>
           <a:prstGeom prst="roundRect">
             <a:avLst/>
           </a:prstGeom>
           <a:solidFill>
-            <a:srgbClr val="FFFFFF"/>
+            <a:srgbClr val="F8FAFC"/>
           </a:solidFill>
           <a:ln w="19050">
             <a:solidFill>
-              <a:srgbClr val="DC2626"/>
+              <a:srgbClr val="1E3A8A"/>
             </a:solidFill>
           </a:ln>
         </p:spPr>
@@ -4022,8 +4084,8 @@
         </p:nvSpPr>
         <p:spPr>
           <a:xfrm>
-            <a:off x="1005840" y="2194560"/>
-            <a:ext cx="4626864" cy="3749039"/>
+            <a:off x="1005840" y="2103120"/>
+            <a:ext cx="4663440" cy="4023360"/>
           </a:xfrm>
           <a:prstGeom prst="rect">
             <a:avLst/>
@@ -4038,76 +4100,177 @@
           <a:p>
             <a:pPr>
               <a:spcAft>
-                <a:spcPts val="1400"/>
+                <a:spcPts val="1200"/>
               </a:spcAft>
               <a:defRPr sz="2200" b="1">
                 <a:solidFill>
-                  <a:srgbClr val="DC2626"/>
-                </a:solidFill>
-              </a:defRPr>
-            </a:pPr>
-            <a:r>
-              <a:t>The Asymmetric Cost Matrix</a:t>
-            </a:r>
-          </a:p>
-          <a:p>
-            <a:pPr>
-              <a:spcAft>
-                <a:spcPts val="1000"/>
-              </a:spcAft>
-              <a:defRPr sz="1600">
-                <a:solidFill>
-                  <a:srgbClr val="0F172A"/>
-                </a:solidFill>
-              </a:defRPr>
-            </a:pPr>
-            <a:r>
-              <a:t>• MISSED FAILURE (False Negative): $150,000 - $300,000. Shattered gearbox, offshore vessel chartering, 6 weeks lost power.</a:t>
-            </a:r>
-          </a:p>
-          <a:p>
-            <a:pPr>
-              <a:spcAft>
-                <a:spcPts val="1000"/>
-              </a:spcAft>
-              <a:defRPr sz="1600">
-                <a:solidFill>
-                  <a:srgbClr val="0F172A"/>
-                </a:solidFill>
-              </a:defRPr>
-            </a:pPr>
-            <a:r>
-              <a:t>• FALSE ALARM (False Positive): $3,500. Remote log diagnostics and routine technician inspection visit.</a:t>
-            </a:r>
-          </a:p>
-          <a:p>
-            <a:pPr>
-              <a:spcAft>
-                <a:spcPts val="1000"/>
-              </a:spcAft>
-              <a:defRPr sz="1600">
-                <a:solidFill>
-                  <a:srgbClr val="0F172A"/>
-                </a:solidFill>
-              </a:defRPr>
-            </a:pPr>
-            <a:r>
-              <a:t>• PLANNED REPAIR (True Positive): $8,000. Uptower bearing replacement during scheduled calm weather window.</a:t>
-            </a:r>
-          </a:p>
-          <a:p>
-            <a:pPr>
-              <a:spcAft>
-                <a:spcPts val="1000"/>
-              </a:spcAft>
-              <a:defRPr sz="1600">
-                <a:solidFill>
-                  <a:srgbClr val="0F172A"/>
-                </a:solidFill>
-              </a:defRPr>
-            </a:pPr>
-            <a:r>
-              <a:t>• CRITICAL REALITY: Missing a breakdown is 40 TIMES MORE EXPENSIVE than sending a technician on a false alarm!</a:t>
+                  <a:srgbClr val="1E3A8A"/>
+                </a:solidFill>
+                <a:latin typeface="Segoe UI"/>
+              </a:defRPr>
+            </a:pPr>
+            <a:r>
+              <a:t>5 Operational Dashboard Tabs</a:t>
+            </a:r>
+          </a:p>
+          <a:p>
+            <a:pPr>
+              <a:spcBef>
+                <a:spcPts val="400"/>
+              </a:spcBef>
+              <a:defRPr sz="1600" b="1">
+                <a:solidFill>
+                  <a:srgbClr val="0284C7"/>
+                </a:solidFill>
+                <a:latin typeface="Segoe UI"/>
+              </a:defRPr>
+            </a:pPr>
+            <a:r>
+              <a:t>1. Fleet Overview:</a:t>
+            </a:r>
+          </a:p>
+          <a:p>
+            <a:pPr>
+              <a:spcAft>
+                <a:spcPts val="400"/>
+              </a:spcAft>
+              <a:defRPr sz="1400">
+                <a:solidFill>
+                  <a:srgbClr val="1E293B"/>
+                </a:solidFill>
+                <a:latin typeface="Segoe UI"/>
+              </a:defRPr>
+            </a:pPr>
+            <a:r>
+              <a:t>Live status cards across 3 farms, turbine registry, and event logs.</a:t>
+            </a:r>
+          </a:p>
+          <a:p>
+            <a:pPr>
+              <a:spcBef>
+                <a:spcPts val="400"/>
+              </a:spcBef>
+              <a:defRPr sz="1600" b="1">
+                <a:solidFill>
+                  <a:srgbClr val="0284C7"/>
+                </a:solidFill>
+                <a:latin typeface="Segoe UI"/>
+              </a:defRPr>
+            </a:pPr>
+            <a:r>
+              <a:t>2. Telemetry Studio:</a:t>
+            </a:r>
+          </a:p>
+          <a:p>
+            <a:pPr>
+              <a:spcAft>
+                <a:spcPts val="400"/>
+              </a:spcAft>
+              <a:defRPr sz="1400">
+                <a:solidFill>
+                  <a:srgbClr val="1E293B"/>
+                </a:solidFill>
+                <a:latin typeface="Segoe UI"/>
+              </a:defRPr>
+            </a:pPr>
+            <a:r>
+              <a:t>Multi-sensor time-series (Delta T, power, wind) + real-time risk.</a:t>
+            </a:r>
+          </a:p>
+          <a:p>
+            <a:pPr>
+              <a:spcBef>
+                <a:spcPts val="400"/>
+              </a:spcBef>
+              <a:defRPr sz="1600" b="1">
+                <a:solidFill>
+                  <a:srgbClr val="0284C7"/>
+                </a:solidFill>
+                <a:latin typeface="Segoe UI"/>
+              </a:defRPr>
+            </a:pPr>
+            <a:r>
+              <a:t>3. Model Benchmark:</a:t>
+            </a:r>
+          </a:p>
+          <a:p>
+            <a:pPr>
+              <a:spcAft>
+                <a:spcPts val="400"/>
+              </a:spcAft>
+              <a:defRPr sz="1400">
+                <a:solidFill>
+                  <a:srgbClr val="1E293B"/>
+                </a:solidFill>
+                <a:latin typeface="Segoe UI"/>
+              </a:defRPr>
+            </a:pPr>
+            <a:r>
+              <a:t>Cross-validation audit tables, confusion matrices, and CARE lead times.</a:t>
+            </a:r>
+          </a:p>
+          <a:p>
+            <a:pPr>
+              <a:spcBef>
+                <a:spcPts val="400"/>
+              </a:spcBef>
+              <a:defRPr sz="1600" b="1">
+                <a:solidFill>
+                  <a:srgbClr val="0284C7"/>
+                </a:solidFill>
+                <a:latin typeface="Segoe UI"/>
+              </a:defRPr>
+            </a:pPr>
+            <a:r>
+              <a:t>4. Explainable AI:</a:t>
+            </a:r>
+          </a:p>
+          <a:p>
+            <a:pPr>
+              <a:spcAft>
+                <a:spcPts val="400"/>
+              </a:spcAft>
+              <a:defRPr sz="1400">
+                <a:solidFill>
+                  <a:srgbClr val="1E293B"/>
+                </a:solidFill>
+                <a:latin typeface="Segoe UI"/>
+              </a:defRPr>
+            </a:pPr>
+            <a:r>
+              <a:t>Interactive SHAP waterfalls and LIME diagnostic rulebook.</a:t>
+            </a:r>
+          </a:p>
+          <a:p>
+            <a:pPr>
+              <a:spcBef>
+                <a:spcPts val="400"/>
+              </a:spcBef>
+              <a:defRPr sz="1600" b="1">
+                <a:solidFill>
+                  <a:srgbClr val="0284C7"/>
+                </a:solidFill>
+                <a:latin typeface="Segoe UI"/>
+              </a:defRPr>
+            </a:pPr>
+            <a:r>
+              <a:t>5. ROI Calculator:</a:t>
+            </a:r>
+          </a:p>
+          <a:p>
+            <a:pPr>
+              <a:spcAft>
+                <a:spcPts val="400"/>
+              </a:spcAft>
+              <a:defRPr sz="1400">
+                <a:solidFill>
+                  <a:srgbClr val="1E293B"/>
+                </a:solidFill>
+                <a:latin typeface="Segoe UI"/>
+              </a:defRPr>
+            </a:pPr>
+            <a:r>
+              <a:t>Sliders for repair costs, fleet size, and interactive net dollar savings.</a:t>
             </a:r>
           </a:p>
         </p:txBody>
@@ -4120,14 +4283,14 @@
         </p:nvSpPr>
         <p:spPr>
           <a:xfrm>
-            <a:off x="6272784" y="1920240"/>
-            <a:ext cx="5175504" cy="4297680"/>
+            <a:off x="6217920" y="1920240"/>
+            <a:ext cx="5212080" cy="4389120"/>
           </a:xfrm>
           <a:prstGeom prst="roundRect">
             <a:avLst/>
           </a:prstGeom>
           <a:solidFill>
-            <a:srgbClr val="FFFFFF"/>
+            <a:srgbClr val="F8FAFC"/>
           </a:solidFill>
           <a:ln w="19050">
             <a:solidFill>
@@ -4165,8 +4328,8 @@
         </p:nvSpPr>
         <p:spPr>
           <a:xfrm>
-            <a:off x="6547104" y="2194560"/>
-            <a:ext cx="4626864" cy="3749039"/>
+            <a:off x="6492240" y="2103120"/>
+            <a:ext cx="4663440" cy="4023360"/>
           </a:xfrm>
           <a:prstGeom prst="rect">
             <a:avLst/>
@@ -4181,76 +4344,113 @@
           <a:p>
             <a:pPr>
               <a:spcAft>
-                <a:spcPts val="1400"/>
+                <a:spcPts val="1200"/>
               </a:spcAft>
               <a:defRPr sz="2200" b="1">
                 <a:solidFill>
                   <a:srgbClr val="16A34A"/>
                 </a:solidFill>
-              </a:defRPr>
-            </a:pPr>
-            <a:r>
-              <a:t>The Cost-Optimal Threshold</a:t>
-            </a:r>
-          </a:p>
-          <a:p>
-            <a:pPr>
-              <a:spcAft>
-                <a:spcPts val="1000"/>
-              </a:spcAft>
-              <a:defRPr sz="1600">
-                <a:solidFill>
-                  <a:srgbClr val="0F172A"/>
-                </a:solidFill>
-              </a:defRPr>
-            </a:pPr>
-            <a:r>
-              <a:t>• In textbooks, models use a 0.50 (50%) decision threshold.</a:t>
-            </a:r>
-          </a:p>
-          <a:p>
-            <a:pPr>
-              <a:spcAft>
-                <a:spcPts val="1000"/>
-              </a:spcAft>
-              <a:defRPr sz="1600">
-                <a:solidFill>
-                  <a:srgbClr val="0F172A"/>
-                </a:solidFill>
-              </a:defRPr>
-            </a:pPr>
-            <a:r>
-              <a:t>• In wind energy, a 50% threshold allows too many catastrophic gearboxes to slip through.</a:t>
-            </a:r>
-          </a:p>
-          <a:p>
-            <a:pPr>
-              <a:spcAft>
-                <a:spcPts val="1000"/>
-              </a:spcAft>
-              <a:defRPr sz="1600">
-                <a:solidFill>
-                  <a:srgbClr val="0F172A"/>
-                </a:solidFill>
-              </a:defRPr>
-            </a:pPr>
-            <a:r>
-              <a:t>• By plotting the Total Fleet Cost Curve, we discovered the economically optimal threshold is 0.30 - 0.35.</a:t>
-            </a:r>
-          </a:p>
-          <a:p>
-            <a:pPr>
-              <a:spcAft>
-                <a:spcPts val="1000"/>
-              </a:spcAft>
-              <a:defRPr sz="1600">
-                <a:solidFill>
-                  <a:srgbClr val="0F172A"/>
-                </a:solidFill>
-              </a:defRPr>
-            </a:pPr>
-            <a:r>
-              <a:t>• This sweet spot catches impending failures 8 to 34 days early while keeping technician inspection costs under control.</a:t>
+                <a:latin typeface="Segoe UI"/>
+              </a:defRPr>
+            </a:pPr>
+            <a:r>
+              <a:t>Master Script Execution (main.R)</a:t>
+            </a:r>
+          </a:p>
+          <a:p>
+            <a:pPr>
+              <a:spcAft>
+                <a:spcPts val="800"/>
+              </a:spcAft>
+              <a:defRPr sz="1500">
+                <a:solidFill>
+                  <a:srgbClr val="1E293B"/>
+                </a:solidFill>
+                <a:latin typeface="Segoe UI"/>
+              </a:defRPr>
+            </a:pPr>
+            <a:r>
+              <a:t>ONE-CLICK LAUNCH: The master runner handles all workflows:</a:t>
+            </a:r>
+          </a:p>
+          <a:p>
+            <a:pPr>
+              <a:spcAft>
+                <a:spcPts val="800"/>
+              </a:spcAft>
+              <a:defRPr sz="1500">
+                <a:solidFill>
+                  <a:srgbClr val="1E293B"/>
+                </a:solidFill>
+                <a:latin typeface="Segoe UI"/>
+              </a:defRPr>
+            </a:pPr>
+            <a:r>
+              <a:t>  Rscript main.R         (Demo + launch dashboard)</a:t>
+            </a:r>
+          </a:p>
+          <a:p>
+            <a:pPr>
+              <a:spcAft>
+                <a:spcPts val="800"/>
+              </a:spcAft>
+              <a:defRPr sz="1500">
+                <a:solidFill>
+                  <a:srgbClr val="1E293B"/>
+                </a:solidFill>
+                <a:latin typeface="Segoe UI"/>
+              </a:defRPr>
+            </a:pPr>
+            <a:r>
+              <a:t>  Rscript main.R --app   (Directly launch dashboard)</a:t>
+            </a:r>
+          </a:p>
+          <a:p>
+            <a:pPr>
+              <a:spcAft>
+                <a:spcPts val="800"/>
+              </a:spcAft>
+              <a:defRPr sz="1500">
+                <a:solidFill>
+                  <a:srgbClr val="1E293B"/>
+                </a:solidFill>
+                <a:latin typeface="Segoe UI"/>
+              </a:defRPr>
+            </a:pPr>
+            <a:r>
+              <a:t>  Rscript main.R --demo  (Terminal condition demo)</a:t>
+            </a:r>
+          </a:p>
+          <a:p>
+            <a:pPr>
+              <a:spcAft>
+                <a:spcPts val="800"/>
+              </a:spcAft>
+              <a:defRPr sz="1500">
+                <a:solidFill>
+                  <a:srgbClr val="1E293B"/>
+                </a:solidFill>
+                <a:latin typeface="Segoe UI"/>
+              </a:defRPr>
+            </a:pPr>
+            <a:r>
+              <a:t>  Rscript main.R --train (Re-train ML models)</a:t>
+            </a:r>
+          </a:p>
+          <a:p>
+            <a:pPr>
+              <a:spcAft>
+                <a:spcPts val="800"/>
+              </a:spcAft>
+              <a:defRPr sz="1500">
+                <a:solidFill>
+                  <a:srgbClr val="1E293B"/>
+                </a:solidFill>
+                <a:latin typeface="Segoe UI"/>
+              </a:defRPr>
+            </a:pPr>
+            <a:r>
+              <a:t>ZERO CLOUD DEPENDENCIES: Runs locally on http://127.0.0.1:3838 with instant reactive rendering.</a:t>
             </a:r>
           </a:p>
         </p:txBody>
@@ -4288,7 +4488,7 @@
             <a:avLst/>
           </a:prstGeom>
           <a:solidFill>
-            <a:srgbClr val="F8FAFC"/>
+            <a:srgbClr val="FFFFFF"/>
           </a:solidFill>
           <a:ln>
             <a:noFill/>
@@ -4325,7 +4525,7 @@
         <p:spPr>
           <a:xfrm>
             <a:off x="731520" y="365760"/>
-            <a:ext cx="10698480" cy="365760"/>
+            <a:ext cx="10698480" cy="320040"/>
           </a:xfrm>
           <a:prstGeom prst="rect">
             <a:avLst/>
@@ -4339,14 +4539,15 @@
           <a:lstStyle/>
           <a:p>
             <a:pPr>
-              <a:defRPr sz="1300" b="1">
+              <a:defRPr sz="1400" b="1">
                 <a:solidFill>
                   <a:srgbClr val="0284C7"/>
                 </a:solidFill>
-              </a:defRPr>
-            </a:pPr>
-            <a:r>
-              <a:t>DECISION SUPPORT</a:t>
+                <a:latin typeface="Segoe UI"/>
+              </a:defRPr>
+            </a:pPr>
+            <a:r>
+              <a:t>STEP 11: SUMMARY</a:t>
             </a:r>
           </a:p>
         </p:txBody>
@@ -4360,7 +4561,7 @@
         <p:spPr>
           <a:xfrm>
             <a:off x="731520" y="685800"/>
-            <a:ext cx="10698480" cy="640080"/>
+            <a:ext cx="10698480" cy="685800"/>
           </a:xfrm>
           <a:prstGeom prst="rect">
             <a:avLst/>
@@ -4374,14 +4575,15 @@
           <a:lstStyle/>
           <a:p>
             <a:pPr>
-              <a:defRPr sz="3000" b="1">
+              <a:defRPr sz="3200" b="1">
                 <a:solidFill>
                   <a:srgbClr val="0F172A"/>
                 </a:solidFill>
-              </a:defRPr>
-            </a:pPr>
-            <a:r>
-              <a:t>Deployment: The Production Shiny Dashboard</a:t>
+                <a:latin typeface="Segoe UI"/>
+              </a:defRPr>
+            </a:pPr>
+            <a:r>
+              <a:t>The 5-Point Presenter's Cheat Sheet</a:t>
             </a:r>
           </a:p>
         </p:txBody>
@@ -4394,7 +4596,7 @@
         </p:nvSpPr>
         <p:spPr>
           <a:xfrm>
-            <a:off x="731520" y="1325880"/>
+            <a:off x="731520" y="1371600"/>
             <a:ext cx="10698480" cy="411480"/>
           </a:xfrm>
           <a:prstGeom prst="rect">
@@ -4409,14 +4611,15 @@
           <a:lstStyle/>
           <a:p>
             <a:pPr>
-              <a:defRPr sz="1700">
+              <a:defRPr sz="1800">
                 <a:solidFill>
                   <a:srgbClr val="475569"/>
                 </a:solidFill>
-              </a:defRPr>
-            </a:pPr>
-            <a:r>
-              <a:t>Empowering wind farm operators and financial executives with interactive analytics</a:t>
+                <a:latin typeface="Segoe UI"/>
+              </a:defRPr>
+            </a:pPr>
+            <a:r>
+              <a:t>Everything you need to deliver a convincing, memorable presentation in 60 seconds</a:t>
             </a:r>
           </a:p>
         </p:txBody>
@@ -4429,586 +4632,14 @@
         </p:nvSpPr>
         <p:spPr>
           <a:xfrm>
-            <a:off x="731520" y="1920240"/>
-            <a:ext cx="5175504" cy="4297680"/>
+            <a:off x="731520" y="1874519"/>
+            <a:ext cx="10698480" cy="777240"/>
           </a:xfrm>
           <a:prstGeom prst="roundRect">
-            <a:avLst/>
-          </a:prstGeom>
-          <a:solidFill>
-            <a:srgbClr val="FFFFFF"/>
-          </a:solidFill>
-          <a:ln w="19050">
-            <a:solidFill>
-              <a:srgbClr val="1E3A8A"/>
-            </a:solidFill>
-          </a:ln>
-        </p:spPr>
-        <p:style>
-          <a:lnRef idx="1">
-            <a:schemeClr val="accent1"/>
-          </a:lnRef>
-          <a:fillRef idx="3">
-            <a:schemeClr val="accent1"/>
-          </a:fillRef>
-          <a:effectRef idx="2">
-            <a:schemeClr val="accent1"/>
-          </a:effectRef>
-          <a:fontRef idx="minor">
-            <a:schemeClr val="lt1"/>
-          </a:fontRef>
-        </p:style>
-        <p:txBody>
-          <a:bodyPr rtlCol="0" anchor="ctr"/>
-          <a:lstStyle/>
-          <a:p>
-            <a:pPr algn="ctr"/>
-          </a:p>
-        </p:txBody>
-      </p:sp>
-      <p:sp>
-        <p:nvSpPr>
-          <p:cNvPr id="7" name="TextBox 6"/>
-          <p:cNvSpPr txBox="1"/>
-          <p:nvPr/>
-        </p:nvSpPr>
-        <p:spPr>
-          <a:xfrm>
-            <a:off x="1005840" y="2194560"/>
-            <a:ext cx="4626864" cy="3749039"/>
-          </a:xfrm>
-          <a:prstGeom prst="rect">
-            <a:avLst/>
-          </a:prstGeom>
-          <a:noFill/>
-        </p:spPr>
-        <p:txBody>
-          <a:bodyPr wrap="square">
-            <a:spAutoFit/>
-          </a:bodyPr>
-          <a:lstStyle/>
-          <a:p>
-            <a:pPr>
-              <a:spcAft>
-                <a:spcPts val="1400"/>
-              </a:spcAft>
-              <a:defRPr sz="2200" b="1">
-                <a:solidFill>
-                  <a:srgbClr val="1E3A8A"/>
-                </a:solidFill>
-              </a:defRPr>
-            </a:pPr>
-            <a:r>
-              <a:t>5 Operational Dashboard Tabs</a:t>
-            </a:r>
-          </a:p>
-          <a:p>
-            <a:pPr>
-              <a:spcBef>
-                <a:spcPts val="400"/>
-              </a:spcBef>
-              <a:defRPr sz="1600" b="1">
-                <a:solidFill>
-                  <a:srgbClr val="0284C7"/>
-                </a:solidFill>
-              </a:defRPr>
-            </a:pPr>
-            <a:r>
-              <a:t>1. Fleet Overview:</a:t>
-            </a:r>
-          </a:p>
-          <a:p>
-            <a:pPr>
-              <a:spcAft>
-                <a:spcPts val="600"/>
-              </a:spcAft>
-              <a:defRPr sz="1400">
-                <a:solidFill>
-                  <a:srgbClr val="0F172A"/>
-                </a:solidFill>
-              </a:defRPr>
-            </a:pPr>
-            <a:r>
-              <a:t>Live status cards across 3 wind farms, turbine catalog &amp; event registry.</a:t>
-            </a:r>
-          </a:p>
-          <a:p>
-            <a:pPr>
-              <a:spcBef>
-                <a:spcPts val="400"/>
-              </a:spcBef>
-              <a:defRPr sz="1600" b="1">
-                <a:solidFill>
-                  <a:srgbClr val="0284C7"/>
-                </a:solidFill>
-              </a:defRPr>
-            </a:pPr>
-            <a:r>
-              <a:t>2. SCADA Telemetry Studio:</a:t>
-            </a:r>
-          </a:p>
-          <a:p>
-            <a:pPr>
-              <a:spcAft>
-                <a:spcPts val="600"/>
-              </a:spcAft>
-              <a:defRPr sz="1400">
-                <a:solidFill>
-                  <a:srgbClr val="0F172A"/>
-                </a:solidFill>
-              </a:defRPr>
-            </a:pPr>
-            <a:r>
-              <a:t>Multi-sensor time-series plots (Delta T, wind, power) + real-time risk timeline.</a:t>
-            </a:r>
-          </a:p>
-          <a:p>
-            <a:pPr>
-              <a:spcBef>
-                <a:spcPts val="400"/>
-              </a:spcBef>
-              <a:defRPr sz="1600" b="1">
-                <a:solidFill>
-                  <a:srgbClr val="0284C7"/>
-                </a:solidFill>
-              </a:defRPr>
-            </a:pPr>
-            <a:r>
-              <a:t>3. Model Benchmark &amp; CARE:</a:t>
-            </a:r>
-          </a:p>
-          <a:p>
-            <a:pPr>
-              <a:spcAft>
-                <a:spcPts val="600"/>
-              </a:spcAft>
-              <a:defRPr sz="1400">
-                <a:solidFill>
-                  <a:srgbClr val="0F172A"/>
-                </a:solidFill>
-              </a:defRPr>
-            </a:pPr>
-            <a:r>
-              <a:t>Leave-One-Turbine-Out validation stats, confusion matrix &amp; lead times.</a:t>
-            </a:r>
-          </a:p>
-          <a:p>
-            <a:pPr>
-              <a:spcBef>
-                <a:spcPts val="400"/>
-              </a:spcBef>
-              <a:defRPr sz="1600" b="1">
-                <a:solidFill>
-                  <a:srgbClr val="0284C7"/>
-                </a:solidFill>
-              </a:defRPr>
-            </a:pPr>
-            <a:r>
-              <a:t>4. Explainable AI Studio:</a:t>
-            </a:r>
-          </a:p>
-          <a:p>
-            <a:pPr>
-              <a:spcAft>
-                <a:spcPts val="600"/>
-              </a:spcAft>
-              <a:defRPr sz="1400">
-                <a:solidFill>
-                  <a:srgbClr val="0F172A"/>
-                </a:solidFill>
-              </a:defRPr>
-            </a:pPr>
-            <a:r>
-              <a:t>Interactive SHAP waterfall and LIME rules for every failure mode.</a:t>
-            </a:r>
-          </a:p>
-          <a:p>
-            <a:pPr>
-              <a:spcBef>
-                <a:spcPts val="400"/>
-              </a:spcBef>
-              <a:defRPr sz="1600" b="1">
-                <a:solidFill>
-                  <a:srgbClr val="0284C7"/>
-                </a:solidFill>
-              </a:defRPr>
-            </a:pPr>
-            <a:r>
-              <a:t>5. Business ROI Calculator:</a:t>
-            </a:r>
-          </a:p>
-          <a:p>
-            <a:pPr>
-              <a:spcAft>
-                <a:spcPts val="600"/>
-              </a:spcAft>
-              <a:defRPr sz="1400">
-                <a:solidFill>
-                  <a:srgbClr val="0F172A"/>
-                </a:solidFill>
-              </a:defRPr>
-            </a:pPr>
-            <a:r>
-              <a:t>Interactive cost sliders calculating net fleet dollar savings.</a:t>
-            </a:r>
-          </a:p>
-        </p:txBody>
-      </p:sp>
-      <p:sp>
-        <p:nvSpPr>
-          <p:cNvPr id="8" name="Rounded Rectangle 7"/>
-          <p:cNvSpPr/>
-          <p:nvPr/>
-        </p:nvSpPr>
-        <p:spPr>
-          <a:xfrm>
-            <a:off x="6272784" y="1920240"/>
-            <a:ext cx="5175504" cy="4297680"/>
-          </a:xfrm>
-          <a:prstGeom prst="roundRect">
-            <a:avLst/>
-          </a:prstGeom>
-          <a:solidFill>
-            <a:srgbClr val="FFFFFF"/>
-          </a:solidFill>
-          <a:ln w="19050">
-            <a:solidFill>
-              <a:srgbClr val="16A34A"/>
-            </a:solidFill>
-          </a:ln>
-        </p:spPr>
-        <p:style>
-          <a:lnRef idx="1">
-            <a:schemeClr val="accent1"/>
-          </a:lnRef>
-          <a:fillRef idx="3">
-            <a:schemeClr val="accent1"/>
-          </a:fillRef>
-          <a:effectRef idx="2">
-            <a:schemeClr val="accent1"/>
-          </a:effectRef>
-          <a:fontRef idx="minor">
-            <a:schemeClr val="lt1"/>
-          </a:fontRef>
-        </p:style>
-        <p:txBody>
-          <a:bodyPr rtlCol="0" anchor="ctr"/>
-          <a:lstStyle/>
-          <a:p>
-            <a:pPr algn="ctr"/>
-          </a:p>
-        </p:txBody>
-      </p:sp>
-      <p:sp>
-        <p:nvSpPr>
-          <p:cNvPr id="9" name="TextBox 8"/>
-          <p:cNvSpPr txBox="1"/>
-          <p:nvPr/>
-        </p:nvSpPr>
-        <p:spPr>
-          <a:xfrm>
-            <a:off x="6547104" y="2194560"/>
-            <a:ext cx="4626864" cy="3749039"/>
-          </a:xfrm>
-          <a:prstGeom prst="rect">
-            <a:avLst/>
-          </a:prstGeom>
-          <a:noFill/>
-        </p:spPr>
-        <p:txBody>
-          <a:bodyPr wrap="square">
-            <a:spAutoFit/>
-          </a:bodyPr>
-          <a:lstStyle/>
-          <a:p>
-            <a:pPr>
-              <a:spcAft>
-                <a:spcPts val="1400"/>
-              </a:spcAft>
-              <a:defRPr sz="2200" b="1">
-                <a:solidFill>
-                  <a:srgbClr val="16A34A"/>
-                </a:solidFill>
-              </a:defRPr>
-            </a:pPr>
-            <a:r>
-              <a:t>Deployment &amp; Running Locally</a:t>
-            </a:r>
-          </a:p>
-          <a:p>
-            <a:pPr>
-              <a:spcAft>
-                <a:spcPts val="800"/>
-              </a:spcAft>
-              <a:defRPr sz="1500">
-                <a:solidFill>
-                  <a:srgbClr val="0F172A"/>
-                </a:solidFill>
-              </a:defRPr>
-            </a:pPr>
-            <a:r>
-              <a:t>BUILT WITH R &amp; BSLIB: Modern industrial Darkly theme with responsive cards and SVG icons.</a:t>
-            </a:r>
-          </a:p>
-          <a:p>
-            <a:pPr>
-              <a:spcAft>
-                <a:spcPts val="800"/>
-              </a:spcAft>
-              <a:defRPr sz="1500">
-                <a:solidFill>
-                  <a:srgbClr val="0F172A"/>
-                </a:solidFill>
-              </a:defRPr>
-            </a:pPr>
-            <a:r>
-              <a:t>INSTANT LAUNCH: One-click launcher script in the project root:</a:t>
-            </a:r>
-          </a:p>
-          <a:p>
-            <a:pPr>
-              <a:spcAft>
-                <a:spcPts val="800"/>
-              </a:spcAft>
-              <a:defRPr sz="1500">
-                <a:solidFill>
-                  <a:srgbClr val="0F172A"/>
-                </a:solidFill>
-              </a:defRPr>
-            </a:pPr>
-            <a:r>
-              <a:t>  Rscript run_app.R</a:t>
-            </a:r>
-          </a:p>
-          <a:p>
-            <a:pPr>
-              <a:spcAft>
-                <a:spcPts val="800"/>
-              </a:spcAft>
-              <a:defRPr sz="1500">
-                <a:solidFill>
-                  <a:srgbClr val="0F172A"/>
-                </a:solidFill>
-              </a:defRPr>
-            </a:pPr>
-            <a:r>
-              <a:t>Or inside an active R session / RStudio:</a:t>
-            </a:r>
-          </a:p>
-          <a:p>
-            <a:pPr>
-              <a:spcAft>
-                <a:spcPts val="800"/>
-              </a:spcAft>
-              <a:defRPr sz="1500">
-                <a:solidFill>
-                  <a:srgbClr val="0F172A"/>
-                </a:solidFill>
-              </a:defRPr>
-            </a:pPr>
-            <a:r>
-              <a:t>  shiny::runApp('shiny_app')</a:t>
-            </a:r>
-          </a:p>
-          <a:p>
-            <a:pPr>
-              <a:spcAft>
-                <a:spcPts val="800"/>
-              </a:spcAft>
-              <a:defRPr sz="1500">
-                <a:solidFill>
-                  <a:srgbClr val="0F172A"/>
-                </a:solidFill>
-              </a:defRPr>
-            </a:pPr>
-            <a:r>
-              <a:t>Runs on http://127.0.0.1:3838 with instant reactive plots, requiring zero cloud dependencies.</a:t>
-            </a:r>
-          </a:p>
-        </p:txBody>
-      </p:sp>
-    </p:spTree>
-  </p:cSld>
-  <p:clrMapOvr>
-    <a:masterClrMapping/>
-  </p:clrMapOvr>
-</p:sld>
-</file>
-
-<file path=ppt/slides/slide13.xml><?xml version="1.0" encoding="utf-8"?>
-<p:sld xmlns:a="http://schemas.openxmlformats.org/drawingml/2006/main" xmlns:p="http://schemas.openxmlformats.org/presentationml/2006/main" xmlns:r="http://schemas.openxmlformats.org/officeDocument/2006/relationships">
-  <p:cSld>
-    <p:spTree>
-      <p:nvGrpSpPr>
-        <p:cNvPr id="1" name=""/>
-        <p:cNvGrpSpPr/>
-        <p:nvPr/>
-      </p:nvGrpSpPr>
-      <p:grpSpPr/>
-      <p:sp>
-        <p:nvSpPr>
-          <p:cNvPr id="2" name="Rectangle 1"/>
-          <p:cNvSpPr/>
-          <p:nvPr/>
-        </p:nvSpPr>
-        <p:spPr>
-          <a:xfrm>
-            <a:off x="0" y="0"/>
-            <a:ext cx="12191695" cy="6858000"/>
-          </a:xfrm>
-          <a:prstGeom prst="rect">
             <a:avLst/>
           </a:prstGeom>
           <a:solidFill>
             <a:srgbClr val="F8FAFC"/>
-          </a:solidFill>
-          <a:ln>
-            <a:noFill/>
-          </a:ln>
-        </p:spPr>
-        <p:style>
-          <a:lnRef idx="1">
-            <a:schemeClr val="accent1"/>
-          </a:lnRef>
-          <a:fillRef idx="3">
-            <a:schemeClr val="accent1"/>
-          </a:fillRef>
-          <a:effectRef idx="2">
-            <a:schemeClr val="accent1"/>
-          </a:effectRef>
-          <a:fontRef idx="minor">
-            <a:schemeClr val="lt1"/>
-          </a:fontRef>
-        </p:style>
-        <p:txBody>
-          <a:bodyPr rtlCol="0" anchor="ctr"/>
-          <a:lstStyle/>
-          <a:p>
-            <a:pPr algn="ctr"/>
-          </a:p>
-        </p:txBody>
-      </p:sp>
-      <p:sp>
-        <p:nvSpPr>
-          <p:cNvPr id="3" name="TextBox 2"/>
-          <p:cNvSpPr txBox="1"/>
-          <p:nvPr/>
-        </p:nvSpPr>
-        <p:spPr>
-          <a:xfrm>
-            <a:off x="731520" y="365760"/>
-            <a:ext cx="10698480" cy="365760"/>
-          </a:xfrm>
-          <a:prstGeom prst="rect">
-            <a:avLst/>
-          </a:prstGeom>
-          <a:noFill/>
-        </p:spPr>
-        <p:txBody>
-          <a:bodyPr wrap="square" lIns="0" tIns="0" rIns="0" bIns="0">
-            <a:spAutoFit/>
-          </a:bodyPr>
-          <a:lstStyle/>
-          <a:p>
-            <a:pPr>
-              <a:defRPr sz="1300" b="1">
-                <a:solidFill>
-                  <a:srgbClr val="0284C7"/>
-                </a:solidFill>
-              </a:defRPr>
-            </a:pPr>
-            <a:r>
-              <a:t>SUMMARY &amp; KEY TAKEAWAYS</a:t>
-            </a:r>
-          </a:p>
-        </p:txBody>
-      </p:sp>
-      <p:sp>
-        <p:nvSpPr>
-          <p:cNvPr id="4" name="TextBox 3"/>
-          <p:cNvSpPr txBox="1"/>
-          <p:nvPr/>
-        </p:nvSpPr>
-        <p:spPr>
-          <a:xfrm>
-            <a:off x="731520" y="685800"/>
-            <a:ext cx="10698480" cy="640080"/>
-          </a:xfrm>
-          <a:prstGeom prst="rect">
-            <a:avLst/>
-          </a:prstGeom>
-          <a:noFill/>
-        </p:spPr>
-        <p:txBody>
-          <a:bodyPr wrap="square" lIns="0" tIns="0" rIns="0" bIns="0">
-            <a:spAutoFit/>
-          </a:bodyPr>
-          <a:lstStyle/>
-          <a:p>
-            <a:pPr>
-              <a:defRPr sz="3000" b="1">
-                <a:solidFill>
-                  <a:srgbClr val="0F172A"/>
-                </a:solidFill>
-              </a:defRPr>
-            </a:pPr>
-            <a:r>
-              <a:t>The 5-Point Presenter's Cheat Sheet</a:t>
-            </a:r>
-          </a:p>
-        </p:txBody>
-      </p:sp>
-      <p:sp>
-        <p:nvSpPr>
-          <p:cNvPr id="5" name="TextBox 4"/>
-          <p:cNvSpPr txBox="1"/>
-          <p:nvPr/>
-        </p:nvSpPr>
-        <p:spPr>
-          <a:xfrm>
-            <a:off x="731520" y="1325880"/>
-            <a:ext cx="10698480" cy="411480"/>
-          </a:xfrm>
-          <a:prstGeom prst="rect">
-            <a:avLst/>
-          </a:prstGeom>
-          <a:noFill/>
-        </p:spPr>
-        <p:txBody>
-          <a:bodyPr wrap="square" lIns="0" tIns="0" rIns="0" bIns="0">
-            <a:spAutoFit/>
-          </a:bodyPr>
-          <a:lstStyle/>
-          <a:p>
-            <a:pPr>
-              <a:defRPr sz="1700">
-                <a:solidFill>
-                  <a:srgbClr val="475569"/>
-                </a:solidFill>
-              </a:defRPr>
-            </a:pPr>
-            <a:r>
-              <a:t>Everything you need to deliver a convincing, memorable presentation</a:t>
-            </a:r>
-          </a:p>
-        </p:txBody>
-      </p:sp>
-      <p:sp>
-        <p:nvSpPr>
-          <p:cNvPr id="6" name="Rounded Rectangle 5"/>
-          <p:cNvSpPr/>
-          <p:nvPr/>
-        </p:nvSpPr>
-        <p:spPr>
-          <a:xfrm>
-            <a:off x="731520" y="1874519"/>
-            <a:ext cx="10698480" cy="777240"/>
-          </a:xfrm>
-          <a:prstGeom prst="roundRect">
-            <a:avLst/>
-          </a:prstGeom>
-          <a:solidFill>
-            <a:srgbClr val="FFFFFF"/>
           </a:solidFill>
           <a:ln w="19050">
             <a:solidFill>
@@ -5065,6 +4696,7 @@
                 <a:solidFill>
                   <a:srgbClr val="1E3A8A"/>
                 </a:solidFill>
+                <a:latin typeface="Segoe UI"/>
               </a:defRPr>
             </a:pPr>
             <a:r>
@@ -5073,8 +4705,9 @@
             <a:r>
               <a:rPr sz="1600" b="0">
                 <a:solidFill>
-                  <a:srgbClr val="0F172A"/>
-                </a:solidFill>
+                  <a:srgbClr val="1E293B"/>
+                </a:solidFill>
+                <a:latin typeface="Segoe UI"/>
               </a:rPr>
               <a:t>Rejected synthetic SMOTE and purged post-trip status codes; 100% genuine sensor telemetry.</a:t>
             </a:r>
@@ -5096,7 +4729,7 @@
             <a:avLst/>
           </a:prstGeom>
           <a:solidFill>
-            <a:srgbClr val="FFFFFF"/>
+            <a:srgbClr val="F8FAFC"/>
           </a:solidFill>
           <a:ln w="19050">
             <a:solidFill>
@@ -5153,6 +4786,7 @@
                 <a:solidFill>
                   <a:srgbClr val="1E3A8A"/>
                 </a:solidFill>
+                <a:latin typeface="Segoe UI"/>
               </a:defRPr>
             </a:pPr>
             <a:r>
@@ -5161,8 +4795,9 @@
             <a:r>
               <a:rPr sz="1600" b="0">
                 <a:solidFill>
-                  <a:srgbClr val="0F172A"/>
-                </a:solidFill>
+                  <a:srgbClr val="1E293B"/>
+                </a:solidFill>
+                <a:latin typeface="Segoe UI"/>
               </a:rPr>
               <a:t>Differential temperatures (Delta T) subtracted weather fluctuations and exposed true mechanical friction.</a:t>
             </a:r>
@@ -5184,7 +4819,7 @@
             <a:avLst/>
           </a:prstGeom>
           <a:solidFill>
-            <a:srgbClr val="FFFFFF"/>
+            <a:srgbClr val="F8FAFC"/>
           </a:solidFill>
           <a:ln w="19050">
             <a:solidFill>
@@ -5241,6 +4876,7 @@
                 <a:solidFill>
                   <a:srgbClr val="1E3A8A"/>
                 </a:solidFill>
+                <a:latin typeface="Segoe UI"/>
               </a:defRPr>
             </a:pPr>
             <a:r>
@@ -5249,8 +4885,9 @@
             <a:r>
               <a:rPr sz="1600" b="0">
                 <a:solidFill>
-                  <a:srgbClr val="0F172A"/>
-                </a:solidFill>
+                  <a:srgbClr val="1E293B"/>
+                </a:solidFill>
+                <a:latin typeface="Segoe UI"/>
               </a:rPr>
               <a:t>XGBoost trains in 0.67 seconds on 100k rows (109 MB RAM), reaching 0.83 AUC on completely unseen turbines.</a:t>
             </a:r>
@@ -5272,7 +4909,7 @@
             <a:avLst/>
           </a:prstGeom>
           <a:solidFill>
-            <a:srgbClr val="FFFFFF"/>
+            <a:srgbClr val="F8FAFC"/>
           </a:solidFill>
           <a:ln w="19050">
             <a:solidFill>
@@ -5329,6 +4966,7 @@
                 <a:solidFill>
                   <a:srgbClr val="1E3A8A"/>
                 </a:solidFill>
+                <a:latin typeface="Segoe UI"/>
               </a:defRPr>
             </a:pPr>
             <a:r>
@@ -5337,8 +4975,9 @@
             <a:r>
               <a:rPr sz="1600" b="0">
                 <a:solidFill>
-                  <a:srgbClr val="0F172A"/>
-                </a:solidFill>
+                  <a:srgbClr val="1E293B"/>
+                </a:solidFill>
+                <a:latin typeface="Segoe UI"/>
               </a:rPr>
               <a:t>Achieved multi-week early warning across gearboxes, generator bearings, transformers, and hydraulics.</a:t>
             </a:r>
@@ -5360,7 +4999,7 @@
             <a:avLst/>
           </a:prstGeom>
           <a:solidFill>
-            <a:srgbClr val="FFFFFF"/>
+            <a:srgbClr val="F8FAFC"/>
           </a:solidFill>
           <a:ln w="19050">
             <a:solidFill>
@@ -5417,6 +5056,7 @@
                 <a:solidFill>
                   <a:srgbClr val="1E3A8A"/>
                 </a:solidFill>
+                <a:latin typeface="Segoe UI"/>
               </a:defRPr>
             </a:pPr>
             <a:r>
@@ -5425,8 +5065,9 @@
             <a:r>
               <a:rPr sz="1600" b="0">
                 <a:solidFill>
-                  <a:srgbClr val="0F172A"/>
-                </a:solidFill>
+                  <a:srgbClr val="1E293B"/>
+                </a:solidFill>
+                <a:latin typeface="Segoe UI"/>
               </a:rPr>
               <a:t>SHAP and LIME prove alerts match physical components; Shiny dashboard empowers operators with ROI calculators.</a:t>
             </a:r>
@@ -5466,7 +5107,7 @@
             <a:avLst/>
           </a:prstGeom>
           <a:solidFill>
-            <a:srgbClr val="F8FAFC"/>
+            <a:srgbClr val="FFFFFF"/>
           </a:solidFill>
           <a:ln>
             <a:noFill/>
@@ -5503,7 +5144,7 @@
         <p:spPr>
           <a:xfrm>
             <a:off x="731520" y="365760"/>
-            <a:ext cx="10698480" cy="365760"/>
+            <a:ext cx="10698480" cy="320040"/>
           </a:xfrm>
           <a:prstGeom prst="rect">
             <a:avLst/>
@@ -5517,14 +5158,15 @@
           <a:lstStyle/>
           <a:p>
             <a:pPr>
-              <a:defRPr sz="1300" b="1">
+              <a:defRPr sz="1400" b="1">
                 <a:solidFill>
                   <a:srgbClr val="0284C7"/>
                 </a:solidFill>
-              </a:defRPr>
-            </a:pPr>
-            <a:r>
-              <a:t>OPERATIONAL REALITY</a:t>
+                <a:latin typeface="Segoe UI"/>
+              </a:defRPr>
+            </a:pPr>
+            <a:r>
+              <a:t>STEP 1: THE CHALLENGE</a:t>
             </a:r>
           </a:p>
         </p:txBody>
@@ -5538,7 +5180,7 @@
         <p:spPr>
           <a:xfrm>
             <a:off x="731520" y="685800"/>
-            <a:ext cx="10698480" cy="640080"/>
+            <a:ext cx="10698480" cy="685800"/>
           </a:xfrm>
           <a:prstGeom prst="rect">
             <a:avLst/>
@@ -5552,10 +5194,11 @@
           <a:lstStyle/>
           <a:p>
             <a:pPr>
-              <a:defRPr sz="3000" b="1">
+              <a:defRPr sz="3200" b="1">
                 <a:solidFill>
                   <a:srgbClr val="0F172A"/>
                 </a:solidFill>
+                <a:latin typeface="Segoe UI"/>
               </a:defRPr>
             </a:pPr>
             <a:r>
@@ -5572,7 +5215,7 @@
         </p:nvSpPr>
         <p:spPr>
           <a:xfrm>
-            <a:off x="731520" y="1325880"/>
+            <a:off x="731520" y="1371600"/>
             <a:ext cx="10698480" cy="411480"/>
           </a:xfrm>
           <a:prstGeom prst="rect">
@@ -5587,14 +5230,15 @@
           <a:lstStyle/>
           <a:p>
             <a:pPr>
-              <a:defRPr sz="1700">
+              <a:defRPr sz="1800">
                 <a:solidFill>
                   <a:srgbClr val="475569"/>
                 </a:solidFill>
-              </a:defRPr>
-            </a:pPr>
-            <a:r>
-              <a:t>Why traditional reactive maintenance fails catastrophically at sea</a:t>
+                <a:latin typeface="Segoe UI"/>
+              </a:defRPr>
+            </a:pPr>
+            <a:r>
+              <a:t>Why waiting for alarms to trip at sea costs hundreds of thousands of dollars</a:t>
             </a:r>
           </a:p>
         </p:txBody>
@@ -5608,17 +5252,17 @@
         <p:spPr>
           <a:xfrm>
             <a:off x="731520" y="1920240"/>
-            <a:ext cx="3328416" cy="4297680"/>
+            <a:ext cx="3383280" cy="4389120"/>
           </a:xfrm>
           <a:prstGeom prst="roundRect">
             <a:avLst/>
           </a:prstGeom>
           <a:solidFill>
-            <a:srgbClr val="FFFFFF"/>
+            <a:srgbClr val="F8FAFC"/>
           </a:solidFill>
           <a:ln w="19050">
             <a:solidFill>
-              <a:srgbClr val="E2E8F0"/>
+              <a:srgbClr val="1E3A8A"/>
             </a:solidFill>
           </a:ln>
         </p:spPr>
@@ -5653,7 +5297,7 @@
         <p:spPr>
           <a:xfrm>
             <a:off x="914400" y="2103120"/>
-            <a:ext cx="2962656" cy="3931920"/>
+            <a:ext cx="3017520" cy="4023360"/>
           </a:xfrm>
           <a:prstGeom prst="rect">
             <a:avLst/>
@@ -5668,12 +5312,13 @@
           <a:p>
             <a:pPr>
               <a:spcAft>
-                <a:spcPts val="1400"/>
+                <a:spcPts val="1200"/>
               </a:spcAft>
               <a:defRPr sz="2200" b="1">
                 <a:solidFill>
                   <a:srgbClr val="1E3A8A"/>
                 </a:solidFill>
+                <a:latin typeface="Segoe UI"/>
               </a:defRPr>
             </a:pPr>
             <a:r>
@@ -5683,46 +5328,65 @@
           <a:p>
             <a:pPr>
               <a:spcAft>
-                <a:spcPts val="1000"/>
+                <a:spcPts val="800"/>
               </a:spcAft>
               <a:defRPr sz="1600">
                 <a:solidFill>
-                  <a:srgbClr val="0F172A"/>
-                </a:solidFill>
-              </a:defRPr>
-            </a:pPr>
-            <a:r>
-              <a:t>• Turbines are 300-ft tall robotic power plants with 80-meter blades.</a:t>
-            </a:r>
-          </a:p>
-          <a:p>
-            <a:pPr>
-              <a:spcAft>
-                <a:spcPts val="1000"/>
+                  <a:srgbClr val="1E293B"/>
+                </a:solidFill>
+                <a:latin typeface="Segoe UI"/>
+              </a:defRPr>
+            </a:pPr>
+            <a:r>
+              <a:t>• 300-ft tall mechanical giants standing in rough offshore seas.</a:t>
+            </a:r>
+          </a:p>
+          <a:p>
+            <a:pPr>
+              <a:spcAft>
+                <a:spcPts val="800"/>
               </a:spcAft>
               <a:defRPr sz="1600">
                 <a:solidFill>
-                  <a:srgbClr val="0F172A"/>
-                </a:solidFill>
-              </a:defRPr>
-            </a:pPr>
-            <a:r>
-              <a:t>• Internal components operate under titanic mechanical torque &amp; cyclic stress.</a:t>
-            </a:r>
-          </a:p>
-          <a:p>
-            <a:pPr>
-              <a:spcAft>
-                <a:spcPts val="1000"/>
+                  <a:srgbClr val="1E293B"/>
+                </a:solidFill>
+                <a:latin typeface="Segoe UI"/>
+              </a:defRPr>
+            </a:pPr>
+            <a:r>
+              <a:t>• Blades span 80+ meters, capturing colossal kinetic wind energy.</a:t>
+            </a:r>
+          </a:p>
+          <a:p>
+            <a:pPr>
+              <a:spcAft>
+                <a:spcPts val="800"/>
               </a:spcAft>
               <a:defRPr sz="1600">
                 <a:solidFill>
-                  <a:srgbClr val="0F172A"/>
-                </a:solidFill>
-              </a:defRPr>
-            </a:pPr>
-            <a:r>
-              <a:t>• A 20-ton gearbox steps up rotor speed from 15 RPM to 1,500 RPM for the generator.</a:t>
+                  <a:srgbClr val="1E293B"/>
+                </a:solidFill>
+                <a:latin typeface="Segoe UI"/>
+              </a:defRPr>
+            </a:pPr>
+            <a:r>
+              <a:t>• A 20-ton internal gearbox accelerates rotor speed from 15 RPM to 1,500 RPM for the generator.</a:t>
+            </a:r>
+          </a:p>
+          <a:p>
+            <a:pPr>
+              <a:spcAft>
+                <a:spcPts val="800"/>
+              </a:spcAft>
+              <a:defRPr sz="1600">
+                <a:solidFill>
+                  <a:srgbClr val="1E293B"/>
+                </a:solidFill>
+                <a:latin typeface="Segoe UI"/>
+              </a:defRPr>
+            </a:pPr>
+            <a:r>
+              <a:t>• Extreme mechanical friction and cyclic fatigue on internal bearings 24/7.</a:t>
             </a:r>
           </a:p>
         </p:txBody>
@@ -5735,14 +5399,14 @@
         </p:nvSpPr>
         <p:spPr>
           <a:xfrm>
-            <a:off x="4425696" y="1920240"/>
-            <a:ext cx="3328416" cy="4297680"/>
+            <a:off x="4389120" y="1920240"/>
+            <a:ext cx="3383280" cy="4389120"/>
           </a:xfrm>
           <a:prstGeom prst="roundRect">
             <a:avLst/>
           </a:prstGeom>
           <a:solidFill>
-            <a:srgbClr val="FFFFFF"/>
+            <a:srgbClr val="F8FAFC"/>
           </a:solidFill>
           <a:ln w="19050">
             <a:solidFill>
@@ -5780,8 +5444,8 @@
         </p:nvSpPr>
         <p:spPr>
           <a:xfrm>
-            <a:off x="4608576" y="2103120"/>
-            <a:ext cx="2962656" cy="3931920"/>
+            <a:off x="4572000" y="2103120"/>
+            <a:ext cx="3017520" cy="4023360"/>
           </a:xfrm>
           <a:prstGeom prst="rect">
             <a:avLst/>
@@ -5796,61 +5460,81 @@
           <a:p>
             <a:pPr>
               <a:spcAft>
-                <a:spcPts val="1400"/>
+                <a:spcPts val="1200"/>
               </a:spcAft>
               <a:defRPr sz="2200" b="1">
                 <a:solidFill>
                   <a:srgbClr val="DC2626"/>
                 </a:solidFill>
-              </a:defRPr>
-            </a:pPr>
-            <a:r>
-              <a:t>The Catastrophe</a:t>
-            </a:r>
-          </a:p>
-          <a:p>
-            <a:pPr>
-              <a:spcAft>
-                <a:spcPts val="1000"/>
+                <a:latin typeface="Segoe UI"/>
+              </a:defRPr>
+            </a:pPr>
+            <a:r>
+              <a:t>The Breakdown</a:t>
+            </a:r>
+          </a:p>
+          <a:p>
+            <a:pPr>
+              <a:spcAft>
+                <a:spcPts val="800"/>
               </a:spcAft>
               <a:defRPr sz="1600">
                 <a:solidFill>
-                  <a:srgbClr val="0F172A"/>
-                </a:solidFill>
-              </a:defRPr>
-            </a:pPr>
-            <a:r>
-              <a:t>• Offshore crane ships cost $30,000+ per day just to mobilize.</a:t>
-            </a:r>
-          </a:p>
-          <a:p>
-            <a:pPr>
-              <a:spcAft>
-                <a:spcPts val="1000"/>
+                  <a:srgbClr val="1E293B"/>
+                </a:solidFill>
+                <a:latin typeface="Segoe UI"/>
+              </a:defRPr>
+            </a:pPr>
+            <a:r>
+              <a:t>• A shattered gearbox costs $150,000+ in hardware alone.</a:t>
+            </a:r>
+          </a:p>
+          <a:p>
+            <a:pPr>
+              <a:spcAft>
+                <a:spcPts val="800"/>
               </a:spcAft>
               <a:defRPr sz="1600">
                 <a:solidFill>
-                  <a:srgbClr val="0F172A"/>
-                </a:solidFill>
-              </a:defRPr>
-            </a:pPr>
-            <a:r>
-              <a:t>• Replacing shattered gearboxes costs $150,000 to $250,000+ in parts.</a:t>
-            </a:r>
-          </a:p>
-          <a:p>
-            <a:pPr>
-              <a:spcAft>
-                <a:spcPts val="1000"/>
+                  <a:srgbClr val="1E293B"/>
+                </a:solidFill>
+                <a:latin typeface="Segoe UI"/>
+              </a:defRPr>
+            </a:pPr>
+            <a:r>
+              <a:t>• Chartering an offshore crane vessel costs $25,000 to $40,000 per day.</a:t>
+            </a:r>
+          </a:p>
+          <a:p>
+            <a:pPr>
+              <a:spcAft>
+                <a:spcPts val="800"/>
               </a:spcAft>
               <a:defRPr sz="1600">
                 <a:solidFill>
-                  <a:srgbClr val="0F172A"/>
-                </a:solidFill>
-              </a:defRPr>
-            </a:pPr>
-            <a:r>
-              <a:t>• Rough winter seas can delay repairs for 6 to 8 weeks, losing hundreds of thousands in green power.</a:t>
+                  <a:srgbClr val="1E293B"/>
+                </a:solidFill>
+                <a:latin typeface="Segoe UI"/>
+              </a:defRPr>
+            </a:pPr>
+            <a:r>
+              <a:t>• Rough winter weather blocks ships, causing 6 to 8 weeks of idle downtime.</a:t>
+            </a:r>
+          </a:p>
+          <a:p>
+            <a:pPr>
+              <a:spcAft>
+                <a:spcPts val="800"/>
+              </a:spcAft>
+              <a:defRPr sz="1600">
+                <a:solidFill>
+                  <a:srgbClr val="1E293B"/>
+                </a:solidFill>
+                <a:latin typeface="Segoe UI"/>
+              </a:defRPr>
+            </a:pPr>
+            <a:r>
+              <a:t>• Total bill per emergency failure: $250,000 to $350,000+ in parts, boats, and lost green power.</a:t>
             </a:r>
           </a:p>
         </p:txBody>
@@ -5863,14 +5547,14 @@
         </p:nvSpPr>
         <p:spPr>
           <a:xfrm>
-            <a:off x="8119872" y="1920240"/>
-            <a:ext cx="3328416" cy="4297680"/>
+            <a:off x="8046720" y="1920240"/>
+            <a:ext cx="3383280" cy="4389120"/>
           </a:xfrm>
           <a:prstGeom prst="roundRect">
             <a:avLst/>
           </a:prstGeom>
           <a:solidFill>
-            <a:srgbClr val="FFFFFF"/>
+            <a:srgbClr val="F8FAFC"/>
           </a:solidFill>
           <a:ln w="19050">
             <a:solidFill>
@@ -5908,8 +5592,8 @@
         </p:nvSpPr>
         <p:spPr>
           <a:xfrm>
-            <a:off x="8302752" y="2103120"/>
-            <a:ext cx="2962656" cy="3931920"/>
+            <a:off x="8229600" y="2103120"/>
+            <a:ext cx="3017520" cy="4023360"/>
           </a:xfrm>
           <a:prstGeom prst="rect">
             <a:avLst/>
@@ -5924,61 +5608,81 @@
           <a:p>
             <a:pPr>
               <a:spcAft>
-                <a:spcPts val="1400"/>
+                <a:spcPts val="1200"/>
               </a:spcAft>
               <a:defRPr sz="2200" b="1">
                 <a:solidFill>
                   <a:srgbClr val="16A34A"/>
                 </a:solidFill>
-              </a:defRPr>
-            </a:pPr>
-            <a:r>
-              <a:t>The Goal</a:t>
-            </a:r>
-          </a:p>
-          <a:p>
-            <a:pPr>
-              <a:spcAft>
-                <a:spcPts val="1000"/>
+                <a:latin typeface="Segoe UI"/>
+              </a:defRPr>
+            </a:pPr>
+            <a:r>
+              <a:t>Our Mission</a:t>
+            </a:r>
+          </a:p>
+          <a:p>
+            <a:pPr>
+              <a:spcAft>
+                <a:spcPts val="800"/>
               </a:spcAft>
               <a:defRPr sz="1600">
                 <a:solidFill>
-                  <a:srgbClr val="0F172A"/>
-                </a:solidFill>
-              </a:defRPr>
-            </a:pPr>
-            <a:r>
-              <a:t>• Spot component degradation 2 to 4 weeks before catastrophic failure.</a:t>
-            </a:r>
-          </a:p>
-          <a:p>
-            <a:pPr>
-              <a:spcAft>
-                <a:spcPts val="1000"/>
+                  <a:srgbClr val="1E293B"/>
+                </a:solidFill>
+                <a:latin typeface="Segoe UI"/>
+              </a:defRPr>
+            </a:pPr>
+            <a:r>
+              <a:t>• Detect internal wear 2 to 4 weeks BEFORE the turbine trips and halts.</a:t>
+            </a:r>
+          </a:p>
+          <a:p>
+            <a:pPr>
+              <a:spcAft>
+                <a:spcPts val="800"/>
               </a:spcAft>
               <a:defRPr sz="1600">
                 <a:solidFill>
-                  <a:srgbClr val="0F172A"/>
-                </a:solidFill>
-              </a:defRPr>
-            </a:pPr>
-            <a:r>
-              <a:t>• Use existing SCADA temperature and speed sensors without new hardware.</a:t>
-            </a:r>
-          </a:p>
-          <a:p>
-            <a:pPr>
-              <a:spcAft>
-                <a:spcPts val="1000"/>
+                  <a:srgbClr val="1E293B"/>
+                </a:solidFill>
+                <a:latin typeface="Segoe UI"/>
+              </a:defRPr>
+            </a:pPr>
+            <a:r>
+              <a:t>• Use existing SCADA temperature and vibration sensors without buying new hardware.</a:t>
+            </a:r>
+          </a:p>
+          <a:p>
+            <a:pPr>
+              <a:spcAft>
+                <a:spcPts val="800"/>
               </a:spcAft>
               <a:defRPr sz="1600">
                 <a:solidFill>
-                  <a:srgbClr val="0F172A"/>
-                </a:solidFill>
-              </a:defRPr>
-            </a:pPr>
-            <a:r>
-              <a:t>• Avoid false alarm fatigue so technicians genuinely trust the alerts.</a:t>
+                  <a:srgbClr val="1E293B"/>
+                </a:solidFill>
+                <a:latin typeface="Segoe UI"/>
+              </a:defRPr>
+            </a:pPr>
+            <a:r>
+              <a:t>• Give crews time to order parts and wait for calm weather windows.</a:t>
+            </a:r>
+          </a:p>
+          <a:p>
+            <a:pPr>
+              <a:spcAft>
+                <a:spcPts val="800"/>
+              </a:spcAft>
+              <a:defRPr sz="1600">
+                <a:solidFill>
+                  <a:srgbClr val="1E293B"/>
+                </a:solidFill>
+                <a:latin typeface="Segoe UI"/>
+              </a:defRPr>
+            </a:pPr>
+            <a:r>
+              <a:t>• Avoid false alarms so maintenance managers genuinely trust the system.</a:t>
             </a:r>
           </a:p>
         </p:txBody>
@@ -6016,7 +5720,7 @@
             <a:avLst/>
           </a:prstGeom>
           <a:solidFill>
-            <a:srgbClr val="F8FAFC"/>
+            <a:srgbClr val="FFFFFF"/>
           </a:solidFill>
           <a:ln>
             <a:noFill/>
@@ -6053,7 +5757,7 @@
         <p:spPr>
           <a:xfrm>
             <a:off x="731520" y="365760"/>
-            <a:ext cx="10698480" cy="365760"/>
+            <a:ext cx="10698480" cy="320040"/>
           </a:xfrm>
           <a:prstGeom prst="rect">
             <a:avLst/>
@@ -6067,14 +5771,15 @@
           <a:lstStyle/>
           <a:p>
             <a:pPr>
-              <a:defRPr sz="1300" b="1">
+              <a:defRPr sz="1400" b="1">
                 <a:solidFill>
                   <a:srgbClr val="0284C7"/>
                 </a:solidFill>
-              </a:defRPr>
-            </a:pPr>
-            <a:r>
-              <a:t>DATASET ANATOMY</a:t>
+                <a:latin typeface="Segoe UI"/>
+              </a:defRPr>
+            </a:pPr>
+            <a:r>
+              <a:t>STEP 2: THE DATA</a:t>
             </a:r>
           </a:p>
         </p:txBody>
@@ -6088,7 +5793,7 @@
         <p:spPr>
           <a:xfrm>
             <a:off x="731520" y="685800"/>
-            <a:ext cx="10698480" cy="640080"/>
+            <a:ext cx="10698480" cy="685800"/>
           </a:xfrm>
           <a:prstGeom prst="rect">
             <a:avLst/>
@@ -6102,14 +5807,15 @@
           <a:lstStyle/>
           <a:p>
             <a:pPr>
-              <a:defRPr sz="3000" b="1">
+              <a:defRPr sz="3200" b="1">
                 <a:solidFill>
                   <a:srgbClr val="0F172A"/>
                 </a:solidFill>
-              </a:defRPr>
-            </a:pPr>
-            <a:r>
-              <a:t>Understanding the Benchmark (CARE_To_Compare)</a:t>
+                <a:latin typeface="Segoe UI"/>
+              </a:defRPr>
+            </a:pPr>
+            <a:r>
+              <a:t>What Data Did We Listen To? (CARE_To_Compare)</a:t>
             </a:r>
           </a:p>
         </p:txBody>
@@ -6122,7 +5828,7 @@
         </p:nvSpPr>
         <p:spPr>
           <a:xfrm>
-            <a:off x="731520" y="1325880"/>
+            <a:off x="731520" y="1371600"/>
             <a:ext cx="10698480" cy="411480"/>
           </a:xfrm>
           <a:prstGeom prst="rect">
@@ -6137,14 +5843,15 @@
           <a:lstStyle/>
           <a:p>
             <a:pPr>
-              <a:defRPr sz="1700">
+              <a:defRPr sz="1800">
                 <a:solidFill>
                   <a:srgbClr val="475569"/>
                 </a:solidFill>
-              </a:defRPr>
-            </a:pPr>
-            <a:r>
-              <a:t>89 years of real-world operational SCADA telemetry across 36 wind turbines</a:t>
+                <a:latin typeface="Segoe UI"/>
+              </a:defRPr>
+            </a:pPr>
+            <a:r>
+              <a:t>89 years of real SCADA telemetry across 36 turbines in Portugal and Germany</a:t>
             </a:r>
           </a:p>
         </p:txBody>
@@ -6158,17 +5865,17 @@
         <p:spPr>
           <a:xfrm>
             <a:off x="731520" y="1920240"/>
-            <a:ext cx="5175504" cy="4297680"/>
+            <a:ext cx="5212080" cy="4389120"/>
           </a:xfrm>
           <a:prstGeom prst="roundRect">
             <a:avLst/>
           </a:prstGeom>
           <a:solidFill>
-            <a:srgbClr val="FFFFFF"/>
+            <a:srgbClr val="F8FAFC"/>
           </a:solidFill>
           <a:ln w="19050">
             <a:solidFill>
-              <a:srgbClr val="E2E8F0"/>
+              <a:srgbClr val="0284C7"/>
             </a:solidFill>
           </a:ln>
         </p:spPr>
@@ -6202,8 +5909,8 @@
         </p:nvSpPr>
         <p:spPr>
           <a:xfrm>
-            <a:off x="1005840" y="2194560"/>
-            <a:ext cx="4626864" cy="3749040"/>
+            <a:off x="1005840" y="2103120"/>
+            <a:ext cx="4663440" cy="4023360"/>
           </a:xfrm>
           <a:prstGeom prst="rect">
             <a:avLst/>
@@ -6218,136 +5925,81 @@
           <a:p>
             <a:pPr>
               <a:spcAft>
-                <a:spcPts val="1600"/>
+                <a:spcPts val="1200"/>
               </a:spcAft>
               <a:defRPr sz="2200" b="1">
                 <a:solidFill>
-                  <a:srgbClr val="1E3A8A"/>
-                </a:solidFill>
-              </a:defRPr>
-            </a:pPr>
-            <a:r>
-              <a:t>The Multi-Farm Architecture</a:t>
-            </a:r>
-          </a:p>
-          <a:p>
-            <a:pPr>
-              <a:spcBef>
-                <a:spcPts val="600"/>
-              </a:spcBef>
-              <a:defRPr sz="1600" b="1">
-                <a:solidFill>
                   <a:srgbClr val="0284C7"/>
                 </a:solidFill>
-              </a:defRPr>
-            </a:pPr>
-            <a:r>
-              <a:t>Wind Farm A (Portugal, Onshore):</a:t>
-            </a:r>
-          </a:p>
-          <a:p>
-            <a:pPr>
-              <a:spcAft>
-                <a:spcPts val="800"/>
-              </a:spcAft>
-              <a:defRPr sz="1500">
-                <a:solidFill>
-                  <a:srgbClr val="0F172A"/>
-                </a:solidFill>
-              </a:defRPr>
-            </a:pPr>
-            <a:r>
-              <a:t>5 turbines, 22 datasets, 86 sensor channels. Transparent component breakdown from EDP Open Data.</a:t>
-            </a:r>
-          </a:p>
-          <a:p>
-            <a:pPr>
-              <a:spcBef>
-                <a:spcPts val="600"/>
-              </a:spcBef>
-              <a:defRPr sz="1600" b="1">
-                <a:solidFill>
-                  <a:srgbClr val="0284C7"/>
-                </a:solidFill>
-              </a:defRPr>
-            </a:pPr>
-            <a:r>
-              <a:t>Wind Farm B (Germany, Offshore):</a:t>
-            </a:r>
-          </a:p>
-          <a:p>
-            <a:pPr>
-              <a:spcAft>
-                <a:spcPts val="800"/>
-              </a:spcAft>
-              <a:defRPr sz="1500">
-                <a:solidFill>
-                  <a:srgbClr val="0F172A"/>
-                </a:solidFill>
-              </a:defRPr>
-            </a:pPr>
-            <a:r>
-              <a:t>15 datasets, 257 sensor channels. Severe marine environment, rotor bearing &amp; transformer cell issues.</a:t>
-            </a:r>
-          </a:p>
-          <a:p>
-            <a:pPr>
-              <a:spcBef>
-                <a:spcPts val="600"/>
-              </a:spcBef>
-              <a:defRPr sz="1600" b="1">
-                <a:solidFill>
-                  <a:srgbClr val="0284C7"/>
-                </a:solidFill>
-              </a:defRPr>
-            </a:pPr>
-            <a:r>
-              <a:t>Wind Farm C (Germany, Offshore):</a:t>
-            </a:r>
-          </a:p>
-          <a:p>
-            <a:pPr>
-              <a:spcAft>
-                <a:spcPts val="800"/>
-              </a:spcAft>
-              <a:defRPr sz="1500">
-                <a:solidFill>
-                  <a:srgbClr val="0F172A"/>
-                </a:solidFill>
-              </a:defRPr>
-            </a:pPr>
-            <a:r>
-              <a:t>58 datasets, 957 sensor channels. Deep telemetry (pitch motors, converter IGBTs, blade heaters).</a:t>
-            </a:r>
-          </a:p>
-          <a:p>
-            <a:pPr>
-              <a:spcBef>
-                <a:spcPts val="600"/>
-              </a:spcBef>
-              <a:defRPr sz="1600" b="1">
-                <a:solidFill>
-                  <a:srgbClr val="0284C7"/>
-                </a:solidFill>
-              </a:defRPr>
-            </a:pPr>
-            <a:r>
-              <a:t>10-Minute Averaging (IEC 61400-25):</a:t>
-            </a:r>
-          </a:p>
-          <a:p>
-            <a:pPr>
-              <a:spcAft>
-                <a:spcPts val="800"/>
-              </a:spcAft>
-              <a:defRPr sz="1500">
-                <a:solidFill>
-                  <a:srgbClr val="0F172A"/>
-                </a:solidFill>
-              </a:defRPr>
-            </a:pPr>
-            <a:r>
-              <a:t>Raw milliseconds are aggregated into 10-minute average, min, max, and std deviation.</a:t>
+                <a:latin typeface="Segoe UI"/>
+              </a:defRPr>
+            </a:pPr>
+            <a:r>
+              <a:t>Multi-Farm Telemetry Network</a:t>
+            </a:r>
+          </a:p>
+          <a:p>
+            <a:pPr>
+              <a:spcAft>
+                <a:spcPts val="1000"/>
+              </a:spcAft>
+              <a:defRPr sz="1600">
+                <a:solidFill>
+                  <a:srgbClr val="1E293B"/>
+                </a:solidFill>
+                <a:latin typeface="Segoe UI"/>
+              </a:defRPr>
+            </a:pPr>
+            <a:r>
+              <a:t>• Farm A (Portugal, Onshore): 5 turbines, 22 datasets, 86 sensor channels with ground-truth failure logs.</a:t>
+            </a:r>
+          </a:p>
+          <a:p>
+            <a:pPr>
+              <a:spcAft>
+                <a:spcPts val="1000"/>
+              </a:spcAft>
+              <a:defRPr sz="1600">
+                <a:solidFill>
+                  <a:srgbClr val="1E293B"/>
+                </a:solidFill>
+                <a:latin typeface="Segoe UI"/>
+              </a:defRPr>
+            </a:pPr>
+            <a:r>
+              <a:t>• Farm B &amp; C (Germany, Offshore): 73 datasets, up to 957 sensor channels in harsh marine environments.</a:t>
+            </a:r>
+          </a:p>
+          <a:p>
+            <a:pPr>
+              <a:spcAft>
+                <a:spcPts val="1000"/>
+              </a:spcAft>
+              <a:defRPr sz="1600">
+                <a:solidFill>
+                  <a:srgbClr val="1E293B"/>
+                </a:solidFill>
+                <a:latin typeface="Segoe UI"/>
+              </a:defRPr>
+            </a:pPr>
+            <a:r>
+              <a:t>• Standard 10-Minute Telemetry (IEC 61400-25): Mean, min, max, and standard deviation recorded continuously.</a:t>
+            </a:r>
+          </a:p>
+          <a:p>
+            <a:pPr>
+              <a:spcAft>
+                <a:spcPts val="1000"/>
+              </a:spcAft>
+              <a:defRPr sz="1600">
+                <a:solidFill>
+                  <a:srgbClr val="1E293B"/>
+                </a:solidFill>
+                <a:latin typeface="Segoe UI"/>
+              </a:defRPr>
+            </a:pPr>
+            <a:r>
+              <a:t>• Monitored Signals: Wind speed, electric power, generator bearing temps, gearbox oil temps, rotor RPM, blade pitch.</a:t>
             </a:r>
           </a:p>
         </p:txBody>
@@ -6360,18 +6012,18 @@
         </p:nvSpPr>
         <p:spPr>
           <a:xfrm>
-            <a:off x="6272784" y="1920240"/>
-            <a:ext cx="5175504" cy="4297680"/>
+            <a:off x="6217920" y="1920240"/>
+            <a:ext cx="5212080" cy="4389120"/>
           </a:xfrm>
           <a:prstGeom prst="roundRect">
             <a:avLst/>
           </a:prstGeom>
           <a:solidFill>
-            <a:srgbClr val="FFFFFF"/>
+            <a:srgbClr val="F8FAFC"/>
           </a:solidFill>
           <a:ln w="19050">
             <a:solidFill>
-              <a:srgbClr val="E2E8F0"/>
+              <a:srgbClr val="1E3A8A"/>
             </a:solidFill>
           </a:ln>
         </p:spPr>
@@ -6405,8 +6057,8 @@
         </p:nvSpPr>
         <p:spPr>
           <a:xfrm>
-            <a:off x="6547104" y="2194560"/>
-            <a:ext cx="4626864" cy="3749040"/>
+            <a:off x="6492240" y="2103120"/>
+            <a:ext cx="4663440" cy="4023360"/>
           </a:xfrm>
           <a:prstGeom prst="rect">
             <a:avLst/>
@@ -6421,136 +6073,81 @@
           <a:p>
             <a:pPr>
               <a:spcAft>
-                <a:spcPts val="1600"/>
+                <a:spcPts val="1200"/>
               </a:spcAft>
               <a:defRPr sz="2200" b="1">
                 <a:solidFill>
                   <a:srgbClr val="1E3A8A"/>
                 </a:solidFill>
-              </a:defRPr>
-            </a:pPr>
-            <a:r>
-              <a:t>Structure of Each Monitored Event</a:t>
-            </a:r>
-          </a:p>
-          <a:p>
-            <a:pPr>
-              <a:spcBef>
-                <a:spcPts val="600"/>
-              </a:spcBef>
-              <a:defRPr sz="1600" b="1">
-                <a:solidFill>
-                  <a:srgbClr val="16A34A"/>
-                </a:solidFill>
-              </a:defRPr>
-            </a:pPr>
-            <a:r>
-              <a:t>Historical Baseline (train):</a:t>
-            </a:r>
-          </a:p>
-          <a:p>
-            <a:pPr>
-              <a:spcAft>
-                <a:spcPts val="800"/>
-              </a:spcAft>
-              <a:defRPr sz="1500">
-                <a:solidFill>
-                  <a:srgbClr val="0F172A"/>
-                </a:solidFill>
-              </a:defRPr>
-            </a:pPr>
-            <a:r>
-              <a:t>Exactly 1 full year (~52,000 observations) of normal healthy historical operation for that specific turbine.</a:t>
-            </a:r>
-          </a:p>
-          <a:p>
-            <a:pPr>
-              <a:spcBef>
-                <a:spcPts val="600"/>
-              </a:spcBef>
-              <a:defRPr sz="1600" b="1">
-                <a:solidFill>
-                  <a:srgbClr val="16A34A"/>
-                </a:solidFill>
-              </a:defRPr>
-            </a:pPr>
-            <a:r>
-              <a:t>Evaluation Window (prediction):</a:t>
-            </a:r>
-          </a:p>
-          <a:p>
-            <a:pPr>
-              <a:spcAft>
-                <a:spcPts val="800"/>
-              </a:spcAft>
-              <a:defRPr sz="1500">
-                <a:solidFill>
-                  <a:srgbClr val="0F172A"/>
-                </a:solidFill>
-              </a:defRPr>
-            </a:pPr>
-            <a:r>
-              <a:t>The subsequent 2 to 4 weeks. In anomaly datasets, degradation worsens leading to failure; in normal datasets, turbine keeps running.</a:t>
-            </a:r>
-          </a:p>
-          <a:p>
-            <a:pPr>
-              <a:spcBef>
-                <a:spcPts val="600"/>
-              </a:spcBef>
-              <a:defRPr sz="1600" b="1">
-                <a:solidFill>
-                  <a:srgbClr val="16A34A"/>
-                </a:solidFill>
-              </a:defRPr>
-            </a:pPr>
-            <a:r>
-              <a:t>Component Failure Modes:</a:t>
-            </a:r>
-          </a:p>
-          <a:p>
-            <a:pPr>
-              <a:spcAft>
-                <a:spcPts val="800"/>
-              </a:spcAft>
-              <a:defRPr sz="1500">
-                <a:solidFill>
-                  <a:srgbClr val="0F172A"/>
-                </a:solidFill>
-              </a:defRPr>
-            </a:pPr>
-            <a:r>
-              <a:t>Ground-truth failure logs catalog Gearbox breakdowns, Generator bearing wear, Transformer surges, and Hydraulic valve failures.</a:t>
-            </a:r>
-          </a:p>
-          <a:p>
-            <a:pPr>
-              <a:spcBef>
-                <a:spcPts val="600"/>
-              </a:spcBef>
-              <a:defRPr sz="1600" b="1">
-                <a:solidFill>
-                  <a:srgbClr val="16A34A"/>
-                </a:solidFill>
-              </a:defRPr>
-            </a:pPr>
-            <a:r>
-              <a:t>Balanced Benchmark:</a:t>
-            </a:r>
-          </a:p>
-          <a:p>
-            <a:pPr>
-              <a:spcAft>
-                <a:spcPts val="800"/>
-              </a:spcAft>
-              <a:defRPr sz="1500">
-                <a:solidFill>
-                  <a:srgbClr val="0F172A"/>
-                </a:solidFill>
-              </a:defRPr>
-            </a:pPr>
-            <a:r>
-              <a:t>44 labeled anomaly failure cases vs. 51 healthy normal control cases across the full repository.</a:t>
+                <a:latin typeface="Segoe UI"/>
+              </a:defRPr>
+            </a:pPr>
+            <a:r>
+              <a:t>Anatomy of Monitored Events</a:t>
+            </a:r>
+          </a:p>
+          <a:p>
+            <a:pPr>
+              <a:spcAft>
+                <a:spcPts val="1000"/>
+              </a:spcAft>
+              <a:defRPr sz="1600">
+                <a:solidFill>
+                  <a:srgbClr val="1E293B"/>
+                </a:solidFill>
+                <a:latin typeface="Segoe UI"/>
+              </a:defRPr>
+            </a:pPr>
+            <a:r>
+              <a:t>• 1 Full Year of Normal History: Exactly ~52,000 rows establishing baseline seasonal operating behavior.</a:t>
+            </a:r>
+          </a:p>
+          <a:p>
+            <a:pPr>
+              <a:spcAft>
+                <a:spcPts val="1000"/>
+              </a:spcAft>
+              <a:defRPr sz="1600">
+                <a:solidFill>
+                  <a:srgbClr val="1E293B"/>
+                </a:solidFill>
+                <a:latin typeface="Segoe UI"/>
+              </a:defRPr>
+            </a:pPr>
+            <a:r>
+              <a:t>• 2 to 4-Week Prediction Window: The subsequent critical period evaluated for incipient mechanical fault.</a:t>
+            </a:r>
+          </a:p>
+          <a:p>
+            <a:pPr>
+              <a:spcAft>
+                <a:spcPts val="1000"/>
+              </a:spcAft>
+              <a:defRPr sz="1600">
+                <a:solidFill>
+                  <a:srgbClr val="1E293B"/>
+                </a:solidFill>
+                <a:latin typeface="Segoe UI"/>
+              </a:defRPr>
+            </a:pPr>
+            <a:r>
+              <a:t>• 44 Labeled Anomaly Cases vs 51 Healthy Controls: Ground-truth confirmed failures across 4 critical sub-assemblies.</a:t>
+            </a:r>
+          </a:p>
+          <a:p>
+            <a:pPr>
+              <a:spcAft>
+                <a:spcPts val="1000"/>
+              </a:spcAft>
+              <a:defRPr sz="1600">
+                <a:solidFill>
+                  <a:srgbClr val="1E293B"/>
+                </a:solidFill>
+                <a:latin typeface="Segoe UI"/>
+              </a:defRPr>
+            </a:pPr>
+            <a:r>
+              <a:t>• Monitored Components: Gearbox High-Speed Shaft, Generator Drive-End Bearing, Transformer Winding, Hydraulics.</a:t>
             </a:r>
           </a:p>
         </p:txBody>
@@ -6588,7 +6185,7 @@
             <a:avLst/>
           </a:prstGeom>
           <a:solidFill>
-            <a:srgbClr val="F8FAFC"/>
+            <a:srgbClr val="FFFFFF"/>
           </a:solidFill>
           <a:ln>
             <a:noFill/>
@@ -6625,7 +6222,7 @@
         <p:spPr>
           <a:xfrm>
             <a:off x="731520" y="365760"/>
-            <a:ext cx="10698480" cy="365760"/>
+            <a:ext cx="10698480" cy="320040"/>
           </a:xfrm>
           <a:prstGeom prst="rect">
             <a:avLst/>
@@ -6639,14 +6236,15 @@
           <a:lstStyle/>
           <a:p>
             <a:pPr>
-              <a:defRPr sz="1300" b="1">
+              <a:defRPr sz="1400" b="1">
                 <a:solidFill>
                   <a:srgbClr val="0284C7"/>
                 </a:solidFill>
-              </a:defRPr>
-            </a:pPr>
-            <a:r>
-              <a:t>THEORETICAL CHALLENGE 1</a:t>
+                <a:latin typeface="Segoe UI"/>
+              </a:defRPr>
+            </a:pPr>
+            <a:r>
+              <a:t>STEP 3: GROUND RULES</a:t>
             </a:r>
           </a:p>
         </p:txBody>
@@ -6660,7 +6258,7 @@
         <p:spPr>
           <a:xfrm>
             <a:off x="731520" y="685800"/>
-            <a:ext cx="10698480" cy="640080"/>
+            <a:ext cx="10698480" cy="685800"/>
           </a:xfrm>
           <a:prstGeom prst="rect">
             <a:avLst/>
@@ -6674,14 +6272,15 @@
           <a:lstStyle/>
           <a:p>
             <a:pPr>
-              <a:defRPr sz="3000" b="1">
+              <a:defRPr sz="3200" b="1">
                 <a:solidFill>
                   <a:srgbClr val="0F172A"/>
                 </a:solidFill>
-              </a:defRPr>
-            </a:pPr>
-            <a:r>
-              <a:t>The 'Status Code' Trap (Data Leakage)</a:t>
+                <a:latin typeface="Segoe UI"/>
+              </a:defRPr>
+            </a:pPr>
+            <a:r>
+              <a:t>Avoiding the Two Classic AI Cheats</a:t>
             </a:r>
           </a:p>
         </p:txBody>
@@ -6694,7 +6293,7 @@
         </p:nvSpPr>
         <p:spPr>
           <a:xfrm>
-            <a:off x="731520" y="1325880"/>
+            <a:off x="731520" y="1371600"/>
             <a:ext cx="10698480" cy="411480"/>
           </a:xfrm>
           <a:prstGeom prst="rect">
@@ -6709,14 +6308,15 @@
           <a:lstStyle/>
           <a:p>
             <a:pPr>
-              <a:defRPr sz="1700">
+              <a:defRPr sz="1800">
                 <a:solidFill>
                   <a:srgbClr val="475569"/>
                 </a:solidFill>
-              </a:defRPr>
-            </a:pPr>
-            <a:r>
-              <a:t>Why a naive machine learning model achieves 99.9% accuracy but fails in operations</a:t>
+                <a:latin typeface="Segoe UI"/>
+              </a:defRPr>
+            </a:pPr>
+            <a:r>
+              <a:t>Why naive data science achieves 99% accuracy on paper but fails completely in the real world</a:t>
             </a:r>
           </a:p>
         </p:txBody>
@@ -6730,13 +6330,13 @@
         <p:spPr>
           <a:xfrm>
             <a:off x="731520" y="1920240"/>
-            <a:ext cx="5175504" cy="4297680"/>
+            <a:ext cx="5212080" cy="4389120"/>
           </a:xfrm>
           <a:prstGeom prst="roundRect">
             <a:avLst/>
           </a:prstGeom>
           <a:solidFill>
-            <a:srgbClr val="FFFFFF"/>
+            <a:srgbClr val="F8FAFC"/>
           </a:solidFill>
           <a:ln w="19050">
             <a:solidFill>
@@ -6774,8 +6374,8 @@
         </p:nvSpPr>
         <p:spPr>
           <a:xfrm>
-            <a:off x="1005840" y="2194560"/>
-            <a:ext cx="4626864" cy="3749039"/>
+            <a:off x="1005840" y="2103120"/>
+            <a:ext cx="4663440" cy="4023360"/>
           </a:xfrm>
           <a:prstGeom prst="rect">
             <a:avLst/>
@@ -6790,76 +6390,97 @@
           <a:p>
             <a:pPr>
               <a:spcAft>
-                <a:spcPts val="1400"/>
+                <a:spcPts val="1200"/>
               </a:spcAft>
               <a:defRPr sz="2200" b="1">
                 <a:solidFill>
                   <a:srgbClr val="DC2626"/>
                 </a:solidFill>
-              </a:defRPr>
-            </a:pPr>
-            <a:r>
-              <a:t>The Naive Shortcut (The Cheat)</a:t>
-            </a:r>
-          </a:p>
-          <a:p>
-            <a:pPr>
-              <a:spcAft>
-                <a:spcPts val="1000"/>
-              </a:spcAft>
-              <a:defRPr sz="1600">
-                <a:solidFill>
-                  <a:srgbClr val="0F172A"/>
-                </a:solidFill>
-              </a:defRPr>
-            </a:pPr>
-            <a:r>
-              <a:t>• In raw SCADA files, 'status_type_id' records turbine states: 0 = Normal, 3 = Service, 4 = Downtime.</a:t>
-            </a:r>
-          </a:p>
-          <a:p>
-            <a:pPr>
-              <a:spcAft>
-                <a:spcPts val="1000"/>
-              </a:spcAft>
-              <a:defRPr sz="1600">
-                <a:solidFill>
-                  <a:srgbClr val="0F172A"/>
-                </a:solidFill>
-              </a:defRPr>
-            </a:pPr>
-            <a:r>
-              <a:t>• When an anomaly dataset reaches breakdown, the status flips to 4 (Turbine is halted).</a:t>
-            </a:r>
-          </a:p>
-          <a:p>
-            <a:pPr>
-              <a:spcAft>
-                <a:spcPts val="1000"/>
-              </a:spcAft>
-              <a:defRPr sz="1600">
-                <a:solidFill>
-                  <a:srgbClr val="0F172A"/>
-                </a:solidFill>
-              </a:defRPr>
-            </a:pPr>
-            <a:r>
-              <a:t>• A standard AI automatically latches onto status_type_id == 4 and claims 99.9% accuracy.</a:t>
-            </a:r>
-          </a:p>
-          <a:p>
-            <a:pPr>
-              <a:spcAft>
-                <a:spcPts val="1000"/>
-              </a:spcAft>
-              <a:defRPr sz="1600">
-                <a:solidFill>
-                  <a:srgbClr val="0F172A"/>
-                </a:solidFill>
-              </a:defRPr>
-            </a:pPr>
-            <a:r>
-              <a:t>• WHY THIS IS USELESS: The wind farm already knows the turbine is down when it trips! Predicting downtime after the machine stops spinning has zero business value.</a:t>
+                <a:latin typeface="Segoe UI"/>
+              </a:defRPr>
+            </a:pPr>
+            <a:r>
+              <a:t>Trap 1: The 'Status Code' Shortcut</a:t>
+            </a:r>
+          </a:p>
+          <a:p>
+            <a:pPr>
+              <a:spcAft>
+                <a:spcPts val="800"/>
+              </a:spcAft>
+              <a:defRPr sz="1500">
+                <a:solidFill>
+                  <a:srgbClr val="1E293B"/>
+                </a:solidFill>
+                <a:latin typeface="Segoe UI"/>
+              </a:defRPr>
+            </a:pPr>
+            <a:r>
+              <a:t>• In raw SCADA data, there is a column called status_type_id (0=Normal, 4=Downtime).</a:t>
+            </a:r>
+          </a:p>
+          <a:p>
+            <a:pPr>
+              <a:spcAft>
+                <a:spcPts val="800"/>
+              </a:spcAft>
+              <a:defRPr sz="1500">
+                <a:solidFill>
+                  <a:srgbClr val="1E293B"/>
+                </a:solidFill>
+                <a:latin typeface="Segoe UI"/>
+              </a:defRPr>
+            </a:pPr>
+            <a:r>
+              <a:t>• When a turbine breaks down and stops, this column flips to 4.</a:t>
+            </a:r>
+          </a:p>
+          <a:p>
+            <a:pPr>
+              <a:spcAft>
+                <a:spcPts val="800"/>
+              </a:spcAft>
+              <a:defRPr sz="1500">
+                <a:solidFill>
+                  <a:srgbClr val="1E293B"/>
+                </a:solidFill>
+                <a:latin typeface="Segoe UI"/>
+              </a:defRPr>
+            </a:pPr>
+            <a:r>
+              <a:t>• A naive AI learns: 'If status is 4, it is broken!' and boasts 99.9% accuracy.</a:t>
+            </a:r>
+          </a:p>
+          <a:p>
+            <a:pPr>
+              <a:spcAft>
+                <a:spcPts val="800"/>
+              </a:spcAft>
+              <a:defRPr sz="1500">
+                <a:solidFill>
+                  <a:srgbClr val="1E293B"/>
+                </a:solidFill>
+                <a:latin typeface="Segoe UI"/>
+              </a:defRPr>
+            </a:pPr>
+            <a:r>
+              <a:t>• WHY THIS IS USELESS: The wind farm already knows the machine is broken when it stops spinning!</a:t>
+            </a:r>
+          </a:p>
+          <a:p>
+            <a:pPr>
+              <a:spcAft>
+                <a:spcPts val="800"/>
+              </a:spcAft>
+              <a:defRPr sz="1500">
+                <a:solidFill>
+                  <a:srgbClr val="1E293B"/>
+                </a:solidFill>
+                <a:latin typeface="Segoe UI"/>
+              </a:defRPr>
+            </a:pPr>
+            <a:r>
+              <a:t>• OUR FIX: We strictly erased all status codes from predictive features, forcing the model to detect trouble while the turbine is still running normally.</a:t>
             </a:r>
           </a:p>
         </p:txBody>
@@ -6872,18 +6493,18 @@
         </p:nvSpPr>
         <p:spPr>
           <a:xfrm>
-            <a:off x="6272784" y="1920240"/>
-            <a:ext cx="5175504" cy="4297680"/>
+            <a:off x="6217920" y="1920240"/>
+            <a:ext cx="5212080" cy="4389120"/>
           </a:xfrm>
           <a:prstGeom prst="roundRect">
             <a:avLst/>
           </a:prstGeom>
           <a:solidFill>
-            <a:srgbClr val="FFFFFF"/>
+            <a:srgbClr val="F8FAFC"/>
           </a:solidFill>
           <a:ln w="19050">
             <a:solidFill>
-              <a:srgbClr val="16A34A"/>
+              <a:srgbClr val="D97706"/>
             </a:solidFill>
           </a:ln>
         </p:spPr>
@@ -6917,8 +6538,8 @@
         </p:nvSpPr>
         <p:spPr>
           <a:xfrm>
-            <a:off x="6547104" y="2194560"/>
-            <a:ext cx="4626864" cy="3749039"/>
+            <a:off x="6492240" y="2103120"/>
+            <a:ext cx="4663440" cy="4023360"/>
           </a:xfrm>
           <a:prstGeom prst="rect">
             <a:avLst/>
@@ -6933,76 +6554,97 @@
           <a:p>
             <a:pPr>
               <a:spcAft>
-                <a:spcPts val="1400"/>
+                <a:spcPts val="1200"/>
               </a:spcAft>
               <a:defRPr sz="2200" b="1">
                 <a:solidFill>
-                  <a:srgbClr val="16A34A"/>
-                </a:solidFill>
-              </a:defRPr>
-            </a:pPr>
-            <a:r>
-              <a:t>How We Resolved It (True Physics)</a:t>
-            </a:r>
-          </a:p>
-          <a:p>
-            <a:pPr>
-              <a:spcAft>
-                <a:spcPts val="1000"/>
-              </a:spcAft>
-              <a:defRPr sz="1600">
-                <a:solidFill>
-                  <a:srgbClr val="0F172A"/>
-                </a:solidFill>
-              </a:defRPr>
-            </a:pPr>
-            <a:r>
-              <a:t>• We strictly erased status_type_id from all predictive features.</a:t>
-            </a:r>
-          </a:p>
-          <a:p>
-            <a:pPr>
-              <a:spcAft>
-                <a:spcPts val="1000"/>
-              </a:spcAft>
-              <a:defRPr sz="1600">
-                <a:solidFill>
-                  <a:srgbClr val="0F172A"/>
-                </a:solidFill>
-              </a:defRPr>
-            </a:pPr>
-            <a:r>
-              <a:t>• The model must learn failure signatures exclusively from thermodynamic temperatures, vibrations, and aerodynamics.</a:t>
-            </a:r>
-          </a:p>
-          <a:p>
-            <a:pPr>
-              <a:spcAft>
-                <a:spcPts val="1000"/>
-              </a:spcAft>
-              <a:defRPr sz="1600">
-                <a:solidFill>
-                  <a:srgbClr val="0F172A"/>
-                </a:solidFill>
-              </a:defRPr>
-            </a:pPr>
-            <a:r>
-              <a:t>• The entire prediction period is evaluated to detect early degradation while status is STILL 0 (Normal operation).</a:t>
-            </a:r>
-          </a:p>
-          <a:p>
-            <a:pPr>
-              <a:spcAft>
-                <a:spcPts val="1000"/>
-              </a:spcAft>
-              <a:defRPr sz="1600">
-                <a:solidFill>
-                  <a:srgbClr val="0F172A"/>
-                </a:solidFill>
-              </a:defRPr>
-            </a:pPr>
-            <a:r>
-              <a:t>• OPERATIONAL OUTCOME: The model provides genuine early warning days before the emergency control system ever trips.</a:t>
+                  <a:srgbClr val="D97706"/>
+                </a:solidFill>
+                <a:latin typeface="Segoe UI"/>
+              </a:defRPr>
+            </a:pPr>
+            <a:r>
+              <a:t>Trap 2: The 'Fake Data' Trap (SMOTE)</a:t>
+            </a:r>
+          </a:p>
+          <a:p>
+            <a:pPr>
+              <a:spcAft>
+                <a:spcPts val="800"/>
+              </a:spcAft>
+              <a:defRPr sz="1500">
+                <a:solidFill>
+                  <a:srgbClr val="1E293B"/>
+                </a:solidFill>
+                <a:latin typeface="Segoe UI"/>
+              </a:defRPr>
+            </a:pPr>
+            <a:r>
+              <a:t>• Because failures are rare, data scientists often generate synthetic samples with SMOTE.</a:t>
+            </a:r>
+          </a:p>
+          <a:p>
+            <a:pPr>
+              <a:spcAft>
+                <a:spcPts val="800"/>
+              </a:spcAft>
+              <a:defRPr sz="1500">
+                <a:solidFill>
+                  <a:srgbClr val="1E293B"/>
+                </a:solidFill>
+                <a:latin typeface="Segoe UI"/>
+              </a:defRPr>
+            </a:pPr>
+            <a:r>
+              <a:t>• THE PHYSICAL FLAW: Turbines obey strict laws of thermodynamics and Betz aerodynamic limits.</a:t>
+            </a:r>
+          </a:p>
+          <a:p>
+            <a:pPr>
+              <a:spcAft>
+                <a:spcPts val="800"/>
+              </a:spcAft>
+              <a:defRPr sz="1500">
+                <a:solidFill>
+                  <a:srgbClr val="1E293B"/>
+                </a:solidFill>
+                <a:latin typeface="Segoe UI"/>
+              </a:defRPr>
+            </a:pPr>
+            <a:r>
+              <a:t>• A mathematical algorithm blindly invents data points: e.g. 2,000 kW power at zero wind speed and 90° blade pitch!</a:t>
+            </a:r>
+          </a:p>
+          <a:p>
+            <a:pPr>
+              <a:spcAft>
+                <a:spcPts val="800"/>
+              </a:spcAft>
+              <a:defRPr sz="1500">
+                <a:solidFill>
+                  <a:srgbClr val="1E293B"/>
+                </a:solidFill>
+                <a:latin typeface="Segoe UI"/>
+              </a:defRPr>
+            </a:pPr>
+            <a:r>
+              <a:t>• That is physically impossible in the real world.</a:t>
+            </a:r>
+          </a:p>
+          <a:p>
+            <a:pPr>
+              <a:spcAft>
+                <a:spcPts val="800"/>
+              </a:spcAft>
+              <a:defRPr sz="1500">
+                <a:solidFill>
+                  <a:srgbClr val="1E293B"/>
+                </a:solidFill>
+                <a:latin typeface="Segoe UI"/>
+              </a:defRPr>
+            </a:pPr>
+            <a:r>
+              <a:t>• OUR COMMITMENT: Zero synthetic data. Every single observation in our model is 100% genuine sensor telemetry.</a:t>
             </a:r>
           </a:p>
         </p:txBody>
@@ -7040,7 +6682,7 @@
             <a:avLst/>
           </a:prstGeom>
           <a:solidFill>
-            <a:srgbClr val="F8FAFC"/>
+            <a:srgbClr val="FFFFFF"/>
           </a:solidFill>
           <a:ln>
             <a:noFill/>
@@ -7077,7 +6719,7 @@
         <p:spPr>
           <a:xfrm>
             <a:off x="731520" y="365760"/>
-            <a:ext cx="10698480" cy="365760"/>
+            <a:ext cx="10698480" cy="320040"/>
           </a:xfrm>
           <a:prstGeom prst="rect">
             <a:avLst/>
@@ -7091,14 +6733,15 @@
           <a:lstStyle/>
           <a:p>
             <a:pPr>
-              <a:defRPr sz="1300" b="1">
+              <a:defRPr sz="1400" b="1">
                 <a:solidFill>
                   <a:srgbClr val="0284C7"/>
                 </a:solidFill>
-              </a:defRPr>
-            </a:pPr>
-            <a:r>
-              <a:t>THEORETICAL CHALLENGE 2</a:t>
+                <a:latin typeface="Segoe UI"/>
+              </a:defRPr>
+            </a:pPr>
+            <a:r>
+              <a:t>STEP 4: PHYSICS FEATURES</a:t>
             </a:r>
           </a:p>
         </p:txBody>
@@ -7112,7 +6755,7 @@
         <p:spPr>
           <a:xfrm>
             <a:off x="731520" y="685800"/>
-            <a:ext cx="10698480" cy="640080"/>
+            <a:ext cx="10698480" cy="685800"/>
           </a:xfrm>
           <a:prstGeom prst="rect">
             <a:avLst/>
@@ -7126,14 +6769,15 @@
           <a:lstStyle/>
           <a:p>
             <a:pPr>
-              <a:defRPr sz="3000" b="1">
+              <a:defRPr sz="3200" b="1">
                 <a:solidFill>
                   <a:srgbClr val="0F172A"/>
                 </a:solidFill>
-              </a:defRPr>
-            </a:pPr>
-            <a:r>
-              <a:t>The Weather Trap &amp; The 'Rising Fever' Fix</a:t>
+                <a:latin typeface="Segoe UI"/>
+              </a:defRPr>
+            </a:pPr>
+            <a:r>
+              <a:t>The 'Rising Fever' Breakthrough (Delta T)</a:t>
             </a:r>
           </a:p>
         </p:txBody>
@@ -7146,7 +6790,7 @@
         </p:nvSpPr>
         <p:spPr>
           <a:xfrm>
-            <a:off x="731520" y="1325880"/>
+            <a:off x="731520" y="1371600"/>
             <a:ext cx="10698480" cy="411480"/>
           </a:xfrm>
           <a:prstGeom prst="rect">
@@ -7161,14 +6805,15 @@
           <a:lstStyle/>
           <a:p>
             <a:pPr>
-              <a:defRPr sz="1700">
+              <a:defRPr sz="1800">
                 <a:solidFill>
                   <a:srgbClr val="475569"/>
                 </a:solidFill>
-              </a:defRPr>
-            </a:pPr>
-            <a:r>
-              <a:t>Is the bearing overheating, or is it just a sunny afternoon in July?</a:t>
+                <a:latin typeface="Segoe UI"/>
+              </a:defRPr>
+            </a:pPr>
+            <a:r>
+              <a:t>Why raw temperature lies to models and how basic thermodynamics isolates friction</a:t>
             </a:r>
           </a:p>
         </p:txBody>
@@ -7182,13 +6827,13 @@
         <p:spPr>
           <a:xfrm>
             <a:off x="731520" y="1920240"/>
-            <a:ext cx="5175504" cy="4297680"/>
+            <a:ext cx="5212080" cy="4389120"/>
           </a:xfrm>
           <a:prstGeom prst="roundRect">
             <a:avLst/>
           </a:prstGeom>
           <a:solidFill>
-            <a:srgbClr val="FFFFFF"/>
+            <a:srgbClr val="F8FAFC"/>
           </a:solidFill>
           <a:ln w="19050">
             <a:solidFill>
@@ -7226,8 +6871,8 @@
         </p:nvSpPr>
         <p:spPr>
           <a:xfrm>
-            <a:off x="1005840" y="2194560"/>
-            <a:ext cx="4626864" cy="3749039"/>
+            <a:off x="1005840" y="2103120"/>
+            <a:ext cx="4663440" cy="4023360"/>
           </a:xfrm>
           <a:prstGeom prst="rect">
             <a:avLst/>
@@ -7242,16 +6887,17 @@
           <a:p>
             <a:pPr>
               <a:spcAft>
-                <a:spcPts val="1400"/>
+                <a:spcPts val="1200"/>
               </a:spcAft>
               <a:defRPr sz="2200" b="1">
                 <a:solidFill>
                   <a:srgbClr val="D97706"/>
                 </a:solidFill>
-              </a:defRPr>
-            </a:pPr>
-            <a:r>
-              <a:t>The Weather Confounding Problem</a:t>
+                <a:latin typeface="Segoe UI"/>
+              </a:defRPr>
+            </a:pPr>
+            <a:r>
+              <a:t>The Weather Confounding Trap</a:t>
             </a:r>
           </a:p>
           <a:p>
@@ -7261,12 +6907,13 @@
               </a:spcAft>
               <a:defRPr sz="1600">
                 <a:solidFill>
-                  <a:srgbClr val="0F172A"/>
-                </a:solidFill>
-              </a:defRPr>
-            </a:pPr>
-            <a:r>
-              <a:t>• A healthy gearbox bearing naturally runs at 60°C on a hot 38°C summer afternoon.</a:t>
+                  <a:srgbClr val="1E293B"/>
+                </a:solidFill>
+                <a:latin typeface="Segoe UI"/>
+              </a:defRPr>
+            </a:pPr>
+            <a:r>
+              <a:t>• In hot July, a perfectly healthy bearing reaches 60°C simply because the air is 38°C.</a:t>
             </a:r>
           </a:p>
           <a:p>
@@ -7276,12 +6923,13 @@
               </a:spcAft>
               <a:defRPr sz="1600">
                 <a:solidFill>
-                  <a:srgbClr val="0F172A"/>
-                </a:solidFill>
-              </a:defRPr>
-            </a:pPr>
-            <a:r>
-              <a:t>• A dying gearbox bearing might only reach 45°C on a freezing 2°C winter morning.</a:t>
+                  <a:srgbClr val="1E293B"/>
+                </a:solidFill>
+                <a:latin typeface="Segoe UI"/>
+              </a:defRPr>
+            </a:pPr>
+            <a:r>
+              <a:t>• In freezing January, a dying, grinding bearing might only reach 45°C because the air is 2°C.</a:t>
             </a:r>
           </a:p>
           <a:p>
@@ -7291,12 +6939,13 @@
               </a:spcAft>
               <a:defRPr sz="1600">
                 <a:solidFill>
-                  <a:srgbClr val="0F172A"/>
-                </a:solidFill>
-              </a:defRPr>
-            </a:pPr>
-            <a:r>
-              <a:t>• If you feed raw temperatures to an AI, it classifies summer as an anomaly and misses winter failures!</a:t>
+                  <a:srgbClr val="1E293B"/>
+                </a:solidFill>
+                <a:latin typeface="Segoe UI"/>
+              </a:defRPr>
+            </a:pPr>
+            <a:r>
+              <a:t>• If you feed raw temperatures to an AI, it treats summer as an emergency and misses winter breakdowns!</a:t>
             </a:r>
           </a:p>
           <a:p>
@@ -7306,12 +6955,13 @@
               </a:spcAft>
               <a:defRPr sz="1600">
                 <a:solidFill>
-                  <a:srgbClr val="0F172A"/>
-                </a:solidFill>
-              </a:defRPr>
-            </a:pPr>
-            <a:r>
-              <a:t>• THE SCIENTIFIC CHALLENGE: How do we isolate genuine internal mechanical friction from external weather?</a:t>
+                  <a:srgbClr val="1E293B"/>
+                </a:solidFill>
+                <a:latin typeface="Segoe UI"/>
+              </a:defRPr>
+            </a:pPr>
+            <a:r>
+              <a:t>• THE CHALLENGE: How do you isolate mechanical friction from outside weather fluctuations?</a:t>
             </a:r>
           </a:p>
         </p:txBody>
@@ -7324,18 +6974,18 @@
         </p:nvSpPr>
         <p:spPr>
           <a:xfrm>
-            <a:off x="6272784" y="1920240"/>
-            <a:ext cx="5175504" cy="4297680"/>
+            <a:off x="6217920" y="1920240"/>
+            <a:ext cx="5212080" cy="4389120"/>
           </a:xfrm>
           <a:prstGeom prst="roundRect">
             <a:avLst/>
           </a:prstGeom>
           <a:solidFill>
-            <a:srgbClr val="FFFFFF"/>
+            <a:srgbClr val="F8FAFC"/>
           </a:solidFill>
           <a:ln w="19050">
             <a:solidFill>
-              <a:srgbClr val="0284C7"/>
+              <a:srgbClr val="16A34A"/>
             </a:solidFill>
           </a:ln>
         </p:spPr>
@@ -7369,8 +7019,8 @@
         </p:nvSpPr>
         <p:spPr>
           <a:xfrm>
-            <a:off x="6547104" y="2194560"/>
-            <a:ext cx="4626864" cy="3749039"/>
+            <a:off x="6492240" y="2103120"/>
+            <a:ext cx="4663440" cy="4023360"/>
           </a:xfrm>
           <a:prstGeom prst="rect">
             <a:avLst/>
@@ -7385,16 +7035,17 @@
           <a:p>
             <a:pPr>
               <a:spcAft>
-                <a:spcPts val="1400"/>
+                <a:spcPts val="1200"/>
               </a:spcAft>
               <a:defRPr sz="2200" b="1">
                 <a:solidFill>
-                  <a:srgbClr val="0284C7"/>
-                </a:solidFill>
-              </a:defRPr>
-            </a:pPr>
-            <a:r>
-              <a:t>The Thermodynamic Solution (ΔT)</a:t>
+                  <a:srgbClr val="16A34A"/>
+                </a:solidFill>
+                <a:latin typeface="Segoe UI"/>
+              </a:defRPr>
+            </a:pPr>
+            <a:r>
+              <a:t>The Thermodynamic Solution (Delta T)</a:t>
             </a:r>
           </a:p>
           <a:p>
@@ -7404,12 +7055,13 @@
               </a:spcAft>
               <a:defRPr sz="1600">
                 <a:solidFill>
-                  <a:srgbClr val="0F172A"/>
-                </a:solidFill>
-              </a:defRPr>
-            </a:pPr>
-            <a:r>
-              <a:t>• Just like a doctor checks fever above normal room temperature, we engineered Differential Temperatures:</a:t>
+                  <a:srgbClr val="1E293B"/>
+                </a:solidFill>
+                <a:latin typeface="Segoe UI"/>
+              </a:defRPr>
+            </a:pPr>
+            <a:r>
+              <a:t>• Just like a doctor measures a fever above room temperature, we subtracted outside weather: Delta T = T_Component - T_Ambient.</a:t>
             </a:r>
           </a:p>
           <a:p>
@@ -7419,12 +7071,13 @@
               </a:spcAft>
               <a:defRPr sz="1600">
                 <a:solidFill>
-                  <a:srgbClr val="0F172A"/>
-                </a:solidFill>
-              </a:defRPr>
-            </a:pPr>
-            <a:r>
-              <a:t>• ΔT = Component Temperature − Outside Ambient Temperature</a:t>
+                  <a:srgbClr val="1E293B"/>
+                </a:solidFill>
+                <a:latin typeface="Segoe UI"/>
+              </a:defRPr>
+            </a:pPr>
+            <a:r>
+              <a:t>• This wiped out summer/winter seasonal noise and exposed pure bearing and gear friction.</a:t>
             </a:r>
           </a:p>
           <a:p>
@@ -7434,12 +7087,13 @@
               </a:spcAft>
               <a:defRPr sz="1600">
                 <a:solidFill>
-                  <a:srgbClr val="0F172A"/>
-                </a:solidFill>
-              </a:defRPr>
-            </a:pPr>
-            <a:r>
-              <a:t>• Subtracting ambient weather eliminates summer/winter bias and directly exposes bearing friction.</a:t>
+                  <a:srgbClr val="1E293B"/>
+                </a:solidFill>
+                <a:latin typeface="Segoe UI"/>
+              </a:defRPr>
+            </a:pPr>
+            <a:r>
+              <a:t>• Causal 6-Hour Rolling Fever: Tracks slow, creeping heat accumulation without future leakage.</a:t>
             </a:r>
           </a:p>
           <a:p>
@@ -7449,12 +7103,13 @@
               </a:spcAft>
               <a:defRPr sz="1600">
                 <a:solidFill>
-                  <a:srgbClr val="0F172A"/>
-                </a:solidFill>
-              </a:defRPr>
-            </a:pPr>
-            <a:r>
-              <a:t>• Added Causal 6-Hour Moving Averages (RollMean 6h) to track sustained heat accumulation without future data leakage.</a:t>
+                  <a:srgbClr val="1E293B"/>
+                </a:solidFill>
+                <a:latin typeface="Segoe UI"/>
+              </a:defRPr>
+            </a:pPr>
+            <a:r>
+              <a:t>• Gearbox Slip Ratio (RPM_gen / RPM_rotor): Flags dragging or slipping mechanical gears.</a:t>
             </a:r>
           </a:p>
         </p:txBody>
@@ -7492,7 +7147,7 @@
             <a:avLst/>
           </a:prstGeom>
           <a:solidFill>
-            <a:srgbClr val="F8FAFC"/>
+            <a:srgbClr val="FFFFFF"/>
           </a:solidFill>
           <a:ln>
             <a:noFill/>
@@ -7529,7 +7184,7 @@
         <p:spPr>
           <a:xfrm>
             <a:off x="731520" y="365760"/>
-            <a:ext cx="10698480" cy="365760"/>
+            <a:ext cx="10698480" cy="320040"/>
           </a:xfrm>
           <a:prstGeom prst="rect">
             <a:avLst/>
@@ -7543,14 +7198,15 @@
           <a:lstStyle/>
           <a:p>
             <a:pPr>
-              <a:defRPr sz="1300" b="1">
+              <a:defRPr sz="1400" b="1">
                 <a:solidFill>
                   <a:srgbClr val="0284C7"/>
                 </a:solidFill>
-              </a:defRPr>
-            </a:pPr>
-            <a:r>
-              <a:t>THEORETICAL CHALLENGE 3</a:t>
+                <a:latin typeface="Segoe UI"/>
+              </a:defRPr>
+            </a:pPr>
+            <a:r>
+              <a:t>STEP 5: THE MODEL</a:t>
             </a:r>
           </a:p>
         </p:txBody>
@@ -7564,7 +7220,7 @@
         <p:spPr>
           <a:xfrm>
             <a:off x="731520" y="685800"/>
-            <a:ext cx="10698480" cy="640080"/>
+            <a:ext cx="10698480" cy="685800"/>
           </a:xfrm>
           <a:prstGeom prst="rect">
             <a:avLst/>
@@ -7578,14 +7234,15 @@
           <a:lstStyle/>
           <a:p>
             <a:pPr>
-              <a:defRPr sz="3000" b="1">
+              <a:defRPr sz="3200" b="1">
                 <a:solidFill>
                   <a:srgbClr val="0F172A"/>
                 </a:solidFill>
-              </a:defRPr>
-            </a:pPr>
-            <a:r>
-              <a:t>Generalizing to Unseen Strangers (Turbines)</a:t>
+                <a:latin typeface="Segoe UI"/>
+              </a:defRPr>
+            </a:pPr>
+            <a:r>
+              <a:t>Sub-Second Machine Learning (Why XGBoost Wins)</a:t>
             </a:r>
           </a:p>
         </p:txBody>
@@ -7598,7 +7255,7 @@
         </p:nvSpPr>
         <p:spPr>
           <a:xfrm>
-            <a:off x="731520" y="1325880"/>
+            <a:off x="731520" y="1371600"/>
             <a:ext cx="10698480" cy="411480"/>
           </a:xfrm>
           <a:prstGeom prst="rect">
@@ -7613,14 +7270,15 @@
           <a:lstStyle/>
           <a:p>
             <a:pPr>
-              <a:defRPr sz="1700">
+              <a:defRPr sz="1800">
                 <a:solidFill>
                   <a:srgbClr val="475569"/>
                 </a:solidFill>
-              </a:defRPr>
-            </a:pPr>
-            <a:r>
-              <a:t>Why random train/test splits lie, and how Leave-One-Turbine-Out validation proves reality</a:t>
+                <a:latin typeface="Segoe UI"/>
+              </a:defRPr>
+            </a:pPr>
+            <a:r>
+              <a:t>Why tabular SCADA telemetry needs gradient boosted trees, not heavy deep neural networks</a:t>
             </a:r>
           </a:p>
         </p:txBody>
@@ -7634,17 +7292,17 @@
         <p:spPr>
           <a:xfrm>
             <a:off x="731520" y="1920240"/>
-            <a:ext cx="5175504" cy="4297680"/>
+            <a:ext cx="3383280" cy="4389120"/>
           </a:xfrm>
           <a:prstGeom prst="roundRect">
             <a:avLst/>
           </a:prstGeom>
           <a:solidFill>
-            <a:srgbClr val="FFFFFF"/>
+            <a:srgbClr val="F8FAFC"/>
           </a:solidFill>
           <a:ln w="19050">
             <a:solidFill>
-              <a:srgbClr val="DC2626"/>
+              <a:srgbClr val="CBD5E1"/>
             </a:solidFill>
           </a:ln>
         </p:spPr>
@@ -7678,8 +7336,8 @@
         </p:nvSpPr>
         <p:spPr>
           <a:xfrm>
-            <a:off x="1005840" y="2194560"/>
-            <a:ext cx="4626864" cy="3749039"/>
+            <a:off x="914400" y="2103120"/>
+            <a:ext cx="3017520" cy="4023360"/>
           </a:xfrm>
           <a:prstGeom prst="rect">
             <a:avLst/>
@@ -7694,76 +7352,81 @@
           <a:p>
             <a:pPr>
               <a:spcAft>
-                <a:spcPts val="1400"/>
-              </a:spcAft>
-              <a:defRPr sz="2200" b="1">
-                <a:solidFill>
-                  <a:srgbClr val="DC2626"/>
-                </a:solidFill>
-              </a:defRPr>
-            </a:pPr>
-            <a:r>
-              <a:t>The Flaw of Random Splitting</a:t>
-            </a:r>
-          </a:p>
-          <a:p>
-            <a:pPr>
-              <a:spcAft>
                 <a:spcPts val="1000"/>
               </a:spcAft>
+              <a:defRPr sz="2000" b="1">
+                <a:solidFill>
+                  <a:srgbClr val="1E3A8A"/>
+                </a:solidFill>
+                <a:latin typeface="Segoe UI"/>
+              </a:defRPr>
+            </a:pPr>
+            <a:r>
+              <a:t>Logistic Regression</a:t>
+            </a:r>
+          </a:p>
+          <a:p>
+            <a:pPr>
+              <a:spcAft>
+                <a:spcPts val="800"/>
+              </a:spcAft>
               <a:defRPr sz="1600">
                 <a:solidFill>
-                  <a:srgbClr val="0F172A"/>
-                </a:solidFill>
-              </a:defRPr>
-            </a:pPr>
-            <a:r>
-              <a:t>• Turbines are like human beings: each has slight individual baselines.</a:t>
-            </a:r>
-          </a:p>
-          <a:p>
-            <a:pPr>
-              <a:spcAft>
-                <a:spcPts val="1000"/>
+                  <a:srgbClr val="1E293B"/>
+                </a:solidFill>
+                <a:latin typeface="Segoe UI"/>
+              </a:defRPr>
+            </a:pPr>
+            <a:r>
+              <a:t>• Training Time: 1.61 seconds.</a:t>
+            </a:r>
+          </a:p>
+          <a:p>
+            <a:pPr>
+              <a:spcAft>
+                <a:spcPts val="800"/>
               </a:spcAft>
               <a:defRPr sz="1600">
                 <a:solidFill>
-                  <a:srgbClr val="0F172A"/>
-                </a:solidFill>
-              </a:defRPr>
-            </a:pPr>
-            <a:r>
-              <a:t>• Turbine #11 might naturally run 1.5°C warmer than Turbine #0 due to its position on a ridge.</a:t>
-            </a:r>
-          </a:p>
-          <a:p>
-            <a:pPr>
-              <a:spcAft>
-                <a:spcPts val="1000"/>
+                  <a:srgbClr val="1E293B"/>
+                </a:solidFill>
+                <a:latin typeface="Segoe UI"/>
+              </a:defRPr>
+            </a:pPr>
+            <a:r>
+              <a:t>• Test AUC: 0.7544.</a:t>
+            </a:r>
+          </a:p>
+          <a:p>
+            <a:pPr>
+              <a:spcAft>
+                <a:spcPts val="800"/>
               </a:spcAft>
               <a:defRPr sz="1600">
                 <a:solidFill>
-                  <a:srgbClr val="0F172A"/>
-                </a:solidFill>
-              </a:defRPr>
-            </a:pPr>
-            <a:r>
-              <a:t>• If you randomly shuffle 10-minute records, the AI simply memorizes individual turbine IDs rather than universal physics.</a:t>
-            </a:r>
-          </a:p>
-          <a:p>
-            <a:pPr>
-              <a:spcAft>
-                <a:spcPts val="1000"/>
+                  <a:srgbClr val="1E293B"/>
+                </a:solidFill>
+                <a:latin typeface="Segoe UI"/>
+              </a:defRPr>
+            </a:pPr>
+            <a:r>
+              <a:t>• Pros: Simple, highly interpretable linear coefficients.</a:t>
+            </a:r>
+          </a:p>
+          <a:p>
+            <a:pPr>
+              <a:spcAft>
+                <a:spcPts val="800"/>
               </a:spcAft>
               <a:defRPr sz="1600">
                 <a:solidFill>
-                  <a:srgbClr val="0F172A"/>
-                </a:solidFill>
-              </a:defRPr>
-            </a:pPr>
-            <a:r>
-              <a:t>• When deployed on a newly installed turbine, such models fail completely.</a:t>
+                  <a:srgbClr val="1E293B"/>
+                </a:solidFill>
+                <a:latin typeface="Segoe UI"/>
+              </a:defRPr>
+            </a:pPr>
+            <a:r>
+              <a:t>• Cons: Cannot capture non-linear aerodynamic power curves or multi-sensor thermal interactions.</a:t>
             </a:r>
           </a:p>
         </p:txBody>
@@ -7776,14 +7439,162 @@
         </p:nvSpPr>
         <p:spPr>
           <a:xfrm>
-            <a:off x="6272784" y="1920240"/>
-            <a:ext cx="5175504" cy="4297680"/>
+            <a:off x="4389120" y="1920240"/>
+            <a:ext cx="3383280" cy="4389120"/>
           </a:xfrm>
           <a:prstGeom prst="roundRect">
             <a:avLst/>
           </a:prstGeom>
           <a:solidFill>
-            <a:srgbClr val="FFFFFF"/>
+            <a:srgbClr val="F8FAFC"/>
+          </a:solidFill>
+          <a:ln w="19050">
+            <a:solidFill>
+              <a:srgbClr val="CBD5E1"/>
+            </a:solidFill>
+          </a:ln>
+        </p:spPr>
+        <p:style>
+          <a:lnRef idx="1">
+            <a:schemeClr val="accent1"/>
+          </a:lnRef>
+          <a:fillRef idx="3">
+            <a:schemeClr val="accent1"/>
+          </a:fillRef>
+          <a:effectRef idx="2">
+            <a:schemeClr val="accent1"/>
+          </a:effectRef>
+          <a:fontRef idx="minor">
+            <a:schemeClr val="lt1"/>
+          </a:fontRef>
+        </p:style>
+        <p:txBody>
+          <a:bodyPr rtlCol="0" anchor="ctr"/>
+          <a:lstStyle/>
+          <a:p>
+            <a:pPr algn="ctr"/>
+          </a:p>
+        </p:txBody>
+      </p:sp>
+      <p:sp>
+        <p:nvSpPr>
+          <p:cNvPr id="9" name="TextBox 8"/>
+          <p:cNvSpPr txBox="1"/>
+          <p:nvPr/>
+        </p:nvSpPr>
+        <p:spPr>
+          <a:xfrm>
+            <a:off x="4572000" y="2103120"/>
+            <a:ext cx="3017520" cy="4023360"/>
+          </a:xfrm>
+          <a:prstGeom prst="rect">
+            <a:avLst/>
+          </a:prstGeom>
+          <a:noFill/>
+        </p:spPr>
+        <p:txBody>
+          <a:bodyPr wrap="square">
+            <a:spAutoFit/>
+          </a:bodyPr>
+          <a:lstStyle/>
+          <a:p>
+            <a:pPr>
+              <a:spcAft>
+                <a:spcPts val="1000"/>
+              </a:spcAft>
+              <a:defRPr sz="2000" b="1">
+                <a:solidFill>
+                  <a:srgbClr val="1E3A8A"/>
+                </a:solidFill>
+                <a:latin typeface="Segoe UI"/>
+              </a:defRPr>
+            </a:pPr>
+            <a:r>
+              <a:t>Random Forest (ranger)</a:t>
+            </a:r>
+          </a:p>
+          <a:p>
+            <a:pPr>
+              <a:spcAft>
+                <a:spcPts val="800"/>
+              </a:spcAft>
+              <a:defRPr sz="1600">
+                <a:solidFill>
+                  <a:srgbClr val="1E293B"/>
+                </a:solidFill>
+                <a:latin typeface="Segoe UI"/>
+              </a:defRPr>
+            </a:pPr>
+            <a:r>
+              <a:t>• Training Time: 14.58 seconds.</a:t>
+            </a:r>
+          </a:p>
+          <a:p>
+            <a:pPr>
+              <a:spcAft>
+                <a:spcPts val="800"/>
+              </a:spcAft>
+              <a:defRPr sz="1600">
+                <a:solidFill>
+                  <a:srgbClr val="1E293B"/>
+                </a:solidFill>
+                <a:latin typeface="Segoe UI"/>
+              </a:defRPr>
+            </a:pPr>
+            <a:r>
+              <a:t>• Test AUC: 0.7735.</a:t>
+            </a:r>
+          </a:p>
+          <a:p>
+            <a:pPr>
+              <a:spcAft>
+                <a:spcPts val="800"/>
+              </a:spcAft>
+              <a:defRPr sz="1600">
+                <a:solidFill>
+                  <a:srgbClr val="1E293B"/>
+                </a:solidFill>
+                <a:latin typeface="Segoe UI"/>
+              </a:defRPr>
+            </a:pPr>
+            <a:r>
+              <a:t>• Pros: 100 de-correlated trees voting in parallel, resistant to outlier noise.</a:t>
+            </a:r>
+          </a:p>
+          <a:p>
+            <a:pPr>
+              <a:spcAft>
+                <a:spcPts val="800"/>
+              </a:spcAft>
+              <a:defRPr sz="1600">
+                <a:solidFill>
+                  <a:srgbClr val="1E293B"/>
+                </a:solidFill>
+                <a:latin typeface="Segoe UI"/>
+              </a:defRPr>
+            </a:pPr>
+            <a:r>
+              <a:t>• Cons: Slower training; conservative probabilities on extreme minority failure states.</a:t>
+            </a:r>
+          </a:p>
+        </p:txBody>
+      </p:sp>
+      <p:sp>
+        <p:nvSpPr>
+          <p:cNvPr id="10" name="Rounded Rectangle 9"/>
+          <p:cNvSpPr/>
+          <p:nvPr/>
+        </p:nvSpPr>
+        <p:spPr>
+          <a:xfrm>
+            <a:off x="8046720" y="1920240"/>
+            <a:ext cx="3383280" cy="4389120"/>
+          </a:xfrm>
+          <a:prstGeom prst="roundRect">
+            <a:avLst/>
+          </a:prstGeom>
+          <a:solidFill>
+            <a:srgbClr val="F8FAFC"/>
           </a:solidFill>
           <a:ln w="19050">
             <a:solidFill>
@@ -7815,14 +7626,14 @@
       </p:sp>
       <p:sp>
         <p:nvSpPr>
-          <p:cNvPr id="9" name="TextBox 8"/>
+          <p:cNvPr id="11" name="TextBox 10"/>
           <p:cNvSpPr txBox="1"/>
           <p:nvPr/>
         </p:nvSpPr>
         <p:spPr>
           <a:xfrm>
-            <a:off x="6547104" y="2194560"/>
-            <a:ext cx="4626864" cy="3749039"/>
+            <a:off x="8229600" y="2103120"/>
+            <a:ext cx="3017520" cy="4023360"/>
           </a:xfrm>
           <a:prstGeom prst="rect">
             <a:avLst/>
@@ -7837,76 +7648,81 @@
           <a:p>
             <a:pPr>
               <a:spcAft>
-                <a:spcPts val="1400"/>
-              </a:spcAft>
-              <a:defRPr sz="2200" b="1">
+                <a:spcPts val="1000"/>
+              </a:spcAft>
+              <a:defRPr sz="2000" b="1">
                 <a:solidFill>
                   <a:srgbClr val="16A34A"/>
                 </a:solidFill>
-              </a:defRPr>
-            </a:pPr>
-            <a:r>
-              <a:t>Leave-One-Turbine-Out Validation</a:t>
-            </a:r>
-          </a:p>
-          <a:p>
-            <a:pPr>
-              <a:spcAft>
-                <a:spcPts val="1000"/>
+                <a:latin typeface="Segoe UI"/>
+              </a:defRPr>
+            </a:pPr>
+            <a:r>
+              <a:t>XGBoost (Champion)</a:t>
+            </a:r>
+          </a:p>
+          <a:p>
+            <a:pPr>
+              <a:spcAft>
+                <a:spcPts val="800"/>
               </a:spcAft>
               <a:defRPr sz="1600">
                 <a:solidFill>
-                  <a:srgbClr val="0F172A"/>
-                </a:solidFill>
-              </a:defRPr>
-            </a:pPr>
-            <a:r>
-              <a:t>• We erased turbine ID (asset_id) from all model input features.</a:t>
-            </a:r>
-          </a:p>
-          <a:p>
-            <a:pPr>
-              <a:spcAft>
-                <a:spcPts val="1000"/>
+                  <a:srgbClr val="1E293B"/>
+                </a:solidFill>
+                <a:latin typeface="Segoe UI"/>
+              </a:defRPr>
+            </a:pPr>
+            <a:r>
+              <a:t>• Training Time: 0.67 seconds!</a:t>
+            </a:r>
+          </a:p>
+          <a:p>
+            <a:pPr>
+              <a:spcAft>
+                <a:spcPts val="800"/>
               </a:spcAft>
               <a:defRPr sz="1600">
                 <a:solidFill>
-                  <a:srgbClr val="0F172A"/>
-                </a:solidFill>
-              </a:defRPr>
-            </a:pPr>
-            <a:r>
-              <a:t>• Enforced Leave-One-Turbine-Out Group Cross-Validation: Train on Turbines 0, 10, 11, 13 and evaluate on held-out Turbine 21.</a:t>
-            </a:r>
-          </a:p>
-          <a:p>
-            <a:pPr>
-              <a:spcAft>
-                <a:spcPts val="1000"/>
+                  <a:srgbClr val="1E293B"/>
+                </a:solidFill>
+                <a:latin typeface="Segoe UI"/>
+              </a:defRPr>
+            </a:pPr>
+            <a:r>
+              <a:t>• Test AUC: 0.8297 (Top score).</a:t>
+            </a:r>
+          </a:p>
+          <a:p>
+            <a:pPr>
+              <a:spcAft>
+                <a:spcPts val="800"/>
               </a:spcAft>
               <a:defRPr sz="1600">
                 <a:solidFill>
-                  <a:srgbClr val="0F172A"/>
-                </a:solidFill>
-              </a:defRPr>
-            </a:pPr>
-            <a:r>
-              <a:t>• The model is forced to learn universal physical wear signatures that apply to ANY turbine.</a:t>
-            </a:r>
-          </a:p>
-          <a:p>
-            <a:pPr>
-              <a:spcAft>
-                <a:spcPts val="1000"/>
+                  <a:srgbClr val="1E293B"/>
+                </a:solidFill>
+                <a:latin typeface="Segoe UI"/>
+              </a:defRPr>
+            </a:pPr>
+            <a:r>
+              <a:t>• RAM Usage: Only 109 MB.</a:t>
+            </a:r>
+          </a:p>
+          <a:p>
+            <a:pPr>
+              <a:spcAft>
+                <a:spcPts val="800"/>
               </a:spcAft>
               <a:defRPr sz="1600">
                 <a:solidFill>
-                  <a:srgbClr val="0F172A"/>
-                </a:solidFill>
-              </a:defRPr>
-            </a:pPr>
-            <a:r>
-              <a:t>• PROVEN RESULT: Achieved 0.83 Test AUC on completely unseen turbines in held-out validation.</a:t>
+                  <a:srgbClr val="1E293B"/>
+                </a:solidFill>
+                <a:latin typeface="Segoe UI"/>
+              </a:defRPr>
+            </a:pPr>
+            <a:r>
+              <a:t>• Why It Wins: Gradient boosting focuses sequentially on difficult subtle temperature drifts. Runs in sub-second speed on standard laptop CPUs.</a:t>
             </a:r>
           </a:p>
         </p:txBody>
@@ -7944,7 +7760,7 @@
             <a:avLst/>
           </a:prstGeom>
           <a:solidFill>
-            <a:srgbClr val="F8FAFC"/>
+            <a:srgbClr val="FFFFFF"/>
           </a:solidFill>
           <a:ln>
             <a:noFill/>
@@ -7981,7 +7797,7 @@
         <p:spPr>
           <a:xfrm>
             <a:off x="731520" y="365760"/>
-            <a:ext cx="10698480" cy="365760"/>
+            <a:ext cx="10698480" cy="320040"/>
           </a:xfrm>
           <a:prstGeom prst="rect">
             <a:avLst/>
@@ -7995,14 +7811,15 @@
           <a:lstStyle/>
           <a:p>
             <a:pPr>
-              <a:defRPr sz="1300" b="1">
+              <a:defRPr sz="1400" b="1">
                 <a:solidFill>
                   <a:srgbClr val="0284C7"/>
                 </a:solidFill>
-              </a:defRPr>
-            </a:pPr>
-            <a:r>
-              <a:t>SOLUTION ARCHITECTURE</a:t>
+                <a:latin typeface="Segoe UI"/>
+              </a:defRPr>
+            </a:pPr>
+            <a:r>
+              <a:t>STEP 6: SCIENTIFIC TESTING</a:t>
             </a:r>
           </a:p>
         </p:txBody>
@@ -8016,7 +7833,7 @@
         <p:spPr>
           <a:xfrm>
             <a:off x="731520" y="685800"/>
-            <a:ext cx="10698480" cy="640080"/>
+            <a:ext cx="10698480" cy="685800"/>
           </a:xfrm>
           <a:prstGeom prst="rect">
             <a:avLst/>
@@ -8030,14 +7847,15 @@
           <a:lstStyle/>
           <a:p>
             <a:pPr>
-              <a:defRPr sz="3000" b="1">
+              <a:defRPr sz="3200" b="1">
                 <a:solidFill>
                   <a:srgbClr val="0F172A"/>
                 </a:solidFill>
-              </a:defRPr>
-            </a:pPr>
-            <a:r>
-              <a:t>How We Built the Production System</a:t>
+                <a:latin typeface="Segoe UI"/>
+              </a:defRPr>
+            </a:pPr>
+            <a:r>
+              <a:t>Testing on Complete Strangers (Turbine Generalization)</a:t>
             </a:r>
           </a:p>
         </p:txBody>
@@ -8050,7 +7868,7 @@
         </p:nvSpPr>
         <p:spPr>
           <a:xfrm>
-            <a:off x="731520" y="1325880"/>
+            <a:off x="731520" y="1371600"/>
             <a:ext cx="10698480" cy="411480"/>
           </a:xfrm>
           <a:prstGeom prst="rect">
@@ -8065,14 +7883,15 @@
           <a:lstStyle/>
           <a:p>
             <a:pPr>
-              <a:defRPr sz="1700">
+              <a:defRPr sz="1800">
                 <a:solidFill>
                   <a:srgbClr val="475569"/>
                 </a:solidFill>
-              </a:defRPr>
-            </a:pPr>
-            <a:r>
-              <a:t>A streamlined, high-speed pipeline combining physics, ensembles, and explainability</a:t>
+                <a:latin typeface="Segoe UI"/>
+              </a:defRPr>
+            </a:pPr>
+            <a:r>
+              <a:t>Why random train/test splits lie and how Leave-One-Turbine-Out validation proves reality</a:t>
             </a:r>
           </a:p>
         </p:txBody>
@@ -8086,17 +7905,17 @@
         <p:spPr>
           <a:xfrm>
             <a:off x="731520" y="1920240"/>
-            <a:ext cx="2487168" cy="4297680"/>
+            <a:ext cx="5212080" cy="4389120"/>
           </a:xfrm>
           <a:prstGeom prst="roundRect">
             <a:avLst/>
           </a:prstGeom>
           <a:solidFill>
-            <a:srgbClr val="FFFFFF"/>
+            <a:srgbClr val="F8FAFC"/>
           </a:solidFill>
           <a:ln w="19050">
             <a:solidFill>
-              <a:srgbClr val="1E3A8A"/>
+              <a:srgbClr val="DC2626"/>
             </a:solidFill>
           </a:ln>
         </p:spPr>
@@ -8130,8 +7949,8 @@
         </p:nvSpPr>
         <p:spPr>
           <a:xfrm>
-            <a:off x="914400" y="2103120"/>
-            <a:ext cx="2121408" cy="3931920"/>
+            <a:off x="1005840" y="2103120"/>
+            <a:ext cx="4663440" cy="4023360"/>
           </a:xfrm>
           <a:prstGeom prst="rect">
             <a:avLst/>
@@ -8146,16 +7965,17 @@
           <a:p>
             <a:pPr>
               <a:spcAft>
-                <a:spcPts val="1400"/>
-              </a:spcAft>
-              <a:defRPr sz="1900" b="1">
-                <a:solidFill>
-                  <a:srgbClr val="1E3A8A"/>
-                </a:solidFill>
-              </a:defRPr>
-            </a:pPr>
-            <a:r>
-              <a:t>1. Data Hygiene</a:t>
+                <a:spcPts val="1200"/>
+              </a:spcAft>
+              <a:defRPr sz="2200" b="1">
+                <a:solidFill>
+                  <a:srgbClr val="DC2626"/>
+                </a:solidFill>
+                <a:latin typeface="Segoe UI"/>
+              </a:defRPr>
+            </a:pPr>
+            <a:r>
+              <a:t>Why Standard Random Splits Lie</a:t>
             </a:r>
           </a:p>
           <a:p>
@@ -8163,14 +7983,15 @@
               <a:spcAft>
                 <a:spcPts val="1000"/>
               </a:spcAft>
-              <a:defRPr sz="1500">
-                <a:solidFill>
-                  <a:srgbClr val="0F172A"/>
-                </a:solidFill>
-              </a:defRPr>
-            </a:pPr>
-            <a:r>
-              <a:t>• Parsed semicolon delimiters.</a:t>
+              <a:defRPr sz="1600">
+                <a:solidFill>
+                  <a:srgbClr val="1E293B"/>
+                </a:solidFill>
+                <a:latin typeface="Segoe UI"/>
+              </a:defRPr>
+            </a:pPr>
+            <a:r>
+              <a:t>• Turbines are like human beings: each has slight personal quirks.</a:t>
             </a:r>
           </a:p>
           <a:p>
@@ -8178,14 +7999,15 @@
               <a:spcAft>
                 <a:spcPts val="1000"/>
               </a:spcAft>
-              <a:defRPr sz="1500">
-                <a:solidFill>
-                  <a:srgbClr val="0F172A"/>
-                </a:solidFill>
-              </a:defRPr>
-            </a:pPr>
-            <a:r>
-              <a:t>• Audited 102M data points.</a:t>
+              <a:defRPr sz="1600">
+                <a:solidFill>
+                  <a:srgbClr val="1E293B"/>
+                </a:solidFill>
+                <a:latin typeface="Segoe UI"/>
+              </a:defRPr>
+            </a:pPr>
+            <a:r>
+              <a:t>• Turbine #11 might naturally run 1.5°C warmer than Turbine #0 due to its position on the hill.</a:t>
             </a:r>
           </a:p>
           <a:p>
@@ -8193,14 +8015,15 @@
               <a:spcAft>
                 <a:spcPts val="1000"/>
               </a:spcAft>
-              <a:defRPr sz="1500">
-                <a:solidFill>
-                  <a:srgbClr val="0F172A"/>
-                </a:solidFill>
-              </a:defRPr>
-            </a:pPr>
-            <a:r>
-              <a:t>• Sparse NAs (&lt;0.00004%) forward-filled with locf.</a:t>
+              <a:defRPr sz="1600">
+                <a:solidFill>
+                  <a:srgbClr val="1E293B"/>
+                </a:solidFill>
+                <a:latin typeface="Segoe UI"/>
+              </a:defRPr>
+            </a:pPr>
+            <a:r>
+              <a:t>• If you randomly shuffle 10-minute rows, the model memorizes individual turbine IDs rather than universal physics.</a:t>
             </a:r>
           </a:p>
           <a:p>
@@ -8208,14 +8031,15 @@
               <a:spcAft>
                 <a:spcPts val="1000"/>
               </a:spcAft>
-              <a:defRPr sz="1500">
-                <a:solidFill>
-                  <a:srgbClr val="0F172A"/>
-                </a:solidFill>
-              </a:defRPr>
-            </a:pPr>
-            <a:r>
-              <a:t>• Zero artificial values (no SMOTE).</a:t>
+              <a:defRPr sz="1600">
+                <a:solidFill>
+                  <a:srgbClr val="1E293B"/>
+                </a:solidFill>
+                <a:latin typeface="Segoe UI"/>
+              </a:defRPr>
+            </a:pPr>
+            <a:r>
+              <a:t>• When installed on a brand-new turbine, models trained with random splits fail completely.</a:t>
             </a:r>
           </a:p>
         </p:txBody>
@@ -8228,157 +8052,14 @@
         </p:nvSpPr>
         <p:spPr>
           <a:xfrm>
-            <a:off x="3456432" y="1920240"/>
-            <a:ext cx="2487168" cy="4297680"/>
+            <a:off x="6217920" y="1920240"/>
+            <a:ext cx="5212080" cy="4389120"/>
           </a:xfrm>
           <a:prstGeom prst="roundRect">
             <a:avLst/>
           </a:prstGeom>
           <a:solidFill>
-            <a:srgbClr val="FFFFFF"/>
-          </a:solidFill>
-          <a:ln w="19050">
-            <a:solidFill>
-              <a:srgbClr val="0284C7"/>
-            </a:solidFill>
-          </a:ln>
-        </p:spPr>
-        <p:style>
-          <a:lnRef idx="1">
-            <a:schemeClr val="accent1"/>
-          </a:lnRef>
-          <a:fillRef idx="3">
-            <a:schemeClr val="accent1"/>
-          </a:fillRef>
-          <a:effectRef idx="2">
-            <a:schemeClr val="accent1"/>
-          </a:effectRef>
-          <a:fontRef idx="minor">
-            <a:schemeClr val="lt1"/>
-          </a:fontRef>
-        </p:style>
-        <p:txBody>
-          <a:bodyPr rtlCol="0" anchor="ctr"/>
-          <a:lstStyle/>
-          <a:p>
-            <a:pPr algn="ctr"/>
-          </a:p>
-        </p:txBody>
-      </p:sp>
-      <p:sp>
-        <p:nvSpPr>
-          <p:cNvPr id="9" name="TextBox 8"/>
-          <p:cNvSpPr txBox="1"/>
-          <p:nvPr/>
-        </p:nvSpPr>
-        <p:spPr>
-          <a:xfrm>
-            <a:off x="3639312" y="2103120"/>
-            <a:ext cx="2121408" cy="3931920"/>
-          </a:xfrm>
-          <a:prstGeom prst="rect">
-            <a:avLst/>
-          </a:prstGeom>
-          <a:noFill/>
-        </p:spPr>
-        <p:txBody>
-          <a:bodyPr wrap="square">
-            <a:spAutoFit/>
-          </a:bodyPr>
-          <a:lstStyle/>
-          <a:p>
-            <a:pPr>
-              <a:spcAft>
-                <a:spcPts val="1400"/>
-              </a:spcAft>
-              <a:defRPr sz="1900" b="1">
-                <a:solidFill>
-                  <a:srgbClr val="0284C7"/>
-                </a:solidFill>
-              </a:defRPr>
-            </a:pPr>
-            <a:r>
-              <a:t>2. Physics Features</a:t>
-            </a:r>
-          </a:p>
-          <a:p>
-            <a:pPr>
-              <a:spcAft>
-                <a:spcPts val="1000"/>
-              </a:spcAft>
-              <a:defRPr sz="1500">
-                <a:solidFill>
-                  <a:srgbClr val="0F172A"/>
-                </a:solidFill>
-              </a:defRPr>
-            </a:pPr>
-            <a:r>
-              <a:t>• Delta T differentials for Gearbox, Generator, Transformer.</a:t>
-            </a:r>
-          </a:p>
-          <a:p>
-            <a:pPr>
-              <a:spcAft>
-                <a:spcPts val="1000"/>
-              </a:spcAft>
-              <a:defRPr sz="1500">
-                <a:solidFill>
-                  <a:srgbClr val="0F172A"/>
-                </a:solidFill>
-              </a:defRPr>
-            </a:pPr>
-            <a:r>
-              <a:t>• Causal 6h rolling averages.</a:t>
-            </a:r>
-          </a:p>
-          <a:p>
-            <a:pPr>
-              <a:spcAft>
-                <a:spcPts val="1000"/>
-              </a:spcAft>
-              <a:defRPr sz="1500">
-                <a:solidFill>
-                  <a:srgbClr val="0F172A"/>
-                </a:solidFill>
-              </a:defRPr>
-            </a:pPr>
-            <a:r>
-              <a:t>• Gear ratio (Gen RPM / Rotor RPM).</a:t>
-            </a:r>
-          </a:p>
-          <a:p>
-            <a:pPr>
-              <a:spcAft>
-                <a:spcPts val="1000"/>
-              </a:spcAft>
-              <a:defRPr sz="1500">
-                <a:solidFill>
-                  <a:srgbClr val="0F172A"/>
-                </a:solidFill>
-              </a:defRPr>
-            </a:pPr>
-            <a:r>
-              <a:t>• Cp power conversion proxy.</a:t>
-            </a:r>
-          </a:p>
-        </p:txBody>
-      </p:sp>
-      <p:sp>
-        <p:nvSpPr>
-          <p:cNvPr id="10" name="Rounded Rectangle 9"/>
-          <p:cNvSpPr/>
-          <p:nvPr/>
-        </p:nvSpPr>
-        <p:spPr>
-          <a:xfrm>
-            <a:off x="6181344" y="1920240"/>
-            <a:ext cx="2487168" cy="4297680"/>
-          </a:xfrm>
-          <a:prstGeom prst="roundRect">
-            <a:avLst/>
-          </a:prstGeom>
-          <a:solidFill>
-            <a:srgbClr val="FFFFFF"/>
+            <a:srgbClr val="F8FAFC"/>
           </a:solidFill>
           <a:ln w="19050">
             <a:solidFill>
@@ -8410,14 +8091,14 @@
       </p:sp>
       <p:sp>
         <p:nvSpPr>
-          <p:cNvPr id="11" name="TextBox 10"/>
+          <p:cNvPr id="9" name="TextBox 8"/>
           <p:cNvSpPr txBox="1"/>
           <p:nvPr/>
         </p:nvSpPr>
         <p:spPr>
           <a:xfrm>
-            <a:off x="6364224" y="2103120"/>
-            <a:ext cx="2121408" cy="3931920"/>
+            <a:off x="6492240" y="2103120"/>
+            <a:ext cx="4663440" cy="4023360"/>
           </a:xfrm>
           <a:prstGeom prst="rect">
             <a:avLst/>
@@ -8432,16 +8113,17 @@
           <a:p>
             <a:pPr>
               <a:spcAft>
-                <a:spcPts val="1400"/>
-              </a:spcAft>
-              <a:defRPr sz="1900" b="1">
+                <a:spcPts val="1200"/>
+              </a:spcAft>
+              <a:defRPr sz="2200" b="1">
                 <a:solidFill>
                   <a:srgbClr val="16A34A"/>
                 </a:solidFill>
-              </a:defRPr>
-            </a:pPr>
-            <a:r>
-              <a:t>3. High-Speed Models</a:t>
+                <a:latin typeface="Segoe UI"/>
+              </a:defRPr>
+            </a:pPr>
+            <a:r>
+              <a:t>Leave-One-Turbine-Out Proof</a:t>
             </a:r>
           </a:p>
           <a:p>
@@ -8449,14 +8131,15 @@
               <a:spcAft>
                 <a:spcPts val="1000"/>
               </a:spcAft>
-              <a:defRPr sz="1500">
-                <a:solidFill>
-                  <a:srgbClr val="0F172A"/>
-                </a:solidFill>
-              </a:defRPr>
-            </a:pPr>
-            <a:r>
-              <a:t>• Benchmarked GLM, Random Forest, and XGBoost.</a:t>
+              <a:defRPr sz="1600">
+                <a:solidFill>
+                  <a:srgbClr val="1E293B"/>
+                </a:solidFill>
+                <a:latin typeface="Segoe UI"/>
+              </a:defRPr>
+            </a:pPr>
+            <a:r>
+              <a:t>• We completely removed turbine ID (asset_id) from all model input features.</a:t>
             </a:r>
           </a:p>
           <a:p>
@@ -8464,14 +8147,15 @@
               <a:spcAft>
                 <a:spcPts val="1000"/>
               </a:spcAft>
-              <a:defRPr sz="1500">
-                <a:solidFill>
-                  <a:srgbClr val="0F172A"/>
-                </a:solidFill>
-              </a:defRPr>
-            </a:pPr>
-            <a:r>
-              <a:t>• Sub-second training (&lt;1 sec).</a:t>
+              <a:defRPr sz="1600">
+                <a:solidFill>
+                  <a:srgbClr val="1E293B"/>
+                </a:solidFill>
+                <a:latin typeface="Segoe UI"/>
+              </a:defRPr>
+            </a:pPr>
+            <a:r>
+              <a:t>• We trained the model on Turbines 0, 10, 11, and 13, and evaluated it on a totally unseen held-out Turbine 21.</a:t>
             </a:r>
           </a:p>
           <a:p>
@@ -8479,14 +8163,15 @@
               <a:spcAft>
                 <a:spcPts val="1000"/>
               </a:spcAft>
-              <a:defRPr sz="1500">
-                <a:solidFill>
-                  <a:srgbClr val="0F172A"/>
-                </a:solidFill>
-              </a:defRPr>
-            </a:pPr>
-            <a:r>
-              <a:t>• Compact memory footprint (109 MB RAM).</a:t>
+              <a:defRPr sz="1600">
+                <a:solidFill>
+                  <a:srgbClr val="1E293B"/>
+                </a:solidFill>
+                <a:latin typeface="Segoe UI"/>
+              </a:defRPr>
+            </a:pPr>
+            <a:r>
+              <a:t>• The AI was forced to learn universal laws of mechanical wear that apply to ANY machine.</a:t>
             </a:r>
           </a:p>
           <a:p>
@@ -8494,157 +8179,15 @@
               <a:spcAft>
                 <a:spcPts val="1000"/>
               </a:spcAft>
-              <a:defRPr sz="1500">
-                <a:solidFill>
-                  <a:srgbClr val="0F172A"/>
-                </a:solidFill>
-              </a:defRPr>
-            </a:pPr>
-            <a:r>
-              <a:t>• Group CV across turbines.</a:t>
-            </a:r>
-          </a:p>
-        </p:txBody>
-      </p:sp>
-      <p:sp>
-        <p:nvSpPr>
-          <p:cNvPr id="12" name="Rounded Rectangle 11"/>
-          <p:cNvSpPr/>
-          <p:nvPr/>
-        </p:nvSpPr>
-        <p:spPr>
-          <a:xfrm>
-            <a:off x="8906256" y="1920240"/>
-            <a:ext cx="2487168" cy="4297680"/>
-          </a:xfrm>
-          <a:prstGeom prst="roundRect">
-            <a:avLst/>
-          </a:prstGeom>
-          <a:solidFill>
-            <a:srgbClr val="FFFFFF"/>
-          </a:solidFill>
-          <a:ln w="19050">
-            <a:solidFill>
-              <a:srgbClr val="D97706"/>
-            </a:solidFill>
-          </a:ln>
-        </p:spPr>
-        <p:style>
-          <a:lnRef idx="1">
-            <a:schemeClr val="accent1"/>
-          </a:lnRef>
-          <a:fillRef idx="3">
-            <a:schemeClr val="accent1"/>
-          </a:fillRef>
-          <a:effectRef idx="2">
-            <a:schemeClr val="accent1"/>
-          </a:effectRef>
-          <a:fontRef idx="minor">
-            <a:schemeClr val="lt1"/>
-          </a:fontRef>
-        </p:style>
-        <p:txBody>
-          <a:bodyPr rtlCol="0" anchor="ctr"/>
-          <a:lstStyle/>
-          <a:p>
-            <a:pPr algn="ctr"/>
-          </a:p>
-        </p:txBody>
-      </p:sp>
-      <p:sp>
-        <p:nvSpPr>
-          <p:cNvPr id="13" name="TextBox 12"/>
-          <p:cNvSpPr txBox="1"/>
-          <p:nvPr/>
-        </p:nvSpPr>
-        <p:spPr>
-          <a:xfrm>
-            <a:off x="9089136" y="2103120"/>
-            <a:ext cx="2121408" cy="3931920"/>
-          </a:xfrm>
-          <a:prstGeom prst="rect">
-            <a:avLst/>
-          </a:prstGeom>
-          <a:noFill/>
-        </p:spPr>
-        <p:txBody>
-          <a:bodyPr wrap="square">
-            <a:spAutoFit/>
-          </a:bodyPr>
-          <a:lstStyle/>
-          <a:p>
-            <a:pPr>
-              <a:spcAft>
-                <a:spcPts val="1400"/>
-              </a:spcAft>
-              <a:defRPr sz="1900" b="1">
-                <a:solidFill>
-                  <a:srgbClr val="D97706"/>
-                </a:solidFill>
-              </a:defRPr>
-            </a:pPr>
-            <a:r>
-              <a:t>4. Explainability &amp; UI</a:t>
-            </a:r>
-          </a:p>
-          <a:p>
-            <a:pPr>
-              <a:spcAft>
-                <a:spcPts val="1000"/>
-              </a:spcAft>
-              <a:defRPr sz="1500">
-                <a:solidFill>
-                  <a:srgbClr val="0F172A"/>
-                </a:solidFill>
-              </a:defRPr>
-            </a:pPr>
-            <a:r>
-              <a:t>• Exact TreeSHAP attributions.</a:t>
-            </a:r>
-          </a:p>
-          <a:p>
-            <a:pPr>
-              <a:spcAft>
-                <a:spcPts val="1000"/>
-              </a:spcAft>
-              <a:defRPr sz="1500">
-                <a:solidFill>
-                  <a:srgbClr val="0F172A"/>
-                </a:solidFill>
-              </a:defRPr>
-            </a:pPr>
-            <a:r>
-              <a:t>• LIME local decision rules.</a:t>
-            </a:r>
-          </a:p>
-          <a:p>
-            <a:pPr>
-              <a:spcAft>
-                <a:spcPts val="1000"/>
-              </a:spcAft>
-              <a:defRPr sz="1500">
-                <a:solidFill>
-                  <a:srgbClr val="0F172A"/>
-                </a:solidFill>
-              </a:defRPr>
-            </a:pPr>
-            <a:r>
-              <a:t>• Physical consistency verification.</a:t>
-            </a:r>
-          </a:p>
-          <a:p>
-            <a:pPr>
-              <a:spcAft>
-                <a:spcPts val="1000"/>
-              </a:spcAft>
-              <a:defRPr sz="1500">
-                <a:solidFill>
-                  <a:srgbClr val="0F172A"/>
-                </a:solidFill>
-              </a:defRPr>
-            </a:pPr>
-            <a:r>
-              <a:t>• Production Shiny dashboard.</a:t>
+              <a:defRPr sz="1600">
+                <a:solidFill>
+                  <a:srgbClr val="1E293B"/>
+                </a:solidFill>
+                <a:latin typeface="Segoe UI"/>
+              </a:defRPr>
+            </a:pPr>
+            <a:r>
+              <a:t>• PROVEN RESULT: Achieved 0.83 AUC on held-out stranger turbine, proving robust real-world generalization.</a:t>
             </a:r>
           </a:p>
         </p:txBody>
@@ -8682,7 +8225,7 @@
             <a:avLst/>
           </a:prstGeom>
           <a:solidFill>
-            <a:srgbClr val="F8FAFC"/>
+            <a:srgbClr val="FFFFFF"/>
           </a:solidFill>
           <a:ln>
             <a:noFill/>
@@ -8719,7 +8262,7 @@
         <p:spPr>
           <a:xfrm>
             <a:off x="731520" y="365760"/>
-            <a:ext cx="10698480" cy="365760"/>
+            <a:ext cx="10698480" cy="320040"/>
           </a:xfrm>
           <a:prstGeom prst="rect">
             <a:avLst/>
@@ -8733,14 +8276,15 @@
           <a:lstStyle/>
           <a:p>
             <a:pPr>
-              <a:defRPr sz="1300" b="1">
+              <a:defRPr sz="1400" b="1">
                 <a:solidFill>
                   <a:srgbClr val="0284C7"/>
                 </a:solidFill>
-              </a:defRPr>
-            </a:pPr>
-            <a:r>
-              <a:t>ALTERNATIVE APPROACHES</a:t>
+                <a:latin typeface="Segoe UI"/>
+              </a:defRPr>
+            </a:pPr>
+            <a:r>
+              <a:t>STEP 7: LEAD TIME RESULTS</a:t>
             </a:r>
           </a:p>
         </p:txBody>
@@ -8754,7 +8298,7 @@
         <p:spPr>
           <a:xfrm>
             <a:off x="731520" y="685800"/>
-            <a:ext cx="10698480" cy="640080"/>
+            <a:ext cx="10698480" cy="685800"/>
           </a:xfrm>
           <a:prstGeom prst="rect">
             <a:avLst/>
@@ -8768,14 +8312,15 @@
           <a:lstStyle/>
           <a:p>
             <a:pPr>
-              <a:defRPr sz="3000" b="1">
+              <a:defRPr sz="3200" b="1">
                 <a:solidFill>
                   <a:srgbClr val="0F172A"/>
                 </a:solidFill>
-              </a:defRPr>
-            </a:pPr>
-            <a:r>
-              <a:t>What Other Approaches Could We Consider?</a:t>
+                <a:latin typeface="Segoe UI"/>
+              </a:defRPr>
+            </a:pPr>
+            <a:r>
+              <a:t>8 to 34 Days Notice: The CARE Earliness Results</a:t>
             </a:r>
           </a:p>
         </p:txBody>
@@ -8788,7 +8333,7 @@
         </p:nvSpPr>
         <p:spPr>
           <a:xfrm>
-            <a:off x="731520" y="1325880"/>
+            <a:off x="731520" y="1371600"/>
             <a:ext cx="10698480" cy="411480"/>
           </a:xfrm>
           <a:prstGeom prst="rect">
@@ -8803,14 +8348,15 @@
           <a:lstStyle/>
           <a:p>
             <a:pPr>
-              <a:defRPr sz="1700">
+              <a:defRPr sz="1800">
                 <a:solidFill>
                   <a:srgbClr val="475569"/>
                 </a:solidFill>
-              </a:defRPr>
-            </a:pPr>
-            <a:r>
-              <a:t>Evaluating deep learning, autoencoders, vibration FFTs, and synthetic sampling</a:t>
+                <a:latin typeface="Segoe UI"/>
+              </a:defRPr>
+            </a:pPr>
+            <a:r>
+              <a:t>Real lead times achieved before catastrophic trip across all major physical assemblies</a:t>
             </a:r>
           </a:p>
         </p:txBody>
@@ -8824,13 +8370,239 @@
         <p:spPr>
           <a:xfrm>
             <a:off x="731520" y="1920240"/>
-            <a:ext cx="5175504" cy="2057400"/>
+            <a:ext cx="5212080" cy="2057400"/>
           </a:xfrm>
           <a:prstGeom prst="roundRect">
             <a:avLst/>
           </a:prstGeom>
           <a:solidFill>
-            <a:srgbClr val="FFFFFF"/>
+            <a:srgbClr val="F8FAFC"/>
+          </a:solidFill>
+          <a:ln w="19050">
+            <a:solidFill>
+              <a:srgbClr val="0284C7"/>
+            </a:solidFill>
+          </a:ln>
+        </p:spPr>
+        <p:style>
+          <a:lnRef idx="1">
+            <a:schemeClr val="accent1"/>
+          </a:lnRef>
+          <a:fillRef idx="3">
+            <a:schemeClr val="accent1"/>
+          </a:fillRef>
+          <a:effectRef idx="2">
+            <a:schemeClr val="accent1"/>
+          </a:effectRef>
+          <a:fontRef idx="minor">
+            <a:schemeClr val="lt1"/>
+          </a:fontRef>
+        </p:style>
+        <p:txBody>
+          <a:bodyPr rtlCol="0" anchor="ctr"/>
+          <a:lstStyle/>
+          <a:p>
+            <a:pPr algn="ctr"/>
+          </a:p>
+        </p:txBody>
+      </p:sp>
+      <p:sp>
+        <p:nvSpPr>
+          <p:cNvPr id="7" name="TextBox 6"/>
+          <p:cNvSpPr txBox="1"/>
+          <p:nvPr/>
+        </p:nvSpPr>
+        <p:spPr>
+          <a:xfrm>
+            <a:off x="960120" y="2084832"/>
+            <a:ext cx="4754880" cy="1728216"/>
+          </a:xfrm>
+          <a:prstGeom prst="rect">
+            <a:avLst/>
+          </a:prstGeom>
+          <a:noFill/>
+        </p:spPr>
+        <p:txBody>
+          <a:bodyPr wrap="square">
+            <a:spAutoFit/>
+          </a:bodyPr>
+          <a:lstStyle/>
+          <a:p>
+            <a:pPr>
+              <a:defRPr sz="1900" b="1">
+                <a:solidFill>
+                  <a:srgbClr val="0284C7"/>
+                </a:solidFill>
+                <a:latin typeface="Segoe UI"/>
+              </a:defRPr>
+            </a:pPr>
+            <a:r>
+              <a:t>Gearbox High-Speed Shaft</a:t>
+            </a:r>
+          </a:p>
+          <a:p>
+            <a:pPr>
+              <a:spcBef>
+                <a:spcPts val="300"/>
+              </a:spcBef>
+              <a:spcAft>
+                <a:spcPts val="400"/>
+              </a:spcAft>
+              <a:defRPr sz="2100" b="1">
+                <a:solidFill>
+                  <a:srgbClr val="0F172A"/>
+                </a:solidFill>
+                <a:latin typeface="Segoe UI"/>
+              </a:defRPr>
+            </a:pPr>
+            <a:r>
+              <a:t>14.0 to 16.6 Days Notice</a:t>
+            </a:r>
+          </a:p>
+          <a:p>
+            <a:pPr>
+              <a:defRPr sz="1400">
+                <a:solidFill>
+                  <a:srgbClr val="1E293B"/>
+                </a:solidFill>
+                <a:latin typeface="Segoe UI"/>
+              </a:defRPr>
+            </a:pPr>
+            <a:r>
+              <a:t>337 to 400 hours advance warning before high-speed shaft bearing failure. Ample time to mobilize cranes and stage replacements.</a:t>
+            </a:r>
+          </a:p>
+        </p:txBody>
+      </p:sp>
+      <p:sp>
+        <p:nvSpPr>
+          <p:cNvPr id="8" name="Rounded Rectangle 7"/>
+          <p:cNvSpPr/>
+          <p:nvPr/>
+        </p:nvSpPr>
+        <p:spPr>
+          <a:xfrm>
+            <a:off x="6217920" y="1920240"/>
+            <a:ext cx="5212080" cy="2057400"/>
+          </a:xfrm>
+          <a:prstGeom prst="roundRect">
+            <a:avLst/>
+          </a:prstGeom>
+          <a:solidFill>
+            <a:srgbClr val="F8FAFC"/>
+          </a:solidFill>
+          <a:ln w="19050">
+            <a:solidFill>
+              <a:srgbClr val="16A34A"/>
+            </a:solidFill>
+          </a:ln>
+        </p:spPr>
+        <p:style>
+          <a:lnRef idx="1">
+            <a:schemeClr val="accent1"/>
+          </a:lnRef>
+          <a:fillRef idx="3">
+            <a:schemeClr val="accent1"/>
+          </a:fillRef>
+          <a:effectRef idx="2">
+            <a:schemeClr val="accent1"/>
+          </a:effectRef>
+          <a:fontRef idx="minor">
+            <a:schemeClr val="lt1"/>
+          </a:fontRef>
+        </p:style>
+        <p:txBody>
+          <a:bodyPr rtlCol="0" anchor="ctr"/>
+          <a:lstStyle/>
+          <a:p>
+            <a:pPr algn="ctr"/>
+          </a:p>
+        </p:txBody>
+      </p:sp>
+      <p:sp>
+        <p:nvSpPr>
+          <p:cNvPr id="9" name="TextBox 8"/>
+          <p:cNvSpPr txBox="1"/>
+          <p:nvPr/>
+        </p:nvSpPr>
+        <p:spPr>
+          <a:xfrm>
+            <a:off x="6446520" y="2084832"/>
+            <a:ext cx="4754880" cy="1728216"/>
+          </a:xfrm>
+          <a:prstGeom prst="rect">
+            <a:avLst/>
+          </a:prstGeom>
+          <a:noFill/>
+        </p:spPr>
+        <p:txBody>
+          <a:bodyPr wrap="square">
+            <a:spAutoFit/>
+          </a:bodyPr>
+          <a:lstStyle/>
+          <a:p>
+            <a:pPr>
+              <a:defRPr sz="1900" b="1">
+                <a:solidFill>
+                  <a:srgbClr val="16A34A"/>
+                </a:solidFill>
+                <a:latin typeface="Segoe UI"/>
+              </a:defRPr>
+            </a:pPr>
+            <a:r>
+              <a:t>Generator Drive-End Bearing</a:t>
+            </a:r>
+          </a:p>
+          <a:p>
+            <a:pPr>
+              <a:spcBef>
+                <a:spcPts val="300"/>
+              </a:spcBef>
+              <a:spcAft>
+                <a:spcPts val="400"/>
+              </a:spcAft>
+              <a:defRPr sz="2100" b="1">
+                <a:solidFill>
+                  <a:srgbClr val="0F172A"/>
+                </a:solidFill>
+                <a:latin typeface="Segoe UI"/>
+              </a:defRPr>
+            </a:pPr>
+            <a:r>
+              <a:t>19.7 to 34.2 Days Notice</a:t>
+            </a:r>
+          </a:p>
+          <a:p>
+            <a:pPr>
+              <a:defRPr sz="1400">
+                <a:solidFill>
+                  <a:srgbClr val="1E293B"/>
+                </a:solidFill>
+                <a:latin typeface="Segoe UI"/>
+              </a:defRPr>
+            </a:pPr>
+            <a:r>
+              <a:t>472 to 820 hours advance warning! Thermal drift detected nearly a month in advance, preventing electrical fire and generator seizure.</a:t>
+            </a:r>
+          </a:p>
+        </p:txBody>
+      </p:sp>
+      <p:sp>
+        <p:nvSpPr>
+          <p:cNvPr id="10" name="Rounded Rectangle 9"/>
+          <p:cNvSpPr/>
+          <p:nvPr/>
+        </p:nvSpPr>
+        <p:spPr>
+          <a:xfrm>
+            <a:off x="731520" y="4206240"/>
+            <a:ext cx="5212080" cy="2057400"/>
+          </a:xfrm>
+          <a:prstGeom prst="roundRect">
+            <a:avLst/>
+          </a:prstGeom>
+          <a:solidFill>
+            <a:srgbClr val="F8FAFC"/>
           </a:solidFill>
           <a:ln w="19050">
             <a:solidFill>
@@ -8862,14 +8634,14 @@
       </p:sp>
       <p:sp>
         <p:nvSpPr>
-          <p:cNvPr id="7" name="TextBox 6"/>
+          <p:cNvPr id="11" name="TextBox 10"/>
           <p:cNvSpPr txBox="1"/>
           <p:nvPr/>
         </p:nvSpPr>
         <p:spPr>
           <a:xfrm>
-            <a:off x="960120" y="2103120"/>
-            <a:ext cx="4718304" cy="1691640"/>
+            <a:off x="960120" y="4370832"/>
+            <a:ext cx="4754880" cy="1728216"/>
           </a:xfrm>
           <a:prstGeom prst="rect">
             <a:avLst/>
@@ -8883,144 +8655,67 @@
           <a:lstStyle/>
           <a:p>
             <a:pPr>
-              <a:spcAft>
-                <a:spcPts val="800"/>
-              </a:spcAft>
-              <a:defRPr sz="1800" b="1">
+              <a:defRPr sz="1900" b="1">
                 <a:solidFill>
                   <a:srgbClr val="1E3A8A"/>
                 </a:solidFill>
-              </a:defRPr>
-            </a:pPr>
-            <a:r>
-              <a:t>Approach A: Deep Time-Series (LSTM / GRU / Transformers)</a:t>
-            </a:r>
-          </a:p>
-          <a:p>
-            <a:pPr>
-              <a:defRPr sz="1500">
+                <a:latin typeface="Segoe UI"/>
+              </a:defRPr>
+            </a:pPr>
+            <a:r>
+              <a:t>High-Voltage Transformer</a:t>
+            </a:r>
+          </a:p>
+          <a:p>
+            <a:pPr>
+              <a:spcBef>
+                <a:spcPts val="300"/>
+              </a:spcBef>
+              <a:spcAft>
+                <a:spcPts val="400"/>
+              </a:spcAft>
+              <a:defRPr sz="2100" b="1">
                 <a:solidFill>
                   <a:srgbClr val="0F172A"/>
                 </a:solidFill>
-              </a:defRPr>
-            </a:pPr>
-            <a:r>
-              <a:t>Recurrent or attention networks modeling long sequential dependencies directly from raw time-steps.</a:t>
-            </a:r>
-          </a:p>
-        </p:txBody>
-      </p:sp>
-      <p:sp>
-        <p:nvSpPr>
-          <p:cNvPr id="8" name="Rounded Rectangle 7"/>
+                <a:latin typeface="Segoe UI"/>
+              </a:defRPr>
+            </a:pPr>
+            <a:r>
+              <a:t>15.9 Days Notice</a:t>
+            </a:r>
+          </a:p>
+          <a:p>
+            <a:pPr>
+              <a:defRPr sz="1400">
+                <a:solidFill>
+                  <a:srgbClr val="1E293B"/>
+                </a:solidFill>
+                <a:latin typeface="Segoe UI"/>
+              </a:defRPr>
+            </a:pPr>
+            <a:r>
+              <a:t>381 hours advance warning on Phase L1 winding insulation breakdown, averting major substation flashover.</a:t>
+            </a:r>
+          </a:p>
+        </p:txBody>
+      </p:sp>
+      <p:sp>
+        <p:nvSpPr>
+          <p:cNvPr id="12" name="Rounded Rectangle 11"/>
           <p:cNvSpPr/>
           <p:nvPr/>
         </p:nvSpPr>
         <p:spPr>
           <a:xfrm>
-            <a:off x="6272784" y="1920240"/>
-            <a:ext cx="5175504" cy="2057400"/>
+            <a:off x="6217920" y="4206240"/>
+            <a:ext cx="5212080" cy="2057400"/>
           </a:xfrm>
           <a:prstGeom prst="roundRect">
             <a:avLst/>
           </a:prstGeom>
           <a:solidFill>
-            <a:srgbClr val="FFFFFF"/>
-          </a:solidFill>
-          <a:ln w="19050">
-            <a:solidFill>
-              <a:srgbClr val="0284C7"/>
-            </a:solidFill>
-          </a:ln>
-        </p:spPr>
-        <p:style>
-          <a:lnRef idx="1">
-            <a:schemeClr val="accent1"/>
-          </a:lnRef>
-          <a:fillRef idx="3">
-            <a:schemeClr val="accent1"/>
-          </a:fillRef>
-          <a:effectRef idx="2">
-            <a:schemeClr val="accent1"/>
-          </a:effectRef>
-          <a:fontRef idx="minor">
-            <a:schemeClr val="lt1"/>
-          </a:fontRef>
-        </p:style>
-        <p:txBody>
-          <a:bodyPr rtlCol="0" anchor="ctr"/>
-          <a:lstStyle/>
-          <a:p>
-            <a:pPr algn="ctr"/>
-          </a:p>
-        </p:txBody>
-      </p:sp>
-      <p:sp>
-        <p:nvSpPr>
-          <p:cNvPr id="9" name="TextBox 8"/>
-          <p:cNvSpPr txBox="1"/>
-          <p:nvPr/>
-        </p:nvSpPr>
-        <p:spPr>
-          <a:xfrm>
-            <a:off x="6501384" y="2103120"/>
-            <a:ext cx="4718304" cy="1691640"/>
-          </a:xfrm>
-          <a:prstGeom prst="rect">
-            <a:avLst/>
-          </a:prstGeom>
-          <a:noFill/>
-        </p:spPr>
-        <p:txBody>
-          <a:bodyPr wrap="square">
-            <a:spAutoFit/>
-          </a:bodyPr>
-          <a:lstStyle/>
-          <a:p>
-            <a:pPr>
-              <a:spcAft>
-                <a:spcPts val="800"/>
-              </a:spcAft>
-              <a:defRPr sz="1800" b="1">
-                <a:solidFill>
-                  <a:srgbClr val="0284C7"/>
-                </a:solidFill>
-              </a:defRPr>
-            </a:pPr>
-            <a:r>
-              <a:t>Approach B: Unsupervised Autoencoders (Normal Behavior Modeling)</a:t>
-            </a:r>
-          </a:p>
-          <a:p>
-            <a:pPr>
-              <a:defRPr sz="1500">
-                <a:solidFill>
-                  <a:srgbClr val="0F172A"/>
-                </a:solidFill>
-              </a:defRPr>
-            </a:pPr>
-            <a:r>
-              <a:t>Neural networks trained only on healthy data to predict expected values; high reconstruction error signals fault.</a:t>
-            </a:r>
-          </a:p>
-        </p:txBody>
-      </p:sp>
-      <p:sp>
-        <p:nvSpPr>
-          <p:cNvPr id="10" name="Rounded Rectangle 9"/>
-          <p:cNvSpPr/>
-          <p:nvPr/>
-        </p:nvSpPr>
-        <p:spPr>
-          <a:xfrm>
-            <a:off x="731520" y="4160520"/>
-            <a:ext cx="5175504" cy="2057400"/>
-          </a:xfrm>
-          <a:prstGeom prst="roundRect">
-            <a:avLst/>
-          </a:prstGeom>
-          <a:solidFill>
-            <a:srgbClr val="FFFFFF"/>
+            <a:srgbClr val="F8FAFC"/>
           </a:solidFill>
           <a:ln w="19050">
             <a:solidFill>
@@ -9052,14 +8747,14 @@
       </p:sp>
       <p:sp>
         <p:nvSpPr>
-          <p:cNvPr id="11" name="TextBox 10"/>
+          <p:cNvPr id="13" name="TextBox 12"/>
           <p:cNvSpPr txBox="1"/>
           <p:nvPr/>
         </p:nvSpPr>
         <p:spPr>
           <a:xfrm>
-            <a:off x="960120" y="4343400"/>
-            <a:ext cx="4718304" cy="1691640"/>
+            <a:off x="6446520" y="4370832"/>
+            <a:ext cx="4754880" cy="1728216"/>
           </a:xfrm>
           <a:prstGeom prst="rect">
             <a:avLst/>
@@ -9073,124 +8768,47 @@
           <a:lstStyle/>
           <a:p>
             <a:pPr>
-              <a:spcAft>
-                <a:spcPts val="800"/>
-              </a:spcAft>
-              <a:defRPr sz="1800" b="1">
+              <a:defRPr sz="1900" b="1">
                 <a:solidFill>
                   <a:srgbClr val="D97706"/>
                 </a:solidFill>
-              </a:defRPr>
-            </a:pPr>
-            <a:r>
-              <a:t>Approach C: Classical Vibration Signal Processing (FFT / Envelope)</a:t>
-            </a:r>
-          </a:p>
-          <a:p>
-            <a:pPr>
-              <a:defRPr sz="1500">
+                <a:latin typeface="Segoe UI"/>
+              </a:defRPr>
+            </a:pPr>
+            <a:r>
+              <a:t>Hydraulic Pitch Group</a:t>
+            </a:r>
+          </a:p>
+          <a:p>
+            <a:pPr>
+              <a:spcBef>
+                <a:spcPts val="300"/>
+              </a:spcBef>
+              <a:spcAft>
+                <a:spcPts val="400"/>
+              </a:spcAft>
+              <a:defRPr sz="2100" b="1">
                 <a:solidFill>
                   <a:srgbClr val="0F172A"/>
                 </a:solidFill>
-              </a:defRPr>
-            </a:pPr>
-            <a:r>
-              <a:t>Fourier transforms and spectral analysis on high-frequency (kHz) accelerometers placed on bearing housings.</a:t>
-            </a:r>
-          </a:p>
-        </p:txBody>
-      </p:sp>
-      <p:sp>
-        <p:nvSpPr>
-          <p:cNvPr id="12" name="Rounded Rectangle 11"/>
-          <p:cNvSpPr/>
-          <p:nvPr/>
-        </p:nvSpPr>
-        <p:spPr>
-          <a:xfrm>
-            <a:off x="6272784" y="4160520"/>
-            <a:ext cx="5175504" cy="2057400"/>
-          </a:xfrm>
-          <a:prstGeom prst="roundRect">
-            <a:avLst/>
-          </a:prstGeom>
-          <a:solidFill>
-            <a:srgbClr val="FFFFFF"/>
-          </a:solidFill>
-          <a:ln w="19050">
-            <a:solidFill>
-              <a:srgbClr val="DC2626"/>
-            </a:solidFill>
-          </a:ln>
-        </p:spPr>
-        <p:style>
-          <a:lnRef idx="1">
-            <a:schemeClr val="accent1"/>
-          </a:lnRef>
-          <a:fillRef idx="3">
-            <a:schemeClr val="accent1"/>
-          </a:fillRef>
-          <a:effectRef idx="2">
-            <a:schemeClr val="accent1"/>
-          </a:effectRef>
-          <a:fontRef idx="minor">
-            <a:schemeClr val="lt1"/>
-          </a:fontRef>
-        </p:style>
-        <p:txBody>
-          <a:bodyPr rtlCol="0" anchor="ctr"/>
-          <a:lstStyle/>
-          <a:p>
-            <a:pPr algn="ctr"/>
-          </a:p>
-        </p:txBody>
-      </p:sp>
-      <p:sp>
-        <p:nvSpPr>
-          <p:cNvPr id="13" name="TextBox 12"/>
-          <p:cNvSpPr txBox="1"/>
-          <p:nvPr/>
-        </p:nvSpPr>
-        <p:spPr>
-          <a:xfrm>
-            <a:off x="6501384" y="4343400"/>
-            <a:ext cx="4718304" cy="1691640"/>
-          </a:xfrm>
-          <a:prstGeom prst="rect">
-            <a:avLst/>
-          </a:prstGeom>
-          <a:noFill/>
-        </p:spPr>
-        <p:txBody>
-          <a:bodyPr wrap="square">
-            <a:spAutoFit/>
-          </a:bodyPr>
-          <a:lstStyle/>
-          <a:p>
-            <a:pPr>
-              <a:spcAft>
-                <a:spcPts val="800"/>
-              </a:spcAft>
-              <a:defRPr sz="1800" b="1">
-                <a:solidFill>
-                  <a:srgbClr val="DC2626"/>
-                </a:solidFill>
-              </a:defRPr>
-            </a:pPr>
-            <a:r>
-              <a:t>Approach D: Synthetic Minority Oversampling (SMOTE / GANs)</a:t>
-            </a:r>
-          </a:p>
-          <a:p>
-            <a:pPr>
-              <a:defRPr sz="1500">
-                <a:solidFill>
-                  <a:srgbClr val="0F172A"/>
-                </a:solidFill>
-              </a:defRPr>
-            </a:pPr>
-            <a:r>
-              <a:t>Algorithmic generation of artificial failure samples to balance positive and negative class ratios.</a:t>
+                <a:latin typeface="Segoe UI"/>
+              </a:defRPr>
+            </a:pPr>
+            <a:r>
+              <a:t>8.0 Days Notice</a:t>
+            </a:r>
+          </a:p>
+          <a:p>
+            <a:pPr>
+              <a:defRPr sz="1400">
+                <a:solidFill>
+                  <a:srgbClr val="1E293B"/>
+                </a:solidFill>
+                <a:latin typeface="Segoe UI"/>
+              </a:defRPr>
+            </a:pPr>
+            <a:r>
+              <a:t>192 hours advance warning on proportional pitch valve pressure loss, allowing safe blade feathering before catastrophic overspeed.</a:t>
             </a:r>
           </a:p>
         </p:txBody>
@@ -9228,7 +8846,7 @@
             <a:avLst/>
           </a:prstGeom>
           <a:solidFill>
-            <a:srgbClr val="F8FAFC"/>
+            <a:srgbClr val="FFFFFF"/>
           </a:solidFill>
           <a:ln>
             <a:noFill/>
@@ -9265,7 +8883,7 @@
         <p:spPr>
           <a:xfrm>
             <a:off x="731520" y="365760"/>
-            <a:ext cx="10698480" cy="365760"/>
+            <a:ext cx="10698480" cy="320040"/>
           </a:xfrm>
           <a:prstGeom prst="rect">
             <a:avLst/>
@@ -9279,14 +8897,15 @@
           <a:lstStyle/>
           <a:p>
             <a:pPr>
-              <a:defRPr sz="1300" b="1">
+              <a:defRPr sz="1400" b="1">
                 <a:solidFill>
                   <a:srgbClr val="0284C7"/>
                 </a:solidFill>
-              </a:defRPr>
-            </a:pPr>
-            <a:r>
-              <a:t>CRITICAL EVALUATION</a:t>
+                <a:latin typeface="Segoe UI"/>
+              </a:defRPr>
+            </a:pPr>
+            <a:r>
+              <a:t>STEP 8: EXPLAINABLE AI</a:t>
             </a:r>
           </a:p>
         </p:txBody>
@@ -9300,7 +8919,7 @@
         <p:spPr>
           <a:xfrm>
             <a:off x="731520" y="685800"/>
-            <a:ext cx="10698480" cy="640080"/>
+            <a:ext cx="10698480" cy="685800"/>
           </a:xfrm>
           <a:prstGeom prst="rect">
             <a:avLst/>
@@ -9314,14 +8933,15 @@
           <a:lstStyle/>
           <a:p>
             <a:pPr>
-              <a:defRPr sz="3000" b="1">
+              <a:defRPr sz="3200" b="1">
                 <a:solidFill>
                   <a:srgbClr val="0F172A"/>
                 </a:solidFill>
-              </a:defRPr>
-            </a:pPr>
-            <a:r>
-              <a:t>Why We Didn't Choose Them &amp; What Is Future Scope</a:t>
+                <a:latin typeface="Segoe UI"/>
+              </a:defRPr>
+            </a:pPr>
+            <a:r>
+              <a:t>Opening the Black Box: Why Engineers Trust the Model</a:t>
             </a:r>
           </a:p>
         </p:txBody>
@@ -9334,7 +8954,7 @@
         </p:nvSpPr>
         <p:spPr>
           <a:xfrm>
-            <a:off x="731520" y="1325880"/>
+            <a:off x="731520" y="1371600"/>
             <a:ext cx="10698480" cy="411480"/>
           </a:xfrm>
           <a:prstGeom prst="rect">
@@ -9349,14 +8969,15 @@
           <a:lstStyle/>
           <a:p>
             <a:pPr>
-              <a:defRPr sz="1700">
+              <a:defRPr sz="1800">
                 <a:solidFill>
                   <a:srgbClr val="475569"/>
                 </a:solidFill>
-              </a:defRPr>
-            </a:pPr>
-            <a:r>
-              <a:t>Clear justification of design trade-offs: what was rejected vs. what is a valuable future upgrade</a:t>
+                <a:latin typeface="Segoe UI"/>
+              </a:defRPr>
+            </a:pPr>
+            <a:r>
+              <a:t>Using SHAP &amp; LIME to prove that AI alerts point directly to the failing mechanical parts</a:t>
             </a:r>
           </a:p>
         </p:txBody>
@@ -9370,17 +8991,17 @@
         <p:spPr>
           <a:xfrm>
             <a:off x="731520" y="1920240"/>
-            <a:ext cx="5175504" cy="4297680"/>
+            <a:ext cx="5212080" cy="4389120"/>
           </a:xfrm>
           <a:prstGeom prst="roundRect">
             <a:avLst/>
           </a:prstGeom>
           <a:solidFill>
-            <a:srgbClr val="FFFFFF"/>
+            <a:srgbClr val="F8FAFC"/>
           </a:solidFill>
           <a:ln w="19050">
             <a:solidFill>
-              <a:srgbClr val="DC2626"/>
+              <a:srgbClr val="1E3A8A"/>
             </a:solidFill>
           </a:ln>
         </p:spPr>
@@ -9414,8 +9035,8 @@
         </p:nvSpPr>
         <p:spPr>
           <a:xfrm>
-            <a:off x="1005840" y="2194560"/>
-            <a:ext cx="4626864" cy="3749039"/>
+            <a:off x="1005840" y="2103120"/>
+            <a:ext cx="4663440" cy="4023360"/>
           </a:xfrm>
           <a:prstGeom prst="rect">
             <a:avLst/>
@@ -9430,106 +9051,81 @@
           <a:p>
             <a:pPr>
               <a:spcAft>
-                <a:spcPts val="1400"/>
+                <a:spcPts val="1200"/>
               </a:spcAft>
               <a:defRPr sz="2200" b="1">
                 <a:solidFill>
-                  <a:srgbClr val="DC2626"/>
-                </a:solidFill>
-              </a:defRPr>
-            </a:pPr>
-            <a:r>
-              <a:t>Rejected / Not Recommended</a:t>
-            </a:r>
-          </a:p>
-          <a:p>
-            <a:pPr>
-              <a:spcBef>
-                <a:spcPts val="400"/>
-              </a:spcBef>
-              <a:defRPr sz="1600" b="1">
-                <a:solidFill>
-                  <a:srgbClr val="0F172A"/>
-                </a:solidFill>
-              </a:defRPr>
-            </a:pPr>
-            <a:r>
-              <a:t>Synthetic Data (SMOTE/GANs): REJECTED</a:t>
-            </a:r>
-          </a:p>
-          <a:p>
-            <a:pPr>
-              <a:spcAft>
-                <a:spcPts val="800"/>
-              </a:spcAft>
-              <a:defRPr sz="1400">
-                <a:solidFill>
-                  <a:srgbClr val="475569"/>
-                </a:solidFill>
-              </a:defRPr>
-            </a:pPr>
-            <a:r>
-              <a:t>Fabricates physically impossible operating states (e.g., power at zero wind). Ruled out to preserve physical validity.</a:t>
-            </a:r>
-          </a:p>
-          <a:p>
-            <a:pPr>
-              <a:spcBef>
-                <a:spcPts val="400"/>
-              </a:spcBef>
-              <a:defRPr sz="1600" b="1">
-                <a:solidFill>
-                  <a:srgbClr val="0F172A"/>
-                </a:solidFill>
-              </a:defRPr>
-            </a:pPr>
-            <a:r>
-              <a:t>Unsupervised Clustering (K-Means/PCA): NOT WORTH IT</a:t>
-            </a:r>
-          </a:p>
-          <a:p>
-            <a:pPr>
-              <a:spcAft>
-                <a:spcPts val="800"/>
-              </a:spcAft>
-              <a:defRPr sz="1400">
-                <a:solidFill>
-                  <a:srgbClr val="475569"/>
-                </a:solidFill>
-              </a:defRPr>
-            </a:pPr>
-            <a:r>
-              <a:t>Produced intolerable false alarm rates on offshore weather outliers. Simple clustering lacks temporal context.</a:t>
-            </a:r>
-          </a:p>
-          <a:p>
-            <a:pPr>
-              <a:spcBef>
-                <a:spcPts val="400"/>
-              </a:spcBef>
-              <a:defRPr sz="1600" b="1">
-                <a:solidFill>
-                  <a:srgbClr val="0F172A"/>
-                </a:solidFill>
-              </a:defRPr>
-            </a:pPr>
-            <a:r>
-              <a:t>End-to-End Deep Learning for 10-Min SCADA: REJECTED</a:t>
-            </a:r>
-          </a:p>
-          <a:p>
-            <a:pPr>
-              <a:spcAft>
-                <a:spcPts val="800"/>
-              </a:spcAft>
-              <a:defRPr sz="1400">
-                <a:solidFill>
-                  <a:srgbClr val="475569"/>
-                </a:solidFill>
-              </a:defRPr>
-            </a:pPr>
-            <a:r>
-              <a:t>With 22 total events, deep neural nets severely overfit, require heavy compute, and destroy interpretability.</a:t>
+                  <a:srgbClr val="1E3A8A"/>
+                </a:solidFill>
+                <a:latin typeface="Segoe UI"/>
+              </a:defRPr>
+            </a:pPr>
+            <a:r>
+              <a:t>The Trust Problem: Why XAI Is Mandatory</a:t>
+            </a:r>
+          </a:p>
+          <a:p>
+            <a:pPr>
+              <a:spcAft>
+                <a:spcPts val="1000"/>
+              </a:spcAft>
+              <a:defRPr sz="1600">
+                <a:solidFill>
+                  <a:srgbClr val="1E293B"/>
+                </a:solidFill>
+                <a:latin typeface="Segoe UI"/>
+              </a:defRPr>
+            </a:pPr>
+            <a:r>
+              <a:t>• If an AI alerts: 'Turbine 21 is at 90% Risk', the maintenance manager asks: 'Which part is broken?'</a:t>
+            </a:r>
+          </a:p>
+          <a:p>
+            <a:pPr>
+              <a:spcAft>
+                <a:spcPts val="1000"/>
+              </a:spcAft>
+              <a:defRPr sz="1600">
+                <a:solidFill>
+                  <a:srgbClr val="1E293B"/>
+                </a:solidFill>
+                <a:latin typeface="Segoe UI"/>
+              </a:defRPr>
+            </a:pPr>
+            <a:r>
+              <a:t>• If the model cannot explain itself, engineers will ignore the alert to avoid wasting a $30,000 boat charter.</a:t>
+            </a:r>
+          </a:p>
+          <a:p>
+            <a:pPr>
+              <a:spcAft>
+                <a:spcPts val="1000"/>
+              </a:spcAft>
+              <a:defRPr sz="1600">
+                <a:solidFill>
+                  <a:srgbClr val="1E293B"/>
+                </a:solidFill>
+                <a:latin typeface="Segoe UI"/>
+              </a:defRPr>
+            </a:pPr>
+            <a:r>
+              <a:t>• TreeSHAP: Calculates exact additive risk contributions (in Shapley points) for every sensor channel.</a:t>
+            </a:r>
+          </a:p>
+          <a:p>
+            <a:pPr>
+              <a:spcAft>
+                <a:spcPts val="1000"/>
+              </a:spcAft>
+              <a:defRPr sz="1600">
+                <a:solidFill>
+                  <a:srgbClr val="1E293B"/>
+                </a:solidFill>
+                <a:latin typeface="Segoe UI"/>
+              </a:defRPr>
+            </a:pPr>
+            <a:r>
+              <a:t>• LIME: Generates human-readable 'if-then' diagnostic rules explaining individual alert moments.</a:t>
             </a:r>
           </a:p>
         </p:txBody>
@@ -9542,18 +9138,18 @@
         </p:nvSpPr>
         <p:spPr>
           <a:xfrm>
-            <a:off x="6272784" y="1920240"/>
-            <a:ext cx="5175504" cy="4297680"/>
+            <a:off x="6217920" y="1920240"/>
+            <a:ext cx="5212080" cy="4389120"/>
           </a:xfrm>
           <a:prstGeom prst="roundRect">
             <a:avLst/>
           </a:prstGeom>
           <a:solidFill>
-            <a:srgbClr val="FFFFFF"/>
+            <a:srgbClr val="F8FAFC"/>
           </a:solidFill>
           <a:ln w="19050">
             <a:solidFill>
-              <a:srgbClr val="0284C7"/>
+              <a:srgbClr val="16A34A"/>
             </a:solidFill>
           </a:ln>
         </p:spPr>
@@ -9587,8 +9183,8 @@
         </p:nvSpPr>
         <p:spPr>
           <a:xfrm>
-            <a:off x="6547104" y="2194560"/>
-            <a:ext cx="4626864" cy="3749039"/>
+            <a:off x="6492240" y="2103120"/>
+            <a:ext cx="4663440" cy="4023360"/>
           </a:xfrm>
           <a:prstGeom prst="rect">
             <a:avLst/>
@@ -9603,106 +9199,81 @@
           <a:p>
             <a:pPr>
               <a:spcAft>
-                <a:spcPts val="1400"/>
+                <a:spcPts val="1200"/>
               </a:spcAft>
               <a:defRPr sz="2200" b="1">
                 <a:solidFill>
-                  <a:srgbClr val="0284C7"/>
-                </a:solidFill>
-              </a:defRPr>
-            </a:pPr>
-            <a:r>
-              <a:t>Valuable Future Scope</a:t>
-            </a:r>
-          </a:p>
-          <a:p>
-            <a:pPr>
-              <a:spcBef>
-                <a:spcPts val="400"/>
-              </a:spcBef>
-              <a:defRPr sz="1600" b="1">
-                <a:solidFill>
-                  <a:srgbClr val="0284C7"/>
-                </a:solidFill>
-              </a:defRPr>
-            </a:pPr>
-            <a:r>
-              <a:t>Physics-Informed Neural Networks (PINNs): FUTURE SCOPE</a:t>
-            </a:r>
-          </a:p>
-          <a:p>
-            <a:pPr>
-              <a:spcAft>
-                <a:spcPts val="800"/>
-              </a:spcAft>
-              <a:defRPr sz="1400">
-                <a:solidFill>
-                  <a:srgbClr val="0F172A"/>
-                </a:solidFill>
-              </a:defRPr>
-            </a:pPr>
-            <a:r>
-              <a:t>Embedding Navier-Stokes and heat diffusion differential equations directly into loss functions for thermodynamic modeling.</a:t>
-            </a:r>
-          </a:p>
-          <a:p>
-            <a:pPr>
-              <a:spcBef>
-                <a:spcPts val="400"/>
-              </a:spcBef>
-              <a:defRPr sz="1600" b="1">
-                <a:solidFill>
-                  <a:srgbClr val="0284C7"/>
-                </a:solidFill>
-              </a:defRPr>
-            </a:pPr>
-            <a:r>
-              <a:t>High-Frequency Vibration Telemetry: FUTURE SCOPE</a:t>
-            </a:r>
-          </a:p>
-          <a:p>
-            <a:pPr>
-              <a:spcAft>
-                <a:spcPts val="800"/>
-              </a:spcAft>
-              <a:defRPr sz="1400">
-                <a:solidFill>
-                  <a:srgbClr val="0F172A"/>
-                </a:solidFill>
-              </a:defRPr>
-            </a:pPr>
-            <a:r>
-              <a:t>Integrating 10-kHz accelerometer streams for bearing inner/outer race defect frequency analysis (BPFO/BPFI).</a:t>
-            </a:r>
-          </a:p>
-          <a:p>
-            <a:pPr>
-              <a:spcBef>
-                <a:spcPts val="400"/>
-              </a:spcBef>
-              <a:defRPr sz="1600" b="1">
-                <a:solidFill>
-                  <a:srgbClr val="0284C7"/>
-                </a:solidFill>
-              </a:defRPr>
-            </a:pPr>
-            <a:r>
-              <a:t>Cross-Farm Transfer Learning: FUTURE SCOPE</a:t>
-            </a:r>
-          </a:p>
-          <a:p>
-            <a:pPr>
-              <a:spcAft>
-                <a:spcPts val="800"/>
-              </a:spcAft>
-              <a:defRPr sz="1400">
-                <a:solidFill>
-                  <a:srgbClr val="0F172A"/>
-                </a:solidFill>
-              </a:defRPr>
-            </a:pPr>
-            <a:r>
-              <a:t>Domain-adaptation models transferring failure patterns learned from Farm A (Portugal) to offshore Farm C (Germany).</a:t>
+                  <a:srgbClr val="16A34A"/>
+                </a:solidFill>
+                <a:latin typeface="Segoe UI"/>
+              </a:defRPr>
+            </a:pPr>
+            <a:r>
+              <a:t>Physical Ground-Truth Verifications</a:t>
+            </a:r>
+          </a:p>
+          <a:p>
+            <a:pPr>
+              <a:spcAft>
+                <a:spcPts val="1000"/>
+              </a:spcAft>
+              <a:defRPr sz="1600">
+                <a:solidFill>
+                  <a:srgbClr val="1E293B"/>
+                </a:solidFill>
+                <a:latin typeface="Segoe UI"/>
+              </a:defRPr>
+            </a:pPr>
+            <a:r>
+              <a:t>• Gearbox Failure (Ev 72): Top SHAP feature was temp_gearbox_bearing (+4.3°C rise) and oil heat. Exact match to friction physics.</a:t>
+            </a:r>
+          </a:p>
+          <a:p>
+            <a:pPr>
+              <a:spcAft>
+                <a:spcPts val="1000"/>
+              </a:spcAft>
+              <a:defRPr sz="1600">
+                <a:solidFill>
+                  <a:srgbClr val="1E293B"/>
+                </a:solidFill>
+                <a:latin typeface="Segoe UI"/>
+              </a:defRPr>
+            </a:pPr>
+            <a:r>
+              <a:t>• Generator Bearing Failure (Ev 0): Drive-end bearing surged to 76°C, completely dominating SHAP attributions.</a:t>
+            </a:r>
+          </a:p>
+          <a:p>
+            <a:pPr>
+              <a:spcAft>
+                <a:spcPts val="1000"/>
+              </a:spcAft>
+              <a:defRPr sz="1600">
+                <a:solidFill>
+                  <a:srgbClr val="1E293B"/>
+                </a:solidFill>
+                <a:latin typeface="Segoe UI"/>
+              </a:defRPr>
+            </a:pPr>
+            <a:r>
+              <a:t>• Transformer Surge (Ev 68): Phase L1 reached 117°C, correctly driving local alert triggers.</a:t>
+            </a:r>
+          </a:p>
+          <a:p>
+            <a:pPr>
+              <a:spcAft>
+                <a:spcPts val="1000"/>
+              </a:spcAft>
+              <a:defRPr sz="1600">
+                <a:solidFill>
+                  <a:srgbClr val="1E293B"/>
+                </a:solidFill>
+                <a:latin typeface="Segoe UI"/>
+              </a:defRPr>
+            </a:pPr>
+            <a:r>
+              <a:t>• Healthy Turbine (Ev 25): Negative scores across all components, keeping false alarms at zero.</a:t>
             </a:r>
           </a:p>
         </p:txBody>
